--- a/BCHAIN-ACCESS_Package/images/Figure_2.pptx
+++ b/BCHAIN-ACCESS_Package/images/Figure_2.pptx
@@ -1,19 +1,19 @@
 
 <file path=ppt/presentation.xml><?xml version="1.0" encoding="utf-8"?>
-<p:presentation xmlns:a="http://schemas.openxmlformats.org/drawingml/2006/main" xmlns:r="http://schemas.openxmlformats.org/officeDocument/2006/relationships" xmlns:p="http://schemas.openxmlformats.org/presentationml/2006/main" saveSubsetFonts="1" autoCompressPictures="0">
+<p:presentation xmlns:a="http://schemas.openxmlformats.org/drawingml/2006/main" xmlns:r="http://schemas.openxmlformats.org/officeDocument/2006/relationships" xmlns:p="http://schemas.openxmlformats.org/presentationml/2006/main" embedTrueTypeFonts="1" saveSubsetFonts="1">
   <p:sldMasterIdLst>
     <p:sldMasterId id="2147483648" r:id="rId1"/>
   </p:sldMasterIdLst>
   <p:sldIdLst>
-    <p:sldId id="256" r:id="rId7"/>
+    <p:sldId id="256" r:id="rId2"/>
   </p:sldIdLst>
-  <p:sldSz cx="12191695" cy="7140850" type="screen4x3"/>
+  <p:sldSz cx="12801600" cy="7493000"/>
   <p:notesSz cx="6858000" cy="9144000"/>
   <p:defaultTextStyle>
     <a:defPPr>
       <a:defRPr lang="en-US"/>
     </a:defPPr>
-    <a:lvl1pPr marL="0" algn="l" defTabSz="457200" rtl="0" eaLnBrk="1" latinLnBrk="0" hangingPunct="1">
+    <a:lvl1pPr marL="0" algn="l" defTabSz="914400" rtl="0" eaLnBrk="1" latinLnBrk="0" hangingPunct="1">
       <a:defRPr sz="1800" kern="1200">
         <a:solidFill>
           <a:schemeClr val="tx1"/>
@@ -23,7 +23,7 @@
         <a:cs typeface="+mn-cs"/>
       </a:defRPr>
     </a:lvl1pPr>
-    <a:lvl2pPr marL="457200" algn="l" defTabSz="457200" rtl="0" eaLnBrk="1" latinLnBrk="0" hangingPunct="1">
+    <a:lvl2pPr marL="457200" algn="l" defTabSz="914400" rtl="0" eaLnBrk="1" latinLnBrk="0" hangingPunct="1">
       <a:defRPr sz="1800" kern="1200">
         <a:solidFill>
           <a:schemeClr val="tx1"/>
@@ -33,7 +33,7 @@
         <a:cs typeface="+mn-cs"/>
       </a:defRPr>
     </a:lvl2pPr>
-    <a:lvl3pPr marL="914400" algn="l" defTabSz="457200" rtl="0" eaLnBrk="1" latinLnBrk="0" hangingPunct="1">
+    <a:lvl3pPr marL="914400" algn="l" defTabSz="914400" rtl="0" eaLnBrk="1" latinLnBrk="0" hangingPunct="1">
       <a:defRPr sz="1800" kern="1200">
         <a:solidFill>
           <a:schemeClr val="tx1"/>
@@ -43,7 +43,7 @@
         <a:cs typeface="+mn-cs"/>
       </a:defRPr>
     </a:lvl3pPr>
-    <a:lvl4pPr marL="1371600" algn="l" defTabSz="457200" rtl="0" eaLnBrk="1" latinLnBrk="0" hangingPunct="1">
+    <a:lvl4pPr marL="1371600" algn="l" defTabSz="914400" rtl="0" eaLnBrk="1" latinLnBrk="0" hangingPunct="1">
       <a:defRPr sz="1800" kern="1200">
         <a:solidFill>
           <a:schemeClr val="tx1"/>
@@ -53,7 +53,7 @@
         <a:cs typeface="+mn-cs"/>
       </a:defRPr>
     </a:lvl4pPr>
-    <a:lvl5pPr marL="1828800" algn="l" defTabSz="457200" rtl="0" eaLnBrk="1" latinLnBrk="0" hangingPunct="1">
+    <a:lvl5pPr marL="1828800" algn="l" defTabSz="914400" rtl="0" eaLnBrk="1" latinLnBrk="0" hangingPunct="1">
       <a:defRPr sz="1800" kern="1200">
         <a:solidFill>
           <a:schemeClr val="tx1"/>
@@ -63,7 +63,7 @@
         <a:cs typeface="+mn-cs"/>
       </a:defRPr>
     </a:lvl5pPr>
-    <a:lvl6pPr marL="2286000" algn="l" defTabSz="457200" rtl="0" eaLnBrk="1" latinLnBrk="0" hangingPunct="1">
+    <a:lvl6pPr marL="2286000" algn="l" defTabSz="914400" rtl="0" eaLnBrk="1" latinLnBrk="0" hangingPunct="1">
       <a:defRPr sz="1800" kern="1200">
         <a:solidFill>
           <a:schemeClr val="tx1"/>
@@ -73,7 +73,7 @@
         <a:cs typeface="+mn-cs"/>
       </a:defRPr>
     </a:lvl6pPr>
-    <a:lvl7pPr marL="2743200" algn="l" defTabSz="457200" rtl="0" eaLnBrk="1" latinLnBrk="0" hangingPunct="1">
+    <a:lvl7pPr marL="2743200" algn="l" defTabSz="914400" rtl="0" eaLnBrk="1" latinLnBrk="0" hangingPunct="1">
       <a:defRPr sz="1800" kern="1200">
         <a:solidFill>
           <a:schemeClr val="tx1"/>
@@ -83,7 +83,7 @@
         <a:cs typeface="+mn-cs"/>
       </a:defRPr>
     </a:lvl7pPr>
-    <a:lvl8pPr marL="3200400" algn="l" defTabSz="457200" rtl="0" eaLnBrk="1" latinLnBrk="0" hangingPunct="1">
+    <a:lvl8pPr marL="3200400" algn="l" defTabSz="914400" rtl="0" eaLnBrk="1" latinLnBrk="0" hangingPunct="1">
       <a:defRPr sz="1800" kern="1200">
         <a:solidFill>
           <a:schemeClr val="tx1"/>
@@ -93,7 +93,7 @@
         <a:cs typeface="+mn-cs"/>
       </a:defRPr>
     </a:lvl8pPr>
-    <a:lvl9pPr marL="3657600" algn="l" defTabSz="457200" rtl="0" eaLnBrk="1" latinLnBrk="0" hangingPunct="1">
+    <a:lvl9pPr marL="3657600" algn="l" defTabSz="914400" rtl="0" eaLnBrk="1" latinLnBrk="0" hangingPunct="1">
       <a:defRPr sz="1800" kern="1200">
         <a:solidFill>
           <a:schemeClr val="tx1"/>
@@ -104,6 +104,22 @@
       </a:defRPr>
     </a:lvl9pPr>
   </p:defaultTextStyle>
+  <p:extLst>
+    <p:ext uri="{EFAFB233-063F-42B5-8137-9DF3F51BA10A}">
+      <p15:sldGuideLst xmlns:p15="http://schemas.microsoft.com/office/powerpoint/2012/main">
+        <p15:guide id="1" orient="horz" pos="2160" userDrawn="1">
+          <p15:clr>
+            <a:srgbClr val="A4A3A4"/>
+          </p15:clr>
+        </p15:guide>
+        <p15:guide id="2" pos="2881" userDrawn="1">
+          <p15:clr>
+            <a:srgbClr val="A4A3A4"/>
+          </p15:clr>
+        </p15:guide>
+      </p15:sldGuideLst>
+    </p:ext>
+  </p:extLst>
 </p:presentation>
 </file>
 
@@ -136,7 +152,7 @@
         </p:nvSpPr>
         <p:spPr>
           <a:xfrm>
-            <a:off x="685800" y="2130425"/>
+            <a:off x="685801" y="2130427"/>
             <a:ext cx="7772400" cy="1470025"/>
           </a:xfrm>
         </p:spPr>
@@ -145,10 +161,9 @@
           <a:lstStyle/>
           <a:p>
             <a:r>
-              <a:rPr lang="en-US" smtClean="0"/>
+              <a:rPr lang="en-US"/>
               <a:t>Click to edit Master title style</a:t>
             </a:r>
-            <a:endParaRPr lang="en-US"/>
           </a:p>
         </p:txBody>
       </p:sp>
@@ -164,7 +179,7 @@
         </p:nvSpPr>
         <p:spPr>
           <a:xfrm>
-            <a:off x="1371600" y="3886200"/>
+            <a:off x="1371601" y="3886200"/>
             <a:ext cx="6400800" cy="1752600"/>
           </a:xfrm>
         </p:spPr>
@@ -181,7 +196,7 @@
                 </a:solidFill>
               </a:defRPr>
             </a:lvl1pPr>
-            <a:lvl2pPr marL="457200" indent="0" algn="ctr">
+            <a:lvl2pPr marL="457202" indent="0" algn="ctr">
               <a:buNone/>
               <a:defRPr>
                 <a:solidFill>
@@ -191,7 +206,7 @@
                 </a:solidFill>
               </a:defRPr>
             </a:lvl2pPr>
-            <a:lvl3pPr marL="914400" indent="0" algn="ctr">
+            <a:lvl3pPr marL="914404" indent="0" algn="ctr">
               <a:buNone/>
               <a:defRPr>
                 <a:solidFill>
@@ -201,7 +216,7 @@
                 </a:solidFill>
               </a:defRPr>
             </a:lvl3pPr>
-            <a:lvl4pPr marL="1371600" indent="0" algn="ctr">
+            <a:lvl4pPr marL="1371607" indent="0" algn="ctr">
               <a:buNone/>
               <a:defRPr>
                 <a:solidFill>
@@ -211,7 +226,7 @@
                 </a:solidFill>
               </a:defRPr>
             </a:lvl4pPr>
-            <a:lvl5pPr marL="1828800" indent="0" algn="ctr">
+            <a:lvl5pPr marL="1828809" indent="0" algn="ctr">
               <a:buNone/>
               <a:defRPr>
                 <a:solidFill>
@@ -221,7 +236,7 @@
                 </a:solidFill>
               </a:defRPr>
             </a:lvl5pPr>
-            <a:lvl6pPr marL="2286000" indent="0" algn="ctr">
+            <a:lvl6pPr marL="2286010" indent="0" algn="ctr">
               <a:buNone/>
               <a:defRPr>
                 <a:solidFill>
@@ -231,7 +246,7 @@
                 </a:solidFill>
               </a:defRPr>
             </a:lvl6pPr>
-            <a:lvl7pPr marL="2743200" indent="0" algn="ctr">
+            <a:lvl7pPr marL="2743212" indent="0" algn="ctr">
               <a:buNone/>
               <a:defRPr>
                 <a:solidFill>
@@ -241,7 +256,7 @@
                 </a:solidFill>
               </a:defRPr>
             </a:lvl7pPr>
-            <a:lvl8pPr marL="3200400" indent="0" algn="ctr">
+            <a:lvl8pPr marL="3200414" indent="0" algn="ctr">
               <a:buNone/>
               <a:defRPr>
                 <a:solidFill>
@@ -251,7 +266,7 @@
                 </a:solidFill>
               </a:defRPr>
             </a:lvl8pPr>
-            <a:lvl9pPr marL="3657600" indent="0" algn="ctr">
+            <a:lvl9pPr marL="3657617" indent="0" algn="ctr">
               <a:buNone/>
               <a:defRPr>
                 <a:solidFill>
@@ -264,10 +279,9 @@
           </a:lstStyle>
           <a:p>
             <a:r>
-              <a:rPr lang="en-US" smtClean="0"/>
+              <a:rPr lang="en-US"/>
               <a:t>Click to edit Master subtitle style</a:t>
             </a:r>
-            <a:endParaRPr lang="en-US"/>
           </a:p>
         </p:txBody>
       </p:sp>
@@ -286,9 +300,10 @@
           <a:bodyPr/>
           <a:lstStyle/>
           <a:p>
-            <a:fld id="{5BCAD085-E8A6-8845-BD4E-CB4CCA059FC4}" type="datetimeFigureOut">
+            <a:fld id="{1D8BD707-D9CF-40AE-B4C6-C98DA3205C09}" type="datetimeFigureOut">
               <a:rPr lang="en-US" smtClean="0"/>
-              <a:t>1/27/13</a:t>
+              <a:pPr/>
+              <a:t>7/13/2026</a:t>
             </a:fld>
             <a:endParaRPr lang="en-US"/>
           </a:p>
@@ -328,8 +343,9 @@
           <a:bodyPr/>
           <a:lstStyle/>
           <a:p>
-            <a:fld id="{C1FF6DA9-008F-8B48-92A6-B652298478BF}" type="slidenum">
+            <a:fld id="{B6F15528-21DE-4FAA-801E-634DDDAF4B2B}" type="slidenum">
               <a:rPr lang="en-US" smtClean="0"/>
+              <a:pPr/>
               <a:t>‹#›</a:t>
             </a:fld>
             <a:endParaRPr lang="en-US"/>
@@ -337,11 +353,6 @@
         </p:txBody>
       </p:sp>
     </p:spTree>
-    <p:extLst>
-      <p:ext uri="{BB962C8B-B14F-4D97-AF65-F5344CB8AC3E}">
-        <p14:creationId xmlns:p14="http://schemas.microsoft.com/office/powerpoint/2010/main" val="3168075583"/>
-      </p:ext>
-    </p:extLst>
   </p:cSld>
   <p:clrMapOvr>
     <a:masterClrMapping/>
@@ -382,10 +393,9 @@
           <a:lstStyle/>
           <a:p>
             <a:r>
-              <a:rPr lang="en-US" smtClean="0"/>
+              <a:rPr lang="en-US"/>
               <a:t>Click to edit Master title style</a:t>
             </a:r>
-            <a:endParaRPr lang="en-US"/>
           </a:p>
         </p:txBody>
       </p:sp>
@@ -406,38 +416,37 @@
           <a:p>
             <a:pPr lvl="0"/>
             <a:r>
-              <a:rPr lang="en-US" smtClean="0"/>
+              <a:rPr lang="en-US"/>
               <a:t>Click to edit Master text styles</a:t>
             </a:r>
           </a:p>
           <a:p>
             <a:pPr lvl="1"/>
             <a:r>
-              <a:rPr lang="en-US" smtClean="0"/>
+              <a:rPr lang="en-US"/>
               <a:t>Second level</a:t>
             </a:r>
           </a:p>
           <a:p>
             <a:pPr lvl="2"/>
             <a:r>
-              <a:rPr lang="en-US" smtClean="0"/>
+              <a:rPr lang="en-US"/>
               <a:t>Third level</a:t>
             </a:r>
           </a:p>
           <a:p>
             <a:pPr lvl="3"/>
             <a:r>
-              <a:rPr lang="en-US" smtClean="0"/>
+              <a:rPr lang="en-US"/>
               <a:t>Fourth level</a:t>
             </a:r>
           </a:p>
           <a:p>
             <a:pPr lvl="4"/>
             <a:r>
-              <a:rPr lang="en-US" smtClean="0"/>
+              <a:rPr lang="en-US"/>
               <a:t>Fifth level</a:t>
             </a:r>
-            <a:endParaRPr lang="en-US"/>
           </a:p>
         </p:txBody>
       </p:sp>
@@ -456,9 +465,10 @@
           <a:bodyPr/>
           <a:lstStyle/>
           <a:p>
-            <a:fld id="{5BCAD085-E8A6-8845-BD4E-CB4CCA059FC4}" type="datetimeFigureOut">
+            <a:fld id="{1D8BD707-D9CF-40AE-B4C6-C98DA3205C09}" type="datetimeFigureOut">
               <a:rPr lang="en-US" smtClean="0"/>
-              <a:t>1/27/13</a:t>
+              <a:pPr/>
+              <a:t>7/13/2026</a:t>
             </a:fld>
             <a:endParaRPr lang="en-US"/>
           </a:p>
@@ -498,8 +508,9 @@
           <a:bodyPr/>
           <a:lstStyle/>
           <a:p>
-            <a:fld id="{C1FF6DA9-008F-8B48-92A6-B652298478BF}" type="slidenum">
+            <a:fld id="{B6F15528-21DE-4FAA-801E-634DDDAF4B2B}" type="slidenum">
               <a:rPr lang="en-US" smtClean="0"/>
+              <a:pPr/>
               <a:t>‹#›</a:t>
             </a:fld>
             <a:endParaRPr lang="en-US"/>
@@ -507,11 +518,6 @@
         </p:txBody>
       </p:sp>
     </p:spTree>
-    <p:extLst>
-      <p:ext uri="{BB962C8B-B14F-4D97-AF65-F5344CB8AC3E}">
-        <p14:creationId xmlns:p14="http://schemas.microsoft.com/office/powerpoint/2010/main" val="2910927964"/>
-      </p:ext>
-    </p:extLst>
   </p:cSld>
   <p:clrMapOvr>
     <a:masterClrMapping/>
@@ -548,7 +554,7 @@
         </p:nvSpPr>
         <p:spPr>
           <a:xfrm>
-            <a:off x="6629400" y="274638"/>
+            <a:off x="6629400" y="274640"/>
             <a:ext cx="2057400" cy="5851525"/>
           </a:xfrm>
         </p:spPr>
@@ -557,10 +563,9 @@
           <a:lstStyle/>
           <a:p>
             <a:r>
-              <a:rPr lang="en-US" smtClean="0"/>
+              <a:rPr lang="en-US"/>
               <a:t>Click to edit Master title style</a:t>
             </a:r>
-            <a:endParaRPr lang="en-US"/>
           </a:p>
         </p:txBody>
       </p:sp>
@@ -576,8 +581,8 @@
         </p:nvSpPr>
         <p:spPr>
           <a:xfrm>
-            <a:off x="457200" y="274638"/>
-            <a:ext cx="6019800" cy="5851525"/>
+            <a:off x="457201" y="274640"/>
+            <a:ext cx="6019799" cy="5851525"/>
           </a:xfrm>
         </p:spPr>
         <p:txBody>
@@ -586,38 +591,37 @@
           <a:p>
             <a:pPr lvl="0"/>
             <a:r>
-              <a:rPr lang="en-US" smtClean="0"/>
+              <a:rPr lang="en-US"/>
               <a:t>Click to edit Master text styles</a:t>
             </a:r>
           </a:p>
           <a:p>
             <a:pPr lvl="1"/>
             <a:r>
-              <a:rPr lang="en-US" smtClean="0"/>
+              <a:rPr lang="en-US"/>
               <a:t>Second level</a:t>
             </a:r>
           </a:p>
           <a:p>
             <a:pPr lvl="2"/>
             <a:r>
-              <a:rPr lang="en-US" smtClean="0"/>
+              <a:rPr lang="en-US"/>
               <a:t>Third level</a:t>
             </a:r>
           </a:p>
           <a:p>
             <a:pPr lvl="3"/>
             <a:r>
-              <a:rPr lang="en-US" smtClean="0"/>
+              <a:rPr lang="en-US"/>
               <a:t>Fourth level</a:t>
             </a:r>
           </a:p>
           <a:p>
             <a:pPr lvl="4"/>
             <a:r>
-              <a:rPr lang="en-US" smtClean="0"/>
+              <a:rPr lang="en-US"/>
               <a:t>Fifth level</a:t>
             </a:r>
-            <a:endParaRPr lang="en-US"/>
           </a:p>
         </p:txBody>
       </p:sp>
@@ -636,9 +640,10 @@
           <a:bodyPr/>
           <a:lstStyle/>
           <a:p>
-            <a:fld id="{5BCAD085-E8A6-8845-BD4E-CB4CCA059FC4}" type="datetimeFigureOut">
+            <a:fld id="{1D8BD707-D9CF-40AE-B4C6-C98DA3205C09}" type="datetimeFigureOut">
               <a:rPr lang="en-US" smtClean="0"/>
-              <a:t>1/27/13</a:t>
+              <a:pPr/>
+              <a:t>7/13/2026</a:t>
             </a:fld>
             <a:endParaRPr lang="en-US"/>
           </a:p>
@@ -678,8 +683,9 @@
           <a:bodyPr/>
           <a:lstStyle/>
           <a:p>
-            <a:fld id="{C1FF6DA9-008F-8B48-92A6-B652298478BF}" type="slidenum">
+            <a:fld id="{B6F15528-21DE-4FAA-801E-634DDDAF4B2B}" type="slidenum">
               <a:rPr lang="en-US" smtClean="0"/>
+              <a:pPr/>
               <a:t>‹#›</a:t>
             </a:fld>
             <a:endParaRPr lang="en-US"/>
@@ -687,11 +693,6 @@
         </p:txBody>
       </p:sp>
     </p:spTree>
-    <p:extLst>
-      <p:ext uri="{BB962C8B-B14F-4D97-AF65-F5344CB8AC3E}">
-        <p14:creationId xmlns:p14="http://schemas.microsoft.com/office/powerpoint/2010/main" val="3612223792"/>
-      </p:ext>
-    </p:extLst>
   </p:cSld>
   <p:clrMapOvr>
     <a:masterClrMapping/>
@@ -732,10 +733,9 @@
           <a:lstStyle/>
           <a:p>
             <a:r>
-              <a:rPr lang="en-US" smtClean="0"/>
+              <a:rPr lang="en-US"/>
               <a:t>Click to edit Master title style</a:t>
             </a:r>
-            <a:endParaRPr lang="en-US"/>
           </a:p>
         </p:txBody>
       </p:sp>
@@ -756,38 +756,37 @@
           <a:p>
             <a:pPr lvl="0"/>
             <a:r>
-              <a:rPr lang="en-US" smtClean="0"/>
+              <a:rPr lang="en-US"/>
               <a:t>Click to edit Master text styles</a:t>
             </a:r>
           </a:p>
           <a:p>
             <a:pPr lvl="1"/>
             <a:r>
-              <a:rPr lang="en-US" smtClean="0"/>
+              <a:rPr lang="en-US"/>
               <a:t>Second level</a:t>
             </a:r>
           </a:p>
           <a:p>
             <a:pPr lvl="2"/>
             <a:r>
-              <a:rPr lang="en-US" smtClean="0"/>
+              <a:rPr lang="en-US"/>
               <a:t>Third level</a:t>
             </a:r>
           </a:p>
           <a:p>
             <a:pPr lvl="3"/>
             <a:r>
-              <a:rPr lang="en-US" smtClean="0"/>
+              <a:rPr lang="en-US"/>
               <a:t>Fourth level</a:t>
             </a:r>
           </a:p>
           <a:p>
             <a:pPr lvl="4"/>
             <a:r>
-              <a:rPr lang="en-US" smtClean="0"/>
+              <a:rPr lang="en-US"/>
               <a:t>Fifth level</a:t>
             </a:r>
-            <a:endParaRPr lang="en-US"/>
           </a:p>
         </p:txBody>
       </p:sp>
@@ -806,9 +805,10 @@
           <a:bodyPr/>
           <a:lstStyle/>
           <a:p>
-            <a:fld id="{5BCAD085-E8A6-8845-BD4E-CB4CCA059FC4}" type="datetimeFigureOut">
+            <a:fld id="{1D8BD707-D9CF-40AE-B4C6-C98DA3205C09}" type="datetimeFigureOut">
               <a:rPr lang="en-US" smtClean="0"/>
-              <a:t>1/27/13</a:t>
+              <a:pPr/>
+              <a:t>7/13/2026</a:t>
             </a:fld>
             <a:endParaRPr lang="en-US"/>
           </a:p>
@@ -848,8 +848,9 @@
           <a:bodyPr/>
           <a:lstStyle/>
           <a:p>
-            <a:fld id="{C1FF6DA9-008F-8B48-92A6-B652298478BF}" type="slidenum">
+            <a:fld id="{B6F15528-21DE-4FAA-801E-634DDDAF4B2B}" type="slidenum">
               <a:rPr lang="en-US" smtClean="0"/>
+              <a:pPr/>
               <a:t>‹#›</a:t>
             </a:fld>
             <a:endParaRPr lang="en-US"/>
@@ -857,11 +858,6 @@
         </p:txBody>
       </p:sp>
     </p:spTree>
-    <p:extLst>
-      <p:ext uri="{BB962C8B-B14F-4D97-AF65-F5344CB8AC3E}">
-        <p14:creationId xmlns:p14="http://schemas.microsoft.com/office/powerpoint/2010/main" val="2614314258"/>
-      </p:ext>
-    </p:extLst>
   </p:cSld>
   <p:clrMapOvr>
     <a:masterClrMapping/>
@@ -898,7 +894,7 @@
         </p:nvSpPr>
         <p:spPr>
           <a:xfrm>
-            <a:off x="722313" y="4406900"/>
+            <a:off x="722314" y="4406902"/>
             <a:ext cx="7772400" cy="1362075"/>
           </a:xfrm>
         </p:spPr>
@@ -906,15 +902,14 @@
           <a:bodyPr anchor="t"/>
           <a:lstStyle>
             <a:lvl1pPr algn="l">
-              <a:defRPr sz="4000" b="1" cap="all"/>
+              <a:defRPr sz="4001" b="1" cap="all"/>
             </a:lvl1pPr>
           </a:lstStyle>
           <a:p>
             <a:r>
-              <a:rPr lang="en-US" smtClean="0"/>
+              <a:rPr lang="en-US"/>
               <a:t>Click to edit Master title style</a:t>
             </a:r>
-            <a:endParaRPr lang="en-US"/>
           </a:p>
         </p:txBody>
       </p:sp>
@@ -930,7 +925,7 @@
         </p:nvSpPr>
         <p:spPr>
           <a:xfrm>
-            <a:off x="722313" y="2906713"/>
+            <a:off x="722314" y="2906715"/>
             <a:ext cx="7772400" cy="1500187"/>
           </a:xfrm>
         </p:spPr>
@@ -947,7 +942,7 @@
                 </a:solidFill>
               </a:defRPr>
             </a:lvl1pPr>
-            <a:lvl2pPr marL="457200" indent="0">
+            <a:lvl2pPr marL="457202" indent="0">
               <a:buNone/>
               <a:defRPr sz="1800">
                 <a:solidFill>
@@ -957,7 +952,7 @@
                 </a:solidFill>
               </a:defRPr>
             </a:lvl2pPr>
-            <a:lvl3pPr marL="914400" indent="0">
+            <a:lvl3pPr marL="914404" indent="0">
               <a:buNone/>
               <a:defRPr sz="1600">
                 <a:solidFill>
@@ -967,9 +962,9 @@
                 </a:solidFill>
               </a:defRPr>
             </a:lvl3pPr>
-            <a:lvl4pPr marL="1371600" indent="0">
+            <a:lvl4pPr marL="1371607" indent="0">
               <a:buNone/>
-              <a:defRPr sz="1400">
+              <a:defRPr sz="1401">
                 <a:solidFill>
                   <a:schemeClr val="tx1">
                     <a:tint val="75000"/>
@@ -977,9 +972,9 @@
                 </a:solidFill>
               </a:defRPr>
             </a:lvl4pPr>
-            <a:lvl5pPr marL="1828800" indent="0">
+            <a:lvl5pPr marL="1828809" indent="0">
               <a:buNone/>
-              <a:defRPr sz="1400">
+              <a:defRPr sz="1401">
                 <a:solidFill>
                   <a:schemeClr val="tx1">
                     <a:tint val="75000"/>
@@ -987,9 +982,9 @@
                 </a:solidFill>
               </a:defRPr>
             </a:lvl5pPr>
-            <a:lvl6pPr marL="2286000" indent="0">
+            <a:lvl6pPr marL="2286010" indent="0">
               <a:buNone/>
-              <a:defRPr sz="1400">
+              <a:defRPr sz="1401">
                 <a:solidFill>
                   <a:schemeClr val="tx1">
                     <a:tint val="75000"/>
@@ -997,9 +992,9 @@
                 </a:solidFill>
               </a:defRPr>
             </a:lvl6pPr>
-            <a:lvl7pPr marL="2743200" indent="0">
+            <a:lvl7pPr marL="2743212" indent="0">
               <a:buNone/>
-              <a:defRPr sz="1400">
+              <a:defRPr sz="1401">
                 <a:solidFill>
                   <a:schemeClr val="tx1">
                     <a:tint val="75000"/>
@@ -1007,9 +1002,9 @@
                 </a:solidFill>
               </a:defRPr>
             </a:lvl7pPr>
-            <a:lvl8pPr marL="3200400" indent="0">
+            <a:lvl8pPr marL="3200414" indent="0">
               <a:buNone/>
-              <a:defRPr sz="1400">
+              <a:defRPr sz="1401">
                 <a:solidFill>
                   <a:schemeClr val="tx1">
                     <a:tint val="75000"/>
@@ -1017,9 +1012,9 @@
                 </a:solidFill>
               </a:defRPr>
             </a:lvl8pPr>
-            <a:lvl9pPr marL="3657600" indent="0">
+            <a:lvl9pPr marL="3657617" indent="0">
               <a:buNone/>
-              <a:defRPr sz="1400">
+              <a:defRPr sz="1401">
                 <a:solidFill>
                   <a:schemeClr val="tx1">
                     <a:tint val="75000"/>
@@ -1031,7 +1026,7 @@
           <a:p>
             <a:pPr lvl="0"/>
             <a:r>
-              <a:rPr lang="en-US" smtClean="0"/>
+              <a:rPr lang="en-US"/>
               <a:t>Click to edit Master text styles</a:t>
             </a:r>
           </a:p>
@@ -1052,9 +1047,10 @@
           <a:bodyPr/>
           <a:lstStyle/>
           <a:p>
-            <a:fld id="{5BCAD085-E8A6-8845-BD4E-CB4CCA059FC4}" type="datetimeFigureOut">
+            <a:fld id="{1D8BD707-D9CF-40AE-B4C6-C98DA3205C09}" type="datetimeFigureOut">
               <a:rPr lang="en-US" smtClean="0"/>
-              <a:t>1/27/13</a:t>
+              <a:pPr/>
+              <a:t>7/13/2026</a:t>
             </a:fld>
             <a:endParaRPr lang="en-US"/>
           </a:p>
@@ -1094,8 +1090,9 @@
           <a:bodyPr/>
           <a:lstStyle/>
           <a:p>
-            <a:fld id="{C1FF6DA9-008F-8B48-92A6-B652298478BF}" type="slidenum">
+            <a:fld id="{B6F15528-21DE-4FAA-801E-634DDDAF4B2B}" type="slidenum">
               <a:rPr lang="en-US" smtClean="0"/>
+              <a:pPr/>
               <a:t>‹#›</a:t>
             </a:fld>
             <a:endParaRPr lang="en-US"/>
@@ -1103,11 +1100,6 @@
         </p:txBody>
       </p:sp>
     </p:spTree>
-    <p:extLst>
-      <p:ext uri="{BB962C8B-B14F-4D97-AF65-F5344CB8AC3E}">
-        <p14:creationId xmlns:p14="http://schemas.microsoft.com/office/powerpoint/2010/main" val="960648375"/>
-      </p:ext>
-    </p:extLst>
   </p:cSld>
   <p:clrMapOvr>
     <a:masterClrMapping/>
@@ -1148,10 +1140,9 @@
           <a:lstStyle/>
           <a:p>
             <a:r>
-              <a:rPr lang="en-US" smtClean="0"/>
+              <a:rPr lang="en-US"/>
               <a:t>Click to edit Master title style</a:t>
             </a:r>
-            <a:endParaRPr lang="en-US"/>
           </a:p>
         </p:txBody>
       </p:sp>
@@ -1167,7 +1158,7 @@
         </p:nvSpPr>
         <p:spPr>
           <a:xfrm>
-            <a:off x="457200" y="1600200"/>
+            <a:off x="457200" y="1600201"/>
             <a:ext cx="4038600" cy="4525963"/>
           </a:xfrm>
         </p:spPr>
@@ -1205,38 +1196,37 @@
           <a:p>
             <a:pPr lvl="0"/>
             <a:r>
-              <a:rPr lang="en-US" smtClean="0"/>
+              <a:rPr lang="en-US"/>
               <a:t>Click to edit Master text styles</a:t>
             </a:r>
           </a:p>
           <a:p>
             <a:pPr lvl="1"/>
             <a:r>
-              <a:rPr lang="en-US" smtClean="0"/>
+              <a:rPr lang="en-US"/>
               <a:t>Second level</a:t>
             </a:r>
           </a:p>
           <a:p>
             <a:pPr lvl="2"/>
             <a:r>
-              <a:rPr lang="en-US" smtClean="0"/>
+              <a:rPr lang="en-US"/>
               <a:t>Third level</a:t>
             </a:r>
           </a:p>
           <a:p>
             <a:pPr lvl="3"/>
             <a:r>
-              <a:rPr lang="en-US" smtClean="0"/>
+              <a:rPr lang="en-US"/>
               <a:t>Fourth level</a:t>
             </a:r>
           </a:p>
           <a:p>
             <a:pPr lvl="4"/>
             <a:r>
-              <a:rPr lang="en-US" smtClean="0"/>
+              <a:rPr lang="en-US"/>
               <a:t>Fifth level</a:t>
             </a:r>
-            <a:endParaRPr lang="en-US"/>
           </a:p>
         </p:txBody>
       </p:sp>
@@ -1252,7 +1242,7 @@
         </p:nvSpPr>
         <p:spPr>
           <a:xfrm>
-            <a:off x="4648200" y="1600200"/>
+            <a:off x="4648200" y="1600201"/>
             <a:ext cx="4038600" cy="4525963"/>
           </a:xfrm>
         </p:spPr>
@@ -1290,38 +1280,37 @@
           <a:p>
             <a:pPr lvl="0"/>
             <a:r>
-              <a:rPr lang="en-US" smtClean="0"/>
+              <a:rPr lang="en-US"/>
               <a:t>Click to edit Master text styles</a:t>
             </a:r>
           </a:p>
           <a:p>
             <a:pPr lvl="1"/>
             <a:r>
-              <a:rPr lang="en-US" smtClean="0"/>
+              <a:rPr lang="en-US"/>
               <a:t>Second level</a:t>
             </a:r>
           </a:p>
           <a:p>
             <a:pPr lvl="2"/>
             <a:r>
-              <a:rPr lang="en-US" smtClean="0"/>
+              <a:rPr lang="en-US"/>
               <a:t>Third level</a:t>
             </a:r>
           </a:p>
           <a:p>
             <a:pPr lvl="3"/>
             <a:r>
-              <a:rPr lang="en-US" smtClean="0"/>
+              <a:rPr lang="en-US"/>
               <a:t>Fourth level</a:t>
             </a:r>
           </a:p>
           <a:p>
             <a:pPr lvl="4"/>
             <a:r>
-              <a:rPr lang="en-US" smtClean="0"/>
+              <a:rPr lang="en-US"/>
               <a:t>Fifth level</a:t>
             </a:r>
-            <a:endParaRPr lang="en-US"/>
           </a:p>
         </p:txBody>
       </p:sp>
@@ -1340,9 +1329,10 @@
           <a:bodyPr/>
           <a:lstStyle/>
           <a:p>
-            <a:fld id="{5BCAD085-E8A6-8845-BD4E-CB4CCA059FC4}" type="datetimeFigureOut">
+            <a:fld id="{1D8BD707-D9CF-40AE-B4C6-C98DA3205C09}" type="datetimeFigureOut">
               <a:rPr lang="en-US" smtClean="0"/>
-              <a:t>1/27/13</a:t>
+              <a:pPr/>
+              <a:t>7/13/2026</a:t>
             </a:fld>
             <a:endParaRPr lang="en-US"/>
           </a:p>
@@ -1382,8 +1372,9 @@
           <a:bodyPr/>
           <a:lstStyle/>
           <a:p>
-            <a:fld id="{C1FF6DA9-008F-8B48-92A6-B652298478BF}" type="slidenum">
+            <a:fld id="{B6F15528-21DE-4FAA-801E-634DDDAF4B2B}" type="slidenum">
               <a:rPr lang="en-US" smtClean="0"/>
+              <a:pPr/>
               <a:t>‹#›</a:t>
             </a:fld>
             <a:endParaRPr lang="en-US"/>
@@ -1391,11 +1382,6 @@
         </p:txBody>
       </p:sp>
     </p:spTree>
-    <p:extLst>
-      <p:ext uri="{BB962C8B-B14F-4D97-AF65-F5344CB8AC3E}">
-        <p14:creationId xmlns:p14="http://schemas.microsoft.com/office/powerpoint/2010/main" val="2782244947"/>
-      </p:ext>
-    </p:extLst>
   </p:cSld>
   <p:clrMapOvr>
     <a:masterClrMapping/>
@@ -1440,10 +1426,9 @@
           </a:lstStyle>
           <a:p>
             <a:r>
-              <a:rPr lang="en-US" smtClean="0"/>
+              <a:rPr lang="en-US"/>
               <a:t>Click to edit Master title style</a:t>
             </a:r>
-            <a:endParaRPr lang="en-US"/>
           </a:p>
         </p:txBody>
       </p:sp>
@@ -1459,7 +1444,7 @@
         </p:nvSpPr>
         <p:spPr>
           <a:xfrm>
-            <a:off x="457200" y="1535113"/>
+            <a:off x="457201" y="1535113"/>
             <a:ext cx="4040188" cy="639762"/>
           </a:xfrm>
         </p:spPr>
@@ -1470,35 +1455,35 @@
               <a:buNone/>
               <a:defRPr sz="2400" b="1"/>
             </a:lvl1pPr>
-            <a:lvl2pPr marL="457200" indent="0">
+            <a:lvl2pPr marL="457202" indent="0">
               <a:buNone/>
               <a:defRPr sz="2000" b="1"/>
             </a:lvl2pPr>
-            <a:lvl3pPr marL="914400" indent="0">
+            <a:lvl3pPr marL="914404" indent="0">
               <a:buNone/>
               <a:defRPr sz="1800" b="1"/>
             </a:lvl3pPr>
-            <a:lvl4pPr marL="1371600" indent="0">
+            <a:lvl4pPr marL="1371607" indent="0">
               <a:buNone/>
               <a:defRPr sz="1600" b="1"/>
             </a:lvl4pPr>
-            <a:lvl5pPr marL="1828800" indent="0">
+            <a:lvl5pPr marL="1828809" indent="0">
               <a:buNone/>
               <a:defRPr sz="1600" b="1"/>
             </a:lvl5pPr>
-            <a:lvl6pPr marL="2286000" indent="0">
+            <a:lvl6pPr marL="2286010" indent="0">
               <a:buNone/>
               <a:defRPr sz="1600" b="1"/>
             </a:lvl6pPr>
-            <a:lvl7pPr marL="2743200" indent="0">
+            <a:lvl7pPr marL="2743212" indent="0">
               <a:buNone/>
               <a:defRPr sz="1600" b="1"/>
             </a:lvl7pPr>
-            <a:lvl8pPr marL="3200400" indent="0">
+            <a:lvl8pPr marL="3200414" indent="0">
               <a:buNone/>
               <a:defRPr sz="1600" b="1"/>
             </a:lvl8pPr>
-            <a:lvl9pPr marL="3657600" indent="0">
+            <a:lvl9pPr marL="3657617" indent="0">
               <a:buNone/>
               <a:defRPr sz="1600" b="1"/>
             </a:lvl9pPr>
@@ -1506,7 +1491,7 @@
           <a:p>
             <a:pPr lvl="0"/>
             <a:r>
-              <a:rPr lang="en-US" smtClean="0"/>
+              <a:rPr lang="en-US"/>
               <a:t>Click to edit Master text styles</a:t>
             </a:r>
           </a:p>
@@ -1524,7 +1509,7 @@
         </p:nvSpPr>
         <p:spPr>
           <a:xfrm>
-            <a:off x="457200" y="2174875"/>
+            <a:off x="457201" y="2174875"/>
             <a:ext cx="4040188" cy="3951288"/>
           </a:xfrm>
         </p:spPr>
@@ -1562,38 +1547,37 @@
           <a:p>
             <a:pPr lvl="0"/>
             <a:r>
-              <a:rPr lang="en-US" smtClean="0"/>
+              <a:rPr lang="en-US"/>
               <a:t>Click to edit Master text styles</a:t>
             </a:r>
           </a:p>
           <a:p>
             <a:pPr lvl="1"/>
             <a:r>
-              <a:rPr lang="en-US" smtClean="0"/>
+              <a:rPr lang="en-US"/>
               <a:t>Second level</a:t>
             </a:r>
           </a:p>
           <a:p>
             <a:pPr lvl="2"/>
             <a:r>
-              <a:rPr lang="en-US" smtClean="0"/>
+              <a:rPr lang="en-US"/>
               <a:t>Third level</a:t>
             </a:r>
           </a:p>
           <a:p>
             <a:pPr lvl="3"/>
             <a:r>
-              <a:rPr lang="en-US" smtClean="0"/>
+              <a:rPr lang="en-US"/>
               <a:t>Fourth level</a:t>
             </a:r>
           </a:p>
           <a:p>
             <a:pPr lvl="4"/>
             <a:r>
-              <a:rPr lang="en-US" smtClean="0"/>
+              <a:rPr lang="en-US"/>
               <a:t>Fifth level</a:t>
             </a:r>
-            <a:endParaRPr lang="en-US"/>
           </a:p>
         </p:txBody>
       </p:sp>
@@ -1610,7 +1594,7 @@
         <p:spPr>
           <a:xfrm>
             <a:off x="4645025" y="1535113"/>
-            <a:ext cx="4041775" cy="639762"/>
+            <a:ext cx="4041774" cy="639762"/>
           </a:xfrm>
         </p:spPr>
         <p:txBody>
@@ -1620,35 +1604,35 @@
               <a:buNone/>
               <a:defRPr sz="2400" b="1"/>
             </a:lvl1pPr>
-            <a:lvl2pPr marL="457200" indent="0">
+            <a:lvl2pPr marL="457202" indent="0">
               <a:buNone/>
               <a:defRPr sz="2000" b="1"/>
             </a:lvl2pPr>
-            <a:lvl3pPr marL="914400" indent="0">
+            <a:lvl3pPr marL="914404" indent="0">
               <a:buNone/>
               <a:defRPr sz="1800" b="1"/>
             </a:lvl3pPr>
-            <a:lvl4pPr marL="1371600" indent="0">
+            <a:lvl4pPr marL="1371607" indent="0">
               <a:buNone/>
               <a:defRPr sz="1600" b="1"/>
             </a:lvl4pPr>
-            <a:lvl5pPr marL="1828800" indent="0">
+            <a:lvl5pPr marL="1828809" indent="0">
               <a:buNone/>
               <a:defRPr sz="1600" b="1"/>
             </a:lvl5pPr>
-            <a:lvl6pPr marL="2286000" indent="0">
+            <a:lvl6pPr marL="2286010" indent="0">
               <a:buNone/>
               <a:defRPr sz="1600" b="1"/>
             </a:lvl6pPr>
-            <a:lvl7pPr marL="2743200" indent="0">
+            <a:lvl7pPr marL="2743212" indent="0">
               <a:buNone/>
               <a:defRPr sz="1600" b="1"/>
             </a:lvl7pPr>
-            <a:lvl8pPr marL="3200400" indent="0">
+            <a:lvl8pPr marL="3200414" indent="0">
               <a:buNone/>
               <a:defRPr sz="1600" b="1"/>
             </a:lvl8pPr>
-            <a:lvl9pPr marL="3657600" indent="0">
+            <a:lvl9pPr marL="3657617" indent="0">
               <a:buNone/>
               <a:defRPr sz="1600" b="1"/>
             </a:lvl9pPr>
@@ -1656,7 +1640,7 @@
           <a:p>
             <a:pPr lvl="0"/>
             <a:r>
-              <a:rPr lang="en-US" smtClean="0"/>
+              <a:rPr lang="en-US"/>
               <a:t>Click to edit Master text styles</a:t>
             </a:r>
           </a:p>
@@ -1675,7 +1659,7 @@
         <p:spPr>
           <a:xfrm>
             <a:off x="4645025" y="2174875"/>
-            <a:ext cx="4041775" cy="3951288"/>
+            <a:ext cx="4041774" cy="3951288"/>
           </a:xfrm>
         </p:spPr>
         <p:txBody>
@@ -1712,38 +1696,37 @@
           <a:p>
             <a:pPr lvl="0"/>
             <a:r>
-              <a:rPr lang="en-US" smtClean="0"/>
+              <a:rPr lang="en-US"/>
               <a:t>Click to edit Master text styles</a:t>
             </a:r>
           </a:p>
           <a:p>
             <a:pPr lvl="1"/>
             <a:r>
-              <a:rPr lang="en-US" smtClean="0"/>
+              <a:rPr lang="en-US"/>
               <a:t>Second level</a:t>
             </a:r>
           </a:p>
           <a:p>
             <a:pPr lvl="2"/>
             <a:r>
-              <a:rPr lang="en-US" smtClean="0"/>
+              <a:rPr lang="en-US"/>
               <a:t>Third level</a:t>
             </a:r>
           </a:p>
           <a:p>
             <a:pPr lvl="3"/>
             <a:r>
-              <a:rPr lang="en-US" smtClean="0"/>
+              <a:rPr lang="en-US"/>
               <a:t>Fourth level</a:t>
             </a:r>
           </a:p>
           <a:p>
             <a:pPr lvl="4"/>
             <a:r>
-              <a:rPr lang="en-US" smtClean="0"/>
+              <a:rPr lang="en-US"/>
               <a:t>Fifth level</a:t>
             </a:r>
-            <a:endParaRPr lang="en-US"/>
           </a:p>
         </p:txBody>
       </p:sp>
@@ -1762,9 +1745,10 @@
           <a:bodyPr/>
           <a:lstStyle/>
           <a:p>
-            <a:fld id="{5BCAD085-E8A6-8845-BD4E-CB4CCA059FC4}" type="datetimeFigureOut">
+            <a:fld id="{1D8BD707-D9CF-40AE-B4C6-C98DA3205C09}" type="datetimeFigureOut">
               <a:rPr lang="en-US" smtClean="0"/>
-              <a:t>1/27/13</a:t>
+              <a:pPr/>
+              <a:t>7/13/2026</a:t>
             </a:fld>
             <a:endParaRPr lang="en-US"/>
           </a:p>
@@ -1804,8 +1788,9 @@
           <a:bodyPr/>
           <a:lstStyle/>
           <a:p>
-            <a:fld id="{C1FF6DA9-008F-8B48-92A6-B652298478BF}" type="slidenum">
+            <a:fld id="{B6F15528-21DE-4FAA-801E-634DDDAF4B2B}" type="slidenum">
               <a:rPr lang="en-US" smtClean="0"/>
+              <a:pPr/>
               <a:t>‹#›</a:t>
             </a:fld>
             <a:endParaRPr lang="en-US"/>
@@ -1813,11 +1798,6 @@
         </p:txBody>
       </p:sp>
     </p:spTree>
-    <p:extLst>
-      <p:ext uri="{BB962C8B-B14F-4D97-AF65-F5344CB8AC3E}">
-        <p14:creationId xmlns:p14="http://schemas.microsoft.com/office/powerpoint/2010/main" val="990158736"/>
-      </p:ext>
-    </p:extLst>
   </p:cSld>
   <p:clrMapOvr>
     <a:masterClrMapping/>
@@ -1858,10 +1838,9 @@
           <a:lstStyle/>
           <a:p>
             <a:r>
-              <a:rPr lang="en-US" smtClean="0"/>
+              <a:rPr lang="en-US"/>
               <a:t>Click to edit Master title style</a:t>
             </a:r>
-            <a:endParaRPr lang="en-US"/>
           </a:p>
         </p:txBody>
       </p:sp>
@@ -1880,9 +1859,10 @@
           <a:bodyPr/>
           <a:lstStyle/>
           <a:p>
-            <a:fld id="{5BCAD085-E8A6-8845-BD4E-CB4CCA059FC4}" type="datetimeFigureOut">
+            <a:fld id="{1D8BD707-D9CF-40AE-B4C6-C98DA3205C09}" type="datetimeFigureOut">
               <a:rPr lang="en-US" smtClean="0"/>
-              <a:t>1/27/13</a:t>
+              <a:pPr/>
+              <a:t>7/13/2026</a:t>
             </a:fld>
             <a:endParaRPr lang="en-US"/>
           </a:p>
@@ -1922,8 +1902,9 @@
           <a:bodyPr/>
           <a:lstStyle/>
           <a:p>
-            <a:fld id="{C1FF6DA9-008F-8B48-92A6-B652298478BF}" type="slidenum">
+            <a:fld id="{B6F15528-21DE-4FAA-801E-634DDDAF4B2B}" type="slidenum">
               <a:rPr lang="en-US" smtClean="0"/>
+              <a:pPr/>
               <a:t>‹#›</a:t>
             </a:fld>
             <a:endParaRPr lang="en-US"/>
@@ -1931,11 +1912,6 @@
         </p:txBody>
       </p:sp>
     </p:spTree>
-    <p:extLst>
-      <p:ext uri="{BB962C8B-B14F-4D97-AF65-F5344CB8AC3E}">
-        <p14:creationId xmlns:p14="http://schemas.microsoft.com/office/powerpoint/2010/main" val="727027711"/>
-      </p:ext>
-    </p:extLst>
   </p:cSld>
   <p:clrMapOvr>
     <a:masterClrMapping/>
@@ -1975,9 +1951,10 @@
           <a:bodyPr/>
           <a:lstStyle/>
           <a:p>
-            <a:fld id="{5BCAD085-E8A6-8845-BD4E-CB4CCA059FC4}" type="datetimeFigureOut">
+            <a:fld id="{1D8BD707-D9CF-40AE-B4C6-C98DA3205C09}" type="datetimeFigureOut">
               <a:rPr lang="en-US" smtClean="0"/>
-              <a:t>1/27/13</a:t>
+              <a:pPr/>
+              <a:t>7/13/2026</a:t>
             </a:fld>
             <a:endParaRPr lang="en-US"/>
           </a:p>
@@ -2017,8 +1994,9 @@
           <a:bodyPr/>
           <a:lstStyle/>
           <a:p>
-            <a:fld id="{C1FF6DA9-008F-8B48-92A6-B652298478BF}" type="slidenum">
+            <a:fld id="{B6F15528-21DE-4FAA-801E-634DDDAF4B2B}" type="slidenum">
               <a:rPr lang="en-US" smtClean="0"/>
+              <a:pPr/>
               <a:t>‹#›</a:t>
             </a:fld>
             <a:endParaRPr lang="en-US"/>
@@ -2026,11 +2004,6 @@
         </p:txBody>
       </p:sp>
     </p:spTree>
-    <p:extLst>
-      <p:ext uri="{BB962C8B-B14F-4D97-AF65-F5344CB8AC3E}">
-        <p14:creationId xmlns:p14="http://schemas.microsoft.com/office/powerpoint/2010/main" val="1212999818"/>
-      </p:ext>
-    </p:extLst>
   </p:cSld>
   <p:clrMapOvr>
     <a:masterClrMapping/>
@@ -2067,7 +2040,7 @@
         </p:nvSpPr>
         <p:spPr>
           <a:xfrm>
-            <a:off x="457200" y="273050"/>
+            <a:off x="457201" y="273050"/>
             <a:ext cx="3008313" cy="1162050"/>
           </a:xfrm>
         </p:spPr>
@@ -2080,10 +2053,9 @@
           </a:lstStyle>
           <a:p>
             <a:r>
-              <a:rPr lang="en-US" smtClean="0"/>
+              <a:rPr lang="en-US"/>
               <a:t>Click to edit Master title style</a:t>
             </a:r>
-            <a:endParaRPr lang="en-US"/>
           </a:p>
         </p:txBody>
       </p:sp>
@@ -2099,8 +2071,8 @@
         </p:nvSpPr>
         <p:spPr>
           <a:xfrm>
-            <a:off x="3575050" y="273050"/>
-            <a:ext cx="5111750" cy="5853113"/>
+            <a:off x="3575049" y="273052"/>
+            <a:ext cx="5111751" cy="5853113"/>
           </a:xfrm>
         </p:spPr>
         <p:txBody>
@@ -2137,38 +2109,37 @@
           <a:p>
             <a:pPr lvl="0"/>
             <a:r>
-              <a:rPr lang="en-US" smtClean="0"/>
+              <a:rPr lang="en-US"/>
               <a:t>Click to edit Master text styles</a:t>
             </a:r>
           </a:p>
           <a:p>
             <a:pPr lvl="1"/>
             <a:r>
-              <a:rPr lang="en-US" smtClean="0"/>
+              <a:rPr lang="en-US"/>
               <a:t>Second level</a:t>
             </a:r>
           </a:p>
           <a:p>
             <a:pPr lvl="2"/>
             <a:r>
-              <a:rPr lang="en-US" smtClean="0"/>
+              <a:rPr lang="en-US"/>
               <a:t>Third level</a:t>
             </a:r>
           </a:p>
           <a:p>
             <a:pPr lvl="3"/>
             <a:r>
-              <a:rPr lang="en-US" smtClean="0"/>
+              <a:rPr lang="en-US"/>
               <a:t>Fourth level</a:t>
             </a:r>
           </a:p>
           <a:p>
             <a:pPr lvl="4"/>
             <a:r>
-              <a:rPr lang="en-US" smtClean="0"/>
+              <a:rPr lang="en-US"/>
               <a:t>Fifth level</a:t>
             </a:r>
-            <a:endParaRPr lang="en-US"/>
           </a:p>
         </p:txBody>
       </p:sp>
@@ -2184,7 +2155,7 @@
         </p:nvSpPr>
         <p:spPr>
           <a:xfrm>
-            <a:off x="457200" y="1435100"/>
+            <a:off x="457201" y="1435101"/>
             <a:ext cx="3008313" cy="4691063"/>
           </a:xfrm>
         </p:spPr>
@@ -2193,37 +2164,37 @@
           <a:lstStyle>
             <a:lvl1pPr marL="0" indent="0">
               <a:buNone/>
-              <a:defRPr sz="1400"/>
+              <a:defRPr sz="1401"/>
             </a:lvl1pPr>
-            <a:lvl2pPr marL="457200" indent="0">
+            <a:lvl2pPr marL="457202" indent="0">
               <a:buNone/>
-              <a:defRPr sz="1200"/>
+              <a:defRPr sz="1199"/>
             </a:lvl2pPr>
-            <a:lvl3pPr marL="914400" indent="0">
+            <a:lvl3pPr marL="914404" indent="0">
               <a:buNone/>
-              <a:defRPr sz="1000"/>
+              <a:defRPr sz="999"/>
             </a:lvl3pPr>
-            <a:lvl4pPr marL="1371600" indent="0">
+            <a:lvl4pPr marL="1371607" indent="0">
               <a:buNone/>
               <a:defRPr sz="900"/>
             </a:lvl4pPr>
-            <a:lvl5pPr marL="1828800" indent="0">
+            <a:lvl5pPr marL="1828809" indent="0">
               <a:buNone/>
               <a:defRPr sz="900"/>
             </a:lvl5pPr>
-            <a:lvl6pPr marL="2286000" indent="0">
+            <a:lvl6pPr marL="2286010" indent="0">
               <a:buNone/>
               <a:defRPr sz="900"/>
             </a:lvl6pPr>
-            <a:lvl7pPr marL="2743200" indent="0">
+            <a:lvl7pPr marL="2743212" indent="0">
               <a:buNone/>
               <a:defRPr sz="900"/>
             </a:lvl7pPr>
-            <a:lvl8pPr marL="3200400" indent="0">
+            <a:lvl8pPr marL="3200414" indent="0">
               <a:buNone/>
               <a:defRPr sz="900"/>
             </a:lvl8pPr>
-            <a:lvl9pPr marL="3657600" indent="0">
+            <a:lvl9pPr marL="3657617" indent="0">
               <a:buNone/>
               <a:defRPr sz="900"/>
             </a:lvl9pPr>
@@ -2231,7 +2202,7 @@
           <a:p>
             <a:pPr lvl="0"/>
             <a:r>
-              <a:rPr lang="en-US" smtClean="0"/>
+              <a:rPr lang="en-US"/>
               <a:t>Click to edit Master text styles</a:t>
             </a:r>
           </a:p>
@@ -2252,9 +2223,10 @@
           <a:bodyPr/>
           <a:lstStyle/>
           <a:p>
-            <a:fld id="{5BCAD085-E8A6-8845-BD4E-CB4CCA059FC4}" type="datetimeFigureOut">
+            <a:fld id="{1D8BD707-D9CF-40AE-B4C6-C98DA3205C09}" type="datetimeFigureOut">
               <a:rPr lang="en-US" smtClean="0"/>
-              <a:t>1/27/13</a:t>
+              <a:pPr/>
+              <a:t>7/13/2026</a:t>
             </a:fld>
             <a:endParaRPr lang="en-US"/>
           </a:p>
@@ -2294,8 +2266,9 @@
           <a:bodyPr/>
           <a:lstStyle/>
           <a:p>
-            <a:fld id="{C1FF6DA9-008F-8B48-92A6-B652298478BF}" type="slidenum">
+            <a:fld id="{B6F15528-21DE-4FAA-801E-634DDDAF4B2B}" type="slidenum">
               <a:rPr lang="en-US" smtClean="0"/>
+              <a:pPr/>
               <a:t>‹#›</a:t>
             </a:fld>
             <a:endParaRPr lang="en-US"/>
@@ -2303,11 +2276,6 @@
         </p:txBody>
       </p:sp>
     </p:spTree>
-    <p:extLst>
-      <p:ext uri="{BB962C8B-B14F-4D97-AF65-F5344CB8AC3E}">
-        <p14:creationId xmlns:p14="http://schemas.microsoft.com/office/powerpoint/2010/main" val="1840726560"/>
-      </p:ext>
-    </p:extLst>
   </p:cSld>
   <p:clrMapOvr>
     <a:masterClrMapping/>
@@ -2357,10 +2325,9 @@
           </a:lstStyle>
           <a:p>
             <a:r>
-              <a:rPr lang="en-US" smtClean="0"/>
+              <a:rPr lang="en-US"/>
               <a:t>Click to edit Master title style</a:t>
             </a:r>
-            <a:endParaRPr lang="en-US"/>
           </a:p>
         </p:txBody>
       </p:sp>
@@ -2387,35 +2354,35 @@
               <a:buNone/>
               <a:defRPr sz="3200"/>
             </a:lvl1pPr>
-            <a:lvl2pPr marL="457200" indent="0">
+            <a:lvl2pPr marL="457202" indent="0">
               <a:buNone/>
               <a:defRPr sz="2800"/>
             </a:lvl2pPr>
-            <a:lvl3pPr marL="914400" indent="0">
+            <a:lvl3pPr marL="914404" indent="0">
               <a:buNone/>
               <a:defRPr sz="2400"/>
             </a:lvl3pPr>
-            <a:lvl4pPr marL="1371600" indent="0">
+            <a:lvl4pPr marL="1371607" indent="0">
               <a:buNone/>
               <a:defRPr sz="2000"/>
             </a:lvl4pPr>
-            <a:lvl5pPr marL="1828800" indent="0">
+            <a:lvl5pPr marL="1828809" indent="0">
               <a:buNone/>
               <a:defRPr sz="2000"/>
             </a:lvl5pPr>
-            <a:lvl6pPr marL="2286000" indent="0">
+            <a:lvl6pPr marL="2286010" indent="0">
               <a:buNone/>
               <a:defRPr sz="2000"/>
             </a:lvl6pPr>
-            <a:lvl7pPr marL="2743200" indent="0">
+            <a:lvl7pPr marL="2743212" indent="0">
               <a:buNone/>
               <a:defRPr sz="2000"/>
             </a:lvl7pPr>
-            <a:lvl8pPr marL="3200400" indent="0">
+            <a:lvl8pPr marL="3200414" indent="0">
               <a:buNone/>
               <a:defRPr sz="2000"/>
             </a:lvl8pPr>
-            <a:lvl9pPr marL="3657600" indent="0">
+            <a:lvl9pPr marL="3657617" indent="0">
               <a:buNone/>
               <a:defRPr sz="2000"/>
             </a:lvl9pPr>
@@ -2446,37 +2413,37 @@
           <a:lstStyle>
             <a:lvl1pPr marL="0" indent="0">
               <a:buNone/>
-              <a:defRPr sz="1400"/>
+              <a:defRPr sz="1401"/>
             </a:lvl1pPr>
-            <a:lvl2pPr marL="457200" indent="0">
+            <a:lvl2pPr marL="457202" indent="0">
               <a:buNone/>
-              <a:defRPr sz="1200"/>
+              <a:defRPr sz="1199"/>
             </a:lvl2pPr>
-            <a:lvl3pPr marL="914400" indent="0">
+            <a:lvl3pPr marL="914404" indent="0">
               <a:buNone/>
-              <a:defRPr sz="1000"/>
+              <a:defRPr sz="999"/>
             </a:lvl3pPr>
-            <a:lvl4pPr marL="1371600" indent="0">
+            <a:lvl4pPr marL="1371607" indent="0">
               <a:buNone/>
               <a:defRPr sz="900"/>
             </a:lvl4pPr>
-            <a:lvl5pPr marL="1828800" indent="0">
+            <a:lvl5pPr marL="1828809" indent="0">
               <a:buNone/>
               <a:defRPr sz="900"/>
             </a:lvl5pPr>
-            <a:lvl6pPr marL="2286000" indent="0">
+            <a:lvl6pPr marL="2286010" indent="0">
               <a:buNone/>
               <a:defRPr sz="900"/>
             </a:lvl6pPr>
-            <a:lvl7pPr marL="2743200" indent="0">
+            <a:lvl7pPr marL="2743212" indent="0">
               <a:buNone/>
               <a:defRPr sz="900"/>
             </a:lvl7pPr>
-            <a:lvl8pPr marL="3200400" indent="0">
+            <a:lvl8pPr marL="3200414" indent="0">
               <a:buNone/>
               <a:defRPr sz="900"/>
             </a:lvl8pPr>
-            <a:lvl9pPr marL="3657600" indent="0">
+            <a:lvl9pPr marL="3657617" indent="0">
               <a:buNone/>
               <a:defRPr sz="900"/>
             </a:lvl9pPr>
@@ -2484,7 +2451,7 @@
           <a:p>
             <a:pPr lvl="0"/>
             <a:r>
-              <a:rPr lang="en-US" smtClean="0"/>
+              <a:rPr lang="en-US"/>
               <a:t>Click to edit Master text styles</a:t>
             </a:r>
           </a:p>
@@ -2505,9 +2472,10 @@
           <a:bodyPr/>
           <a:lstStyle/>
           <a:p>
-            <a:fld id="{5BCAD085-E8A6-8845-BD4E-CB4CCA059FC4}" type="datetimeFigureOut">
+            <a:fld id="{1D8BD707-D9CF-40AE-B4C6-C98DA3205C09}" type="datetimeFigureOut">
               <a:rPr lang="en-US" smtClean="0"/>
-              <a:t>1/27/13</a:t>
+              <a:pPr/>
+              <a:t>7/13/2026</a:t>
             </a:fld>
             <a:endParaRPr lang="en-US"/>
           </a:p>
@@ -2547,8 +2515,9 @@
           <a:bodyPr/>
           <a:lstStyle/>
           <a:p>
-            <a:fld id="{C1FF6DA9-008F-8B48-92A6-B652298478BF}" type="slidenum">
+            <a:fld id="{B6F15528-21DE-4FAA-801E-634DDDAF4B2B}" type="slidenum">
               <a:rPr lang="en-US" smtClean="0"/>
+              <a:pPr/>
               <a:t>‹#›</a:t>
             </a:fld>
             <a:endParaRPr lang="en-US"/>
@@ -2556,11 +2525,6 @@
         </p:txBody>
       </p:sp>
     </p:spTree>
-    <p:extLst>
-      <p:ext uri="{BB962C8B-B14F-4D97-AF65-F5344CB8AC3E}">
-        <p14:creationId xmlns:p14="http://schemas.microsoft.com/office/powerpoint/2010/main" val="3889236939"/>
-      </p:ext>
-    </p:extLst>
   </p:cSld>
   <p:clrMapOvr>
     <a:masterClrMapping/>
@@ -2602,8 +2566,8 @@
         </p:nvSpPr>
         <p:spPr>
           <a:xfrm>
-            <a:off x="457200" y="274638"/>
-            <a:ext cx="8229600" cy="1143000"/>
+            <a:off x="457199" y="274638"/>
+            <a:ext cx="8229601" cy="1143000"/>
           </a:xfrm>
           <a:prstGeom prst="rect">
             <a:avLst/>
@@ -2616,10 +2580,9 @@
           <a:lstStyle/>
           <a:p>
             <a:r>
-              <a:rPr lang="en-US" smtClean="0"/>
+              <a:rPr lang="en-US"/>
               <a:t>Click to edit Master title style</a:t>
             </a:r>
-            <a:endParaRPr lang="en-US"/>
           </a:p>
         </p:txBody>
       </p:sp>
@@ -2635,8 +2598,8 @@
         </p:nvSpPr>
         <p:spPr>
           <a:xfrm>
-            <a:off x="457200" y="1600200"/>
-            <a:ext cx="8229600" cy="4525963"/>
+            <a:off x="457199" y="1600201"/>
+            <a:ext cx="8229601" cy="4525963"/>
           </a:xfrm>
           <a:prstGeom prst="rect">
             <a:avLst/>
@@ -2650,38 +2613,37 @@
           <a:p>
             <a:pPr lvl="0"/>
             <a:r>
-              <a:rPr lang="en-US" smtClean="0"/>
+              <a:rPr lang="en-US"/>
               <a:t>Click to edit Master text styles</a:t>
             </a:r>
           </a:p>
           <a:p>
             <a:pPr lvl="1"/>
             <a:r>
-              <a:rPr lang="en-US" smtClean="0"/>
+              <a:rPr lang="en-US"/>
               <a:t>Second level</a:t>
             </a:r>
           </a:p>
           <a:p>
             <a:pPr lvl="2"/>
             <a:r>
-              <a:rPr lang="en-US" smtClean="0"/>
+              <a:rPr lang="en-US"/>
               <a:t>Third level</a:t>
             </a:r>
           </a:p>
           <a:p>
             <a:pPr lvl="3"/>
             <a:r>
-              <a:rPr lang="en-US" smtClean="0"/>
+              <a:rPr lang="en-US"/>
               <a:t>Fourth level</a:t>
             </a:r>
           </a:p>
           <a:p>
             <a:pPr lvl="4"/>
             <a:r>
-              <a:rPr lang="en-US" smtClean="0"/>
+              <a:rPr lang="en-US"/>
               <a:t>Fifth level</a:t>
             </a:r>
-            <a:endParaRPr lang="en-US"/>
           </a:p>
         </p:txBody>
       </p:sp>
@@ -2697,7 +2659,7 @@
         </p:nvSpPr>
         <p:spPr>
           <a:xfrm>
-            <a:off x="457200" y="6356350"/>
+            <a:off x="457201" y="6356352"/>
             <a:ext cx="2133600" cy="365125"/>
           </a:xfrm>
           <a:prstGeom prst="rect">
@@ -2708,7 +2670,7 @@
           <a:bodyPr vert="horz" lIns="91440" tIns="45720" rIns="91440" bIns="45720" rtlCol="0" anchor="ctr"/>
           <a:lstStyle>
             <a:lvl1pPr algn="l">
-              <a:defRPr sz="1200">
+              <a:defRPr sz="1199">
                 <a:solidFill>
                   <a:schemeClr val="tx1">
                     <a:tint val="75000"/>
@@ -2718,9 +2680,10 @@
             </a:lvl1pPr>
           </a:lstStyle>
           <a:p>
-            <a:fld id="{5BCAD085-E8A6-8845-BD4E-CB4CCA059FC4}" type="datetimeFigureOut">
+            <a:fld id="{1D8BD707-D9CF-40AE-B4C6-C98DA3205C09}" type="datetimeFigureOut">
               <a:rPr lang="en-US" smtClean="0"/>
-              <a:t>1/27/13</a:t>
+              <a:pPr/>
+              <a:t>7/13/2026</a:t>
             </a:fld>
             <a:endParaRPr lang="en-US"/>
           </a:p>
@@ -2738,7 +2701,7 @@
         </p:nvSpPr>
         <p:spPr>
           <a:xfrm>
-            <a:off x="3124200" y="6356350"/>
+            <a:off x="3124199" y="6356352"/>
             <a:ext cx="2895600" cy="365125"/>
           </a:xfrm>
           <a:prstGeom prst="rect">
@@ -2749,7 +2712,7 @@
           <a:bodyPr vert="horz" lIns="91440" tIns="45720" rIns="91440" bIns="45720" rtlCol="0" anchor="ctr"/>
           <a:lstStyle>
             <a:lvl1pPr algn="ctr">
-              <a:defRPr sz="1200">
+              <a:defRPr sz="1199">
                 <a:solidFill>
                   <a:schemeClr val="tx1">
                     <a:tint val="75000"/>
@@ -2775,7 +2738,7 @@
         </p:nvSpPr>
         <p:spPr>
           <a:xfrm>
-            <a:off x="6553200" y="6356350"/>
+            <a:off x="6553200" y="6356352"/>
             <a:ext cx="2133600" cy="365125"/>
           </a:xfrm>
           <a:prstGeom prst="rect">
@@ -2786,7 +2749,7 @@
           <a:bodyPr vert="horz" lIns="91440" tIns="45720" rIns="91440" bIns="45720" rtlCol="0" anchor="ctr"/>
           <a:lstStyle>
             <a:lvl1pPr algn="r">
-              <a:defRPr sz="1200">
+              <a:defRPr sz="1199">
                 <a:solidFill>
                   <a:schemeClr val="tx1">
                     <a:tint val="75000"/>
@@ -2796,8 +2759,9 @@
             </a:lvl1pPr>
           </a:lstStyle>
           <a:p>
-            <a:fld id="{C1FF6DA9-008F-8B48-92A6-B652298478BF}" type="slidenum">
+            <a:fld id="{B6F15528-21DE-4FAA-801E-634DDDAF4B2B}" type="slidenum">
               <a:rPr lang="en-US" smtClean="0"/>
+              <a:pPr/>
               <a:t>‹#›</a:t>
             </a:fld>
             <a:endParaRPr lang="en-US"/>
@@ -2805,11 +2769,6 @@
         </p:txBody>
       </p:sp>
     </p:spTree>
-    <p:extLst>
-      <p:ext uri="{BB962C8B-B14F-4D97-AF65-F5344CB8AC3E}">
-        <p14:creationId xmlns:p14="http://schemas.microsoft.com/office/powerpoint/2010/main" val="2209977519"/>
-      </p:ext>
-    </p:extLst>
   </p:cSld>
   <p:clrMap bg1="lt1" tx1="dk1" bg2="lt2" tx2="dk2" accent1="accent1" accent2="accent2" accent3="accent3" accent4="accent4" accent5="accent5" accent6="accent6" hlink="hlink" folHlink="folHlink"/>
   <p:sldLayoutIdLst>
@@ -2827,7 +2786,7 @@
   </p:sldLayoutIdLst>
   <p:txStyles>
     <p:titleStyle>
-      <a:lvl1pPr algn="ctr" defTabSz="457200" rtl="0" eaLnBrk="1" latinLnBrk="0" hangingPunct="1">
+      <a:lvl1pPr algn="ctr" defTabSz="914404" rtl="0" eaLnBrk="1" latinLnBrk="0" hangingPunct="1">
         <a:spcBef>
           <a:spcPct val="0"/>
         </a:spcBef>
@@ -2843,11 +2802,11 @@
       </a:lvl1pPr>
     </p:titleStyle>
     <p:bodyStyle>
-      <a:lvl1pPr marL="342900" indent="-342900" algn="l" defTabSz="457200" rtl="0" eaLnBrk="1" latinLnBrk="0" hangingPunct="1">
+      <a:lvl1pPr marL="342901" indent="-342901" algn="l" defTabSz="914404" rtl="0" eaLnBrk="1" latinLnBrk="0" hangingPunct="1">
         <a:spcBef>
           <a:spcPct val="20000"/>
         </a:spcBef>
-        <a:buFont typeface="Arial"/>
+        <a:buFont typeface="Arial" pitchFamily="34" charset="0"/>
         <a:buChar char="•"/>
         <a:defRPr sz="3200" kern="1200">
           <a:solidFill>
@@ -2858,11 +2817,11 @@
           <a:cs typeface="+mn-cs"/>
         </a:defRPr>
       </a:lvl1pPr>
-      <a:lvl2pPr marL="742950" indent="-285750" algn="l" defTabSz="457200" rtl="0" eaLnBrk="1" latinLnBrk="0" hangingPunct="1">
+      <a:lvl2pPr marL="742953" indent="-285751" algn="l" defTabSz="914404" rtl="0" eaLnBrk="1" latinLnBrk="0" hangingPunct="1">
         <a:spcBef>
           <a:spcPct val="20000"/>
         </a:spcBef>
-        <a:buFont typeface="Arial"/>
+        <a:buFont typeface="Arial" pitchFamily="34" charset="0"/>
         <a:buChar char="–"/>
         <a:defRPr sz="2800" kern="1200">
           <a:solidFill>
@@ -2873,11 +2832,11 @@
           <a:cs typeface="+mn-cs"/>
         </a:defRPr>
       </a:lvl2pPr>
-      <a:lvl3pPr marL="1143000" indent="-228600" algn="l" defTabSz="457200" rtl="0" eaLnBrk="1" latinLnBrk="0" hangingPunct="1">
+      <a:lvl3pPr marL="1143005" indent="-228600" algn="l" defTabSz="914404" rtl="0" eaLnBrk="1" latinLnBrk="0" hangingPunct="1">
         <a:spcBef>
           <a:spcPct val="20000"/>
         </a:spcBef>
-        <a:buFont typeface="Arial"/>
+        <a:buFont typeface="Arial" pitchFamily="34" charset="0"/>
         <a:buChar char="•"/>
         <a:defRPr sz="2400" kern="1200">
           <a:solidFill>
@@ -2888,11 +2847,11 @@
           <a:cs typeface="+mn-cs"/>
         </a:defRPr>
       </a:lvl3pPr>
-      <a:lvl4pPr marL="1600200" indent="-228600" algn="l" defTabSz="457200" rtl="0" eaLnBrk="1" latinLnBrk="0" hangingPunct="1">
+      <a:lvl4pPr marL="1600207" indent="-228600" algn="l" defTabSz="914404" rtl="0" eaLnBrk="1" latinLnBrk="0" hangingPunct="1">
         <a:spcBef>
           <a:spcPct val="20000"/>
         </a:spcBef>
-        <a:buFont typeface="Arial"/>
+        <a:buFont typeface="Arial" pitchFamily="34" charset="0"/>
         <a:buChar char="–"/>
         <a:defRPr sz="2000" kern="1200">
           <a:solidFill>
@@ -2903,11 +2862,11 @@
           <a:cs typeface="+mn-cs"/>
         </a:defRPr>
       </a:lvl4pPr>
-      <a:lvl5pPr marL="2057400" indent="-228600" algn="l" defTabSz="457200" rtl="0" eaLnBrk="1" latinLnBrk="0" hangingPunct="1">
+      <a:lvl5pPr marL="2057409" indent="-228600" algn="l" defTabSz="914404" rtl="0" eaLnBrk="1" latinLnBrk="0" hangingPunct="1">
         <a:spcBef>
           <a:spcPct val="20000"/>
         </a:spcBef>
-        <a:buFont typeface="Arial"/>
+        <a:buFont typeface="Arial" pitchFamily="34" charset="0"/>
         <a:buChar char="»"/>
         <a:defRPr sz="2000" kern="1200">
           <a:solidFill>
@@ -2918,11 +2877,11 @@
           <a:cs typeface="+mn-cs"/>
         </a:defRPr>
       </a:lvl5pPr>
-      <a:lvl6pPr marL="2514600" indent="-228600" algn="l" defTabSz="457200" rtl="0" eaLnBrk="1" latinLnBrk="0" hangingPunct="1">
+      <a:lvl6pPr marL="2514612" indent="-228600" algn="l" defTabSz="914404" rtl="0" eaLnBrk="1" latinLnBrk="0" hangingPunct="1">
         <a:spcBef>
           <a:spcPct val="20000"/>
         </a:spcBef>
-        <a:buFont typeface="Arial"/>
+        <a:buFont typeface="Arial" pitchFamily="34" charset="0"/>
         <a:buChar char="•"/>
         <a:defRPr sz="2000" kern="1200">
           <a:solidFill>
@@ -2933,11 +2892,11 @@
           <a:cs typeface="+mn-cs"/>
         </a:defRPr>
       </a:lvl6pPr>
-      <a:lvl7pPr marL="2971800" indent="-228600" algn="l" defTabSz="457200" rtl="0" eaLnBrk="1" latinLnBrk="0" hangingPunct="1">
+      <a:lvl7pPr marL="2971814" indent="-228600" algn="l" defTabSz="914404" rtl="0" eaLnBrk="1" latinLnBrk="0" hangingPunct="1">
         <a:spcBef>
           <a:spcPct val="20000"/>
         </a:spcBef>
-        <a:buFont typeface="Arial"/>
+        <a:buFont typeface="Arial" pitchFamily="34" charset="0"/>
         <a:buChar char="•"/>
         <a:defRPr sz="2000" kern="1200">
           <a:solidFill>
@@ -2948,11 +2907,11 @@
           <a:cs typeface="+mn-cs"/>
         </a:defRPr>
       </a:lvl7pPr>
-      <a:lvl8pPr marL="3429000" indent="-228600" algn="l" defTabSz="457200" rtl="0" eaLnBrk="1" latinLnBrk="0" hangingPunct="1">
+      <a:lvl8pPr marL="3429016" indent="-228600" algn="l" defTabSz="914404" rtl="0" eaLnBrk="1" latinLnBrk="0" hangingPunct="1">
         <a:spcBef>
           <a:spcPct val="20000"/>
         </a:spcBef>
-        <a:buFont typeface="Arial"/>
+        <a:buFont typeface="Arial" pitchFamily="34" charset="0"/>
         <a:buChar char="•"/>
         <a:defRPr sz="2000" kern="1200">
           <a:solidFill>
@@ -2963,11 +2922,11 @@
           <a:cs typeface="+mn-cs"/>
         </a:defRPr>
       </a:lvl8pPr>
-      <a:lvl9pPr marL="3886200" indent="-228600" algn="l" defTabSz="457200" rtl="0" eaLnBrk="1" latinLnBrk="0" hangingPunct="1">
+      <a:lvl9pPr marL="3886217" indent="-228600" algn="l" defTabSz="914404" rtl="0" eaLnBrk="1" latinLnBrk="0" hangingPunct="1">
         <a:spcBef>
           <a:spcPct val="20000"/>
         </a:spcBef>
-        <a:buFont typeface="Arial"/>
+        <a:buFont typeface="Arial" pitchFamily="34" charset="0"/>
         <a:buChar char="•"/>
         <a:defRPr sz="2000" kern="1200">
           <a:solidFill>
@@ -2983,7 +2942,7 @@
       <a:defPPr>
         <a:defRPr lang="en-US"/>
       </a:defPPr>
-      <a:lvl1pPr marL="0" algn="l" defTabSz="457200" rtl="0" eaLnBrk="1" latinLnBrk="0" hangingPunct="1">
+      <a:lvl1pPr marL="0" algn="l" defTabSz="914404" rtl="0" eaLnBrk="1" latinLnBrk="0" hangingPunct="1">
         <a:defRPr sz="1800" kern="1200">
           <a:solidFill>
             <a:schemeClr val="tx1"/>
@@ -2993,7 +2952,7 @@
           <a:cs typeface="+mn-cs"/>
         </a:defRPr>
       </a:lvl1pPr>
-      <a:lvl2pPr marL="457200" algn="l" defTabSz="457200" rtl="0" eaLnBrk="1" latinLnBrk="0" hangingPunct="1">
+      <a:lvl2pPr marL="457202" algn="l" defTabSz="914404" rtl="0" eaLnBrk="1" latinLnBrk="0" hangingPunct="1">
         <a:defRPr sz="1800" kern="1200">
           <a:solidFill>
             <a:schemeClr val="tx1"/>
@@ -3003,7 +2962,7 @@
           <a:cs typeface="+mn-cs"/>
         </a:defRPr>
       </a:lvl2pPr>
-      <a:lvl3pPr marL="914400" algn="l" defTabSz="457200" rtl="0" eaLnBrk="1" latinLnBrk="0" hangingPunct="1">
+      <a:lvl3pPr marL="914404" algn="l" defTabSz="914404" rtl="0" eaLnBrk="1" latinLnBrk="0" hangingPunct="1">
         <a:defRPr sz="1800" kern="1200">
           <a:solidFill>
             <a:schemeClr val="tx1"/>
@@ -3013,7 +2972,7 @@
           <a:cs typeface="+mn-cs"/>
         </a:defRPr>
       </a:lvl3pPr>
-      <a:lvl4pPr marL="1371600" algn="l" defTabSz="457200" rtl="0" eaLnBrk="1" latinLnBrk="0" hangingPunct="1">
+      <a:lvl4pPr marL="1371607" algn="l" defTabSz="914404" rtl="0" eaLnBrk="1" latinLnBrk="0" hangingPunct="1">
         <a:defRPr sz="1800" kern="1200">
           <a:solidFill>
             <a:schemeClr val="tx1"/>
@@ -3023,7 +2982,7 @@
           <a:cs typeface="+mn-cs"/>
         </a:defRPr>
       </a:lvl4pPr>
-      <a:lvl5pPr marL="1828800" algn="l" defTabSz="457200" rtl="0" eaLnBrk="1" latinLnBrk="0" hangingPunct="1">
+      <a:lvl5pPr marL="1828809" algn="l" defTabSz="914404" rtl="0" eaLnBrk="1" latinLnBrk="0" hangingPunct="1">
         <a:defRPr sz="1800" kern="1200">
           <a:solidFill>
             <a:schemeClr val="tx1"/>
@@ -3033,7 +2992,7 @@
           <a:cs typeface="+mn-cs"/>
         </a:defRPr>
       </a:lvl5pPr>
-      <a:lvl6pPr marL="2286000" algn="l" defTabSz="457200" rtl="0" eaLnBrk="1" latinLnBrk="0" hangingPunct="1">
+      <a:lvl6pPr marL="2286010" algn="l" defTabSz="914404" rtl="0" eaLnBrk="1" latinLnBrk="0" hangingPunct="1">
         <a:defRPr sz="1800" kern="1200">
           <a:solidFill>
             <a:schemeClr val="tx1"/>
@@ -3043,7 +3002,7 @@
           <a:cs typeface="+mn-cs"/>
         </a:defRPr>
       </a:lvl6pPr>
-      <a:lvl7pPr marL="2743200" algn="l" defTabSz="457200" rtl="0" eaLnBrk="1" latinLnBrk="0" hangingPunct="1">
+      <a:lvl7pPr marL="2743212" algn="l" defTabSz="914404" rtl="0" eaLnBrk="1" latinLnBrk="0" hangingPunct="1">
         <a:defRPr sz="1800" kern="1200">
           <a:solidFill>
             <a:schemeClr val="tx1"/>
@@ -3053,7 +3012,7 @@
           <a:cs typeface="+mn-cs"/>
         </a:defRPr>
       </a:lvl7pPr>
-      <a:lvl8pPr marL="3200400" algn="l" defTabSz="457200" rtl="0" eaLnBrk="1" latinLnBrk="0" hangingPunct="1">
+      <a:lvl8pPr marL="3200414" algn="l" defTabSz="914404" rtl="0" eaLnBrk="1" latinLnBrk="0" hangingPunct="1">
         <a:defRPr sz="1800" kern="1200">
           <a:solidFill>
             <a:schemeClr val="tx1"/>
@@ -3063,7 +3022,7 @@
           <a:cs typeface="+mn-cs"/>
         </a:defRPr>
       </a:lvl8pPr>
-      <a:lvl9pPr marL="3657600" algn="l" defTabSz="457200" rtl="0" eaLnBrk="1" latinLnBrk="0" hangingPunct="1">
+      <a:lvl9pPr marL="3657617" algn="l" defTabSz="914404" rtl="0" eaLnBrk="1" latinLnBrk="0" hangingPunct="1">
         <a:defRPr sz="1800" kern="1200">
           <a:solidFill>
             <a:schemeClr val="tx1"/>
@@ -3079,7 +3038,7 @@
 </file>
 
 <file path=ppt/slides/slide1.xml><?xml version="1.0" encoding="utf-8"?>
-<p:sld xmlns:a="http://schemas.openxmlformats.org/drawingml/2006/main" xmlns:p="http://schemas.openxmlformats.org/presentationml/2006/main" xmlns:r="http://schemas.openxmlformats.org/officeDocument/2006/relationships">
+<p:sld xmlns:a="http://schemas.openxmlformats.org/drawingml/2006/main" xmlns:r="http://schemas.openxmlformats.org/officeDocument/2006/relationships" xmlns:p="http://schemas.openxmlformats.org/presentationml/2006/main">
   <p:cSld>
     <p:spTree>
       <p:nvGrpSpPr>
@@ -3087,31 +3046,5099 @@
         <p:cNvGrpSpPr/>
         <p:nvPr/>
       </p:nvGrpSpPr>
-      <p:grpSpPr/>
-      <p:pic>
-        <p:nvPicPr>
-          <p:cNvPr id="2" name="Picture 1" descr="fig2_severity.png"/>
-          <p:cNvPicPr>
-            <a:picLocks noChangeAspect="1"/>
-          </p:cNvPicPr>
-          <p:nvPr/>
-        </p:nvPicPr>
-        <p:blipFill>
-          <a:blip r:embed="rId2"/>
-          <a:stretch>
-            <a:fillRect/>
-          </a:stretch>
-        </p:blipFill>
-        <p:spPr>
-          <a:xfrm>
-            <a:off x="0" y="0"/>
-            <a:ext cx="12191695" cy="7140850"/>
-          </a:xfrm>
-          <a:prstGeom prst="rect">
-            <a:avLst/>
-          </a:prstGeom>
-        </p:spPr>
-      </p:pic>
+      <p:grpSpPr>
+        <a:xfrm>
+          <a:off x="0" y="0"/>
+          <a:ext cx="0" cy="0"/>
+          <a:chOff x="0" y="0"/>
+          <a:chExt cx="0" cy="0"/>
+        </a:xfrm>
+      </p:grpSpPr>
+      <p:grpSp>
+        <p:nvGrpSpPr>
+          <p:cNvPr id="4" name="Group 4"/>
+          <p:cNvGrpSpPr/>
+          <p:nvPr/>
+        </p:nvGrpSpPr>
+        <p:grpSpPr>
+          <a:xfrm>
+            <a:off x="3843294" y="771286"/>
+            <a:ext cx="5094637" cy="5923502"/>
+            <a:chOff x="-8764365" y="-103760"/>
+            <a:chExt cx="6792849" cy="7898003"/>
+          </a:xfrm>
+        </p:grpSpPr>
+        <p:sp>
+          <p:nvSpPr>
+            <p:cNvPr id="5" name="Freeform 5"/>
+            <p:cNvSpPr/>
+            <p:nvPr/>
+          </p:nvSpPr>
+          <p:spPr>
+            <a:xfrm>
+              <a:off x="-8764365" y="-103760"/>
+              <a:ext cx="6792849" cy="7898003"/>
+            </a:xfrm>
+            <a:custGeom>
+              <a:avLst/>
+              <a:gdLst/>
+              <a:ahLst/>
+              <a:cxnLst/>
+              <a:rect l="l" t="t" r="r" b="b"/>
+              <a:pathLst>
+                <a:path w="6792849" h="7898003">
+                  <a:moveTo>
+                    <a:pt x="0" y="0"/>
+                  </a:moveTo>
+                  <a:lnTo>
+                    <a:pt x="6792849" y="0"/>
+                  </a:lnTo>
+                  <a:lnTo>
+                    <a:pt x="6792849" y="7898003"/>
+                  </a:lnTo>
+                  <a:lnTo>
+                    <a:pt x="0" y="7898003"/>
+                  </a:lnTo>
+                  <a:lnTo>
+                    <a:pt x="0" y="0"/>
+                  </a:lnTo>
+                  <a:close/>
+                </a:path>
+              </a:pathLst>
+            </a:custGeom>
+            <a:blipFill>
+              <a:blip r:embed="rId2"/>
+              <a:stretch>
+                <a:fillRect t="-30" r="-151"/>
+              </a:stretch>
+            </a:blipFill>
+          </p:spPr>
+          <p:txBody>
+            <a:bodyPr/>
+            <a:lstStyle/>
+            <a:p>
+              <a:endParaRPr lang="en-US" dirty="0"/>
+            </a:p>
+          </p:txBody>
+        </p:sp>
+      </p:grpSp>
+      <p:grpSp>
+        <p:nvGrpSpPr>
+          <p:cNvPr id="6" name="Group 6"/>
+          <p:cNvGrpSpPr/>
+          <p:nvPr/>
+        </p:nvGrpSpPr>
+        <p:grpSpPr>
+          <a:xfrm>
+            <a:off x="6830875" y="366113"/>
+            <a:ext cx="62227" cy="20003"/>
+            <a:chOff x="0" y="0"/>
+            <a:chExt cx="62230" cy="20003"/>
+          </a:xfrm>
+        </p:grpSpPr>
+        <p:sp>
+          <p:nvSpPr>
+            <p:cNvPr id="7" name="Freeform 7"/>
+            <p:cNvSpPr/>
+            <p:nvPr/>
+          </p:nvSpPr>
+          <p:spPr>
+            <a:xfrm>
+              <a:off x="0" y="0"/>
+              <a:ext cx="62230" cy="20066"/>
+            </a:xfrm>
+            <a:custGeom>
+              <a:avLst/>
+              <a:gdLst/>
+              <a:ahLst/>
+              <a:cxnLst/>
+              <a:rect l="l" t="t" r="r" b="b"/>
+              <a:pathLst>
+                <a:path w="62230" h="20066">
+                  <a:moveTo>
+                    <a:pt x="0" y="0"/>
+                  </a:moveTo>
+                  <a:lnTo>
+                    <a:pt x="62230" y="0"/>
+                  </a:lnTo>
+                  <a:lnTo>
+                    <a:pt x="62230" y="20066"/>
+                  </a:lnTo>
+                  <a:lnTo>
+                    <a:pt x="0" y="20066"/>
+                  </a:lnTo>
+                  <a:lnTo>
+                    <a:pt x="0" y="0"/>
+                  </a:lnTo>
+                  <a:close/>
+                </a:path>
+              </a:pathLst>
+            </a:custGeom>
+            <a:solidFill>
+              <a:srgbClr val="000000"/>
+            </a:solidFill>
+          </p:spPr>
+        </p:sp>
+      </p:grpSp>
+      <p:grpSp>
+        <p:nvGrpSpPr>
+          <p:cNvPr id="28" name="Group 28"/>
+          <p:cNvGrpSpPr/>
+          <p:nvPr/>
+        </p:nvGrpSpPr>
+        <p:grpSpPr>
+          <a:xfrm>
+            <a:off x="9982551" y="801890"/>
+            <a:ext cx="474926" cy="1456172"/>
+            <a:chOff x="0" y="0"/>
+            <a:chExt cx="474929" cy="1456169"/>
+          </a:xfrm>
+        </p:grpSpPr>
+        <p:sp>
+          <p:nvSpPr>
+            <p:cNvPr id="29" name="Freeform 29"/>
+            <p:cNvSpPr/>
+            <p:nvPr/>
+          </p:nvSpPr>
+          <p:spPr>
+            <a:xfrm>
+              <a:off x="63500" y="63500"/>
+              <a:ext cx="347979" cy="173355"/>
+            </a:xfrm>
+            <a:custGeom>
+              <a:avLst/>
+              <a:gdLst/>
+              <a:ahLst/>
+              <a:cxnLst/>
+              <a:rect l="l" t="t" r="r" b="b"/>
+              <a:pathLst>
+                <a:path w="347979" h="173355">
+                  <a:moveTo>
+                    <a:pt x="0" y="173355"/>
+                  </a:moveTo>
+                  <a:lnTo>
+                    <a:pt x="347979" y="173355"/>
+                  </a:lnTo>
+                  <a:lnTo>
+                    <a:pt x="347979" y="0"/>
+                  </a:lnTo>
+                  <a:lnTo>
+                    <a:pt x="0" y="0"/>
+                  </a:lnTo>
+                  <a:close/>
+                </a:path>
+              </a:pathLst>
+            </a:custGeom>
+            <a:solidFill>
+              <a:srgbClr val="5A9E56"/>
+            </a:solidFill>
+          </p:spPr>
+        </p:sp>
+        <p:sp>
+          <p:nvSpPr>
+            <p:cNvPr id="30" name="Freeform 30"/>
+            <p:cNvSpPr/>
+            <p:nvPr/>
+          </p:nvSpPr>
+          <p:spPr>
+            <a:xfrm>
+              <a:off x="63500" y="352424"/>
+              <a:ext cx="347979" cy="173355"/>
+            </a:xfrm>
+            <a:custGeom>
+              <a:avLst/>
+              <a:gdLst/>
+              <a:ahLst/>
+              <a:cxnLst/>
+              <a:rect l="l" t="t" r="r" b="b"/>
+              <a:pathLst>
+                <a:path w="347979" h="173355">
+                  <a:moveTo>
+                    <a:pt x="0" y="173355"/>
+                  </a:moveTo>
+                  <a:lnTo>
+                    <a:pt x="347979" y="173355"/>
+                  </a:lnTo>
+                  <a:lnTo>
+                    <a:pt x="347979" y="0"/>
+                  </a:lnTo>
+                  <a:lnTo>
+                    <a:pt x="0" y="0"/>
+                  </a:lnTo>
+                  <a:close/>
+                </a:path>
+              </a:pathLst>
+            </a:custGeom>
+            <a:solidFill>
+              <a:srgbClr val="A9CE6B"/>
+            </a:solidFill>
+          </p:spPr>
+        </p:sp>
+        <p:sp>
+          <p:nvSpPr>
+            <p:cNvPr id="31" name="Freeform 31"/>
+            <p:cNvSpPr/>
+            <p:nvPr/>
+          </p:nvSpPr>
+          <p:spPr>
+            <a:xfrm>
+              <a:off x="63500" y="641349"/>
+              <a:ext cx="347979" cy="173482"/>
+            </a:xfrm>
+            <a:custGeom>
+              <a:avLst/>
+              <a:gdLst/>
+              <a:ahLst/>
+              <a:cxnLst/>
+              <a:rect l="l" t="t" r="r" b="b"/>
+              <a:pathLst>
+                <a:path w="347979" h="173482">
+                  <a:moveTo>
+                    <a:pt x="0" y="173482"/>
+                  </a:moveTo>
+                  <a:lnTo>
+                    <a:pt x="347979" y="173482"/>
+                  </a:lnTo>
+                  <a:lnTo>
+                    <a:pt x="347979" y="0"/>
+                  </a:lnTo>
+                  <a:lnTo>
+                    <a:pt x="0" y="0"/>
+                  </a:lnTo>
+                  <a:close/>
+                </a:path>
+              </a:pathLst>
+            </a:custGeom>
+            <a:solidFill>
+              <a:srgbClr val="E9CB4F"/>
+            </a:solidFill>
+          </p:spPr>
+        </p:sp>
+        <p:sp>
+          <p:nvSpPr>
+            <p:cNvPr id="32" name="Freeform 32"/>
+            <p:cNvSpPr/>
+            <p:nvPr/>
+          </p:nvSpPr>
+          <p:spPr>
+            <a:xfrm>
+              <a:off x="63500" y="930400"/>
+              <a:ext cx="347979" cy="173355"/>
+            </a:xfrm>
+            <a:custGeom>
+              <a:avLst/>
+              <a:gdLst/>
+              <a:ahLst/>
+              <a:cxnLst/>
+              <a:rect l="l" t="t" r="r" b="b"/>
+              <a:pathLst>
+                <a:path w="347979" h="173355">
+                  <a:moveTo>
+                    <a:pt x="0" y="173355"/>
+                  </a:moveTo>
+                  <a:lnTo>
+                    <a:pt x="347979" y="173355"/>
+                  </a:lnTo>
+                  <a:lnTo>
+                    <a:pt x="347979" y="0"/>
+                  </a:lnTo>
+                  <a:lnTo>
+                    <a:pt x="0" y="0"/>
+                  </a:lnTo>
+                  <a:close/>
+                </a:path>
+              </a:pathLst>
+            </a:custGeom>
+            <a:solidFill>
+              <a:srgbClr val="E28A34"/>
+            </a:solidFill>
+          </p:spPr>
+        </p:sp>
+        <p:sp>
+          <p:nvSpPr>
+            <p:cNvPr id="33" name="Freeform 33"/>
+            <p:cNvSpPr/>
+            <p:nvPr/>
+          </p:nvSpPr>
+          <p:spPr>
+            <a:xfrm>
+              <a:off x="63500" y="1219325"/>
+              <a:ext cx="347979" cy="173355"/>
+            </a:xfrm>
+            <a:custGeom>
+              <a:avLst/>
+              <a:gdLst/>
+              <a:ahLst/>
+              <a:cxnLst/>
+              <a:rect l="l" t="t" r="r" b="b"/>
+              <a:pathLst>
+                <a:path w="347979" h="173355">
+                  <a:moveTo>
+                    <a:pt x="0" y="173355"/>
+                  </a:moveTo>
+                  <a:lnTo>
+                    <a:pt x="347979" y="173355"/>
+                  </a:lnTo>
+                  <a:lnTo>
+                    <a:pt x="347979" y="0"/>
+                  </a:lnTo>
+                  <a:lnTo>
+                    <a:pt x="0" y="0"/>
+                  </a:lnTo>
+                  <a:close/>
+                </a:path>
+              </a:pathLst>
+            </a:custGeom>
+            <a:solidFill>
+              <a:srgbClr val="CB4B42"/>
+            </a:solidFill>
+          </p:spPr>
+        </p:sp>
+      </p:grpSp>
+      <p:grpSp>
+        <p:nvGrpSpPr>
+          <p:cNvPr id="36" name="Group 36"/>
+          <p:cNvGrpSpPr/>
+          <p:nvPr/>
+        </p:nvGrpSpPr>
+        <p:grpSpPr>
+          <a:xfrm>
+            <a:off x="9927765" y="2845203"/>
+            <a:ext cx="2622375" cy="1657303"/>
+            <a:chOff x="0" y="0"/>
+            <a:chExt cx="2622372" cy="1657299"/>
+          </a:xfrm>
+        </p:grpSpPr>
+        <p:sp>
+          <p:nvSpPr>
+            <p:cNvPr id="37" name="Freeform 37"/>
+            <p:cNvSpPr/>
+            <p:nvPr/>
+          </p:nvSpPr>
+          <p:spPr>
+            <a:xfrm>
+              <a:off x="68580" y="144018"/>
+              <a:ext cx="2485264" cy="1444750"/>
+            </a:xfrm>
+            <a:custGeom>
+              <a:avLst/>
+              <a:gdLst/>
+              <a:ahLst/>
+              <a:cxnLst/>
+              <a:rect l="l" t="t" r="r" b="b"/>
+              <a:pathLst>
+                <a:path w="2485264" h="1444750">
+                  <a:moveTo>
+                    <a:pt x="0" y="1444749"/>
+                  </a:moveTo>
+                  <a:lnTo>
+                    <a:pt x="2485264" y="1444749"/>
+                  </a:lnTo>
+                  <a:lnTo>
+                    <a:pt x="2485264" y="0"/>
+                  </a:lnTo>
+                  <a:lnTo>
+                    <a:pt x="0" y="0"/>
+                  </a:lnTo>
+                  <a:close/>
+                </a:path>
+              </a:pathLst>
+            </a:custGeom>
+            <a:solidFill>
+              <a:srgbClr val="FFFFFF"/>
+            </a:solidFill>
+          </p:spPr>
+        </p:sp>
+        <p:sp>
+          <p:nvSpPr>
+            <p:cNvPr id="38" name="Freeform 38"/>
+            <p:cNvSpPr/>
+            <p:nvPr/>
+          </p:nvSpPr>
+          <p:spPr>
+            <a:xfrm>
+              <a:off x="68580" y="144018"/>
+              <a:ext cx="5080" cy="1444750"/>
+            </a:xfrm>
+            <a:custGeom>
+              <a:avLst/>
+              <a:gdLst/>
+              <a:ahLst/>
+              <a:cxnLst/>
+              <a:rect l="l" t="t" r="r" b="b"/>
+              <a:pathLst>
+                <a:path w="5080" h="1444750">
+                  <a:moveTo>
+                    <a:pt x="0" y="0"/>
+                  </a:moveTo>
+                  <a:lnTo>
+                    <a:pt x="0" y="1444749"/>
+                  </a:lnTo>
+                  <a:lnTo>
+                    <a:pt x="5080" y="1444749"/>
+                  </a:lnTo>
+                  <a:lnTo>
+                    <a:pt x="5080" y="0"/>
+                  </a:lnTo>
+                  <a:close/>
+                </a:path>
+              </a:pathLst>
+            </a:custGeom>
+            <a:solidFill>
+              <a:srgbClr val="E4E7EB"/>
+            </a:solidFill>
+          </p:spPr>
+        </p:sp>
+        <p:sp>
+          <p:nvSpPr>
+            <p:cNvPr id="39" name="Freeform 39"/>
+            <p:cNvSpPr/>
+            <p:nvPr/>
+          </p:nvSpPr>
+          <p:spPr>
+            <a:xfrm>
+              <a:off x="655193" y="144018"/>
+              <a:ext cx="10160" cy="1444750"/>
+            </a:xfrm>
+            <a:custGeom>
+              <a:avLst/>
+              <a:gdLst/>
+              <a:ahLst/>
+              <a:cxnLst/>
+              <a:rect l="l" t="t" r="r" b="b"/>
+              <a:pathLst>
+                <a:path w="10160" h="1444750">
+                  <a:moveTo>
+                    <a:pt x="0" y="0"/>
+                  </a:moveTo>
+                  <a:lnTo>
+                    <a:pt x="0" y="1444749"/>
+                  </a:lnTo>
+                  <a:lnTo>
+                    <a:pt x="10160" y="1444749"/>
+                  </a:lnTo>
+                  <a:lnTo>
+                    <a:pt x="10160" y="0"/>
+                  </a:lnTo>
+                  <a:close/>
+                </a:path>
+              </a:pathLst>
+            </a:custGeom>
+            <a:solidFill>
+              <a:srgbClr val="E4E7EB"/>
+            </a:solidFill>
+          </p:spPr>
+        </p:sp>
+        <p:sp>
+          <p:nvSpPr>
+            <p:cNvPr id="40" name="Freeform 40"/>
+            <p:cNvSpPr/>
+            <p:nvPr/>
+          </p:nvSpPr>
+          <p:spPr>
+            <a:xfrm>
+              <a:off x="1246886" y="144018"/>
+              <a:ext cx="10160" cy="1444750"/>
+            </a:xfrm>
+            <a:custGeom>
+              <a:avLst/>
+              <a:gdLst/>
+              <a:ahLst/>
+              <a:cxnLst/>
+              <a:rect l="l" t="t" r="r" b="b"/>
+              <a:pathLst>
+                <a:path w="10160" h="1444750">
+                  <a:moveTo>
+                    <a:pt x="0" y="0"/>
+                  </a:moveTo>
+                  <a:lnTo>
+                    <a:pt x="0" y="1444749"/>
+                  </a:lnTo>
+                  <a:lnTo>
+                    <a:pt x="10161" y="1444749"/>
+                  </a:lnTo>
+                  <a:lnTo>
+                    <a:pt x="10161" y="0"/>
+                  </a:lnTo>
+                  <a:close/>
+                </a:path>
+              </a:pathLst>
+            </a:custGeom>
+            <a:solidFill>
+              <a:srgbClr val="E4E7EB"/>
+            </a:solidFill>
+          </p:spPr>
+        </p:sp>
+        <p:sp>
+          <p:nvSpPr>
+            <p:cNvPr id="41" name="Freeform 41"/>
+            <p:cNvSpPr/>
+            <p:nvPr/>
+          </p:nvSpPr>
+          <p:spPr>
+            <a:xfrm>
+              <a:off x="1838707" y="144018"/>
+              <a:ext cx="10160" cy="1444750"/>
+            </a:xfrm>
+            <a:custGeom>
+              <a:avLst/>
+              <a:gdLst/>
+              <a:ahLst/>
+              <a:cxnLst/>
+              <a:rect l="l" t="t" r="r" b="b"/>
+              <a:pathLst>
+                <a:path w="10160" h="1444750">
+                  <a:moveTo>
+                    <a:pt x="0" y="0"/>
+                  </a:moveTo>
+                  <a:lnTo>
+                    <a:pt x="0" y="1444749"/>
+                  </a:lnTo>
+                  <a:lnTo>
+                    <a:pt x="10160" y="1444749"/>
+                  </a:lnTo>
+                  <a:lnTo>
+                    <a:pt x="10160" y="0"/>
+                  </a:lnTo>
+                  <a:close/>
+                </a:path>
+              </a:pathLst>
+            </a:custGeom>
+            <a:solidFill>
+              <a:srgbClr val="E4E7EB"/>
+            </a:solidFill>
+          </p:spPr>
+        </p:sp>
+        <p:sp>
+          <p:nvSpPr>
+            <p:cNvPr id="42" name="Freeform 42"/>
+            <p:cNvSpPr/>
+            <p:nvPr/>
+          </p:nvSpPr>
+          <p:spPr>
+            <a:xfrm>
+              <a:off x="2430400" y="144018"/>
+              <a:ext cx="10160" cy="1444750"/>
+            </a:xfrm>
+            <a:custGeom>
+              <a:avLst/>
+              <a:gdLst/>
+              <a:ahLst/>
+              <a:cxnLst/>
+              <a:rect l="l" t="t" r="r" b="b"/>
+              <a:pathLst>
+                <a:path w="10160" h="1444750">
+                  <a:moveTo>
+                    <a:pt x="0" y="0"/>
+                  </a:moveTo>
+                  <a:lnTo>
+                    <a:pt x="0" y="1444749"/>
+                  </a:lnTo>
+                  <a:lnTo>
+                    <a:pt x="10160" y="1444749"/>
+                  </a:lnTo>
+                  <a:lnTo>
+                    <a:pt x="10160" y="0"/>
+                  </a:lnTo>
+                  <a:close/>
+                </a:path>
+              </a:pathLst>
+            </a:custGeom>
+            <a:solidFill>
+              <a:srgbClr val="E4E7EB"/>
+            </a:solidFill>
+          </p:spPr>
+        </p:sp>
+        <p:sp>
+          <p:nvSpPr>
+            <p:cNvPr id="43" name="Freeform 43"/>
+            <p:cNvSpPr/>
+            <p:nvPr/>
+          </p:nvSpPr>
+          <p:spPr>
+            <a:xfrm>
+              <a:off x="63500" y="1583687"/>
+              <a:ext cx="2495424" cy="10160"/>
+            </a:xfrm>
+            <a:custGeom>
+              <a:avLst/>
+              <a:gdLst/>
+              <a:ahLst/>
+              <a:cxnLst/>
+              <a:rect l="l" t="t" r="r" b="b"/>
+              <a:pathLst>
+                <a:path w="2495424" h="10160">
+                  <a:moveTo>
+                    <a:pt x="5080" y="0"/>
+                  </a:moveTo>
+                  <a:lnTo>
+                    <a:pt x="2490344" y="0"/>
+                  </a:lnTo>
+                  <a:lnTo>
+                    <a:pt x="2495424" y="0"/>
+                  </a:lnTo>
+                  <a:lnTo>
+                    <a:pt x="2495424" y="10160"/>
+                  </a:lnTo>
+                  <a:lnTo>
+                    <a:pt x="2490344" y="10160"/>
+                  </a:lnTo>
+                  <a:lnTo>
+                    <a:pt x="5080" y="10160"/>
+                  </a:lnTo>
+                  <a:lnTo>
+                    <a:pt x="0" y="10160"/>
+                  </a:lnTo>
+                  <a:lnTo>
+                    <a:pt x="0" y="0"/>
+                  </a:lnTo>
+                  <a:close/>
+                </a:path>
+              </a:pathLst>
+            </a:custGeom>
+            <a:solidFill>
+              <a:srgbClr val="5A626B"/>
+            </a:solidFill>
+          </p:spPr>
+        </p:sp>
+        <p:sp>
+          <p:nvSpPr>
+            <p:cNvPr id="44" name="Freeform 44"/>
+            <p:cNvSpPr/>
+            <p:nvPr/>
+          </p:nvSpPr>
+          <p:spPr>
+            <a:xfrm>
+              <a:off x="68580" y="209677"/>
+              <a:ext cx="1712320" cy="310768"/>
+            </a:xfrm>
+            <a:custGeom>
+              <a:avLst/>
+              <a:gdLst/>
+              <a:ahLst/>
+              <a:cxnLst/>
+              <a:rect l="l" t="t" r="r" b="b"/>
+              <a:pathLst>
+                <a:path w="1656843" h="310768">
+                  <a:moveTo>
+                    <a:pt x="0" y="0"/>
+                  </a:moveTo>
+                  <a:lnTo>
+                    <a:pt x="0" y="310768"/>
+                  </a:lnTo>
+                  <a:lnTo>
+                    <a:pt x="1656843" y="310768"/>
+                  </a:lnTo>
+                  <a:lnTo>
+                    <a:pt x="1656843" y="0"/>
+                  </a:lnTo>
+                  <a:close/>
+                </a:path>
+              </a:pathLst>
+            </a:custGeom>
+            <a:solidFill>
+              <a:srgbClr val="2E6FB5"/>
+            </a:solidFill>
+          </p:spPr>
+        </p:sp>
+        <p:sp>
+          <p:nvSpPr>
+            <p:cNvPr id="45" name="Freeform 45"/>
+            <p:cNvSpPr/>
+            <p:nvPr/>
+          </p:nvSpPr>
+          <p:spPr>
+            <a:xfrm>
+              <a:off x="68580" y="710945"/>
+              <a:ext cx="1358046" cy="310768"/>
+            </a:xfrm>
+            <a:custGeom>
+              <a:avLst/>
+              <a:gdLst/>
+              <a:ahLst/>
+              <a:cxnLst/>
+              <a:rect l="l" t="t" r="r" b="b"/>
+              <a:pathLst>
+                <a:path w="1420115" h="310768">
+                  <a:moveTo>
+                    <a:pt x="0" y="0"/>
+                  </a:moveTo>
+                  <a:lnTo>
+                    <a:pt x="0" y="310768"/>
+                  </a:lnTo>
+                  <a:lnTo>
+                    <a:pt x="1420115" y="310768"/>
+                  </a:lnTo>
+                  <a:lnTo>
+                    <a:pt x="1420115" y="0"/>
+                  </a:lnTo>
+                  <a:close/>
+                </a:path>
+              </a:pathLst>
+            </a:custGeom>
+            <a:solidFill>
+              <a:srgbClr val="2E8B57"/>
+            </a:solidFill>
+          </p:spPr>
+        </p:sp>
+        <p:sp>
+          <p:nvSpPr>
+            <p:cNvPr id="46" name="Freeform 46"/>
+            <p:cNvSpPr/>
+            <p:nvPr/>
+          </p:nvSpPr>
+          <p:spPr>
+            <a:xfrm>
+              <a:off x="68580" y="1212213"/>
+              <a:ext cx="1656843" cy="310768"/>
+            </a:xfrm>
+            <a:custGeom>
+              <a:avLst/>
+              <a:gdLst/>
+              <a:ahLst/>
+              <a:cxnLst/>
+              <a:rect l="l" t="t" r="r" b="b"/>
+              <a:pathLst>
+                <a:path w="1656843" h="310768">
+                  <a:moveTo>
+                    <a:pt x="0" y="0"/>
+                  </a:moveTo>
+                  <a:lnTo>
+                    <a:pt x="0" y="310768"/>
+                  </a:lnTo>
+                  <a:lnTo>
+                    <a:pt x="1656843" y="310768"/>
+                  </a:lnTo>
+                  <a:lnTo>
+                    <a:pt x="1656843" y="0"/>
+                  </a:lnTo>
+                  <a:close/>
+                </a:path>
+              </a:pathLst>
+            </a:custGeom>
+            <a:solidFill>
+              <a:srgbClr val="C77A2B"/>
+            </a:solidFill>
+          </p:spPr>
+        </p:sp>
+      </p:grpSp>
+      <p:grpSp>
+        <p:nvGrpSpPr>
+          <p:cNvPr id="49" name="Group 49"/>
+          <p:cNvGrpSpPr/>
+          <p:nvPr/>
+        </p:nvGrpSpPr>
+        <p:grpSpPr>
+          <a:xfrm>
+            <a:off x="9927765" y="5165036"/>
+            <a:ext cx="2622375" cy="1576836"/>
+            <a:chOff x="0" y="0"/>
+            <a:chExt cx="2622372" cy="1576832"/>
+          </a:xfrm>
+        </p:grpSpPr>
+        <p:sp>
+          <p:nvSpPr>
+            <p:cNvPr id="50" name="Freeform 50"/>
+            <p:cNvSpPr/>
+            <p:nvPr/>
+          </p:nvSpPr>
+          <p:spPr>
+            <a:xfrm>
+              <a:off x="68580" y="63500"/>
+              <a:ext cx="2485264" cy="1444752"/>
+            </a:xfrm>
+            <a:custGeom>
+              <a:avLst/>
+              <a:gdLst/>
+              <a:ahLst/>
+              <a:cxnLst/>
+              <a:rect l="l" t="t" r="r" b="b"/>
+              <a:pathLst>
+                <a:path w="2485264" h="1444752">
+                  <a:moveTo>
+                    <a:pt x="0" y="1444752"/>
+                  </a:moveTo>
+                  <a:lnTo>
+                    <a:pt x="2485264" y="1444752"/>
+                  </a:lnTo>
+                  <a:lnTo>
+                    <a:pt x="2485264" y="0"/>
+                  </a:lnTo>
+                  <a:lnTo>
+                    <a:pt x="0" y="0"/>
+                  </a:lnTo>
+                  <a:close/>
+                </a:path>
+              </a:pathLst>
+            </a:custGeom>
+            <a:solidFill>
+              <a:srgbClr val="FFFFFF"/>
+            </a:solidFill>
+          </p:spPr>
+        </p:sp>
+        <p:sp>
+          <p:nvSpPr>
+            <p:cNvPr id="51" name="Freeform 51"/>
+            <p:cNvSpPr/>
+            <p:nvPr/>
+          </p:nvSpPr>
+          <p:spPr>
+            <a:xfrm>
+              <a:off x="68580" y="63500"/>
+              <a:ext cx="5080" cy="1444752"/>
+            </a:xfrm>
+            <a:custGeom>
+              <a:avLst/>
+              <a:gdLst/>
+              <a:ahLst/>
+              <a:cxnLst/>
+              <a:rect l="l" t="t" r="r" b="b"/>
+              <a:pathLst>
+                <a:path w="5080" h="1444752">
+                  <a:moveTo>
+                    <a:pt x="0" y="0"/>
+                  </a:moveTo>
+                  <a:lnTo>
+                    <a:pt x="0" y="1444752"/>
+                  </a:lnTo>
+                  <a:lnTo>
+                    <a:pt x="5080" y="1444752"/>
+                  </a:lnTo>
+                  <a:lnTo>
+                    <a:pt x="5080" y="0"/>
+                  </a:lnTo>
+                  <a:close/>
+                </a:path>
+              </a:pathLst>
+            </a:custGeom>
+            <a:solidFill>
+              <a:srgbClr val="E4E7EB"/>
+            </a:solidFill>
+          </p:spPr>
+        </p:sp>
+        <p:sp>
+          <p:nvSpPr>
+            <p:cNvPr id="52" name="Freeform 52"/>
+            <p:cNvSpPr/>
+            <p:nvPr/>
+          </p:nvSpPr>
+          <p:spPr>
+            <a:xfrm>
+              <a:off x="560578" y="63500"/>
+              <a:ext cx="10160" cy="1444752"/>
+            </a:xfrm>
+            <a:custGeom>
+              <a:avLst/>
+              <a:gdLst/>
+              <a:ahLst/>
+              <a:cxnLst/>
+              <a:rect l="l" t="t" r="r" b="b"/>
+              <a:pathLst>
+                <a:path w="10160" h="1444752">
+                  <a:moveTo>
+                    <a:pt x="0" y="0"/>
+                  </a:moveTo>
+                  <a:lnTo>
+                    <a:pt x="0" y="1444752"/>
+                  </a:lnTo>
+                  <a:lnTo>
+                    <a:pt x="10160" y="1444752"/>
+                  </a:lnTo>
+                  <a:lnTo>
+                    <a:pt x="10160" y="0"/>
+                  </a:lnTo>
+                  <a:close/>
+                </a:path>
+              </a:pathLst>
+            </a:custGeom>
+            <a:solidFill>
+              <a:srgbClr val="E4E7EB"/>
+            </a:solidFill>
+          </p:spPr>
+        </p:sp>
+        <p:sp>
+          <p:nvSpPr>
+            <p:cNvPr id="53" name="Freeform 53"/>
+            <p:cNvSpPr/>
+            <p:nvPr/>
+          </p:nvSpPr>
+          <p:spPr>
+            <a:xfrm>
+              <a:off x="1057529" y="63500"/>
+              <a:ext cx="10160" cy="1444752"/>
+            </a:xfrm>
+            <a:custGeom>
+              <a:avLst/>
+              <a:gdLst/>
+              <a:ahLst/>
+              <a:cxnLst/>
+              <a:rect l="l" t="t" r="r" b="b"/>
+              <a:pathLst>
+                <a:path w="10160" h="1444752">
+                  <a:moveTo>
+                    <a:pt x="0" y="0"/>
+                  </a:moveTo>
+                  <a:lnTo>
+                    <a:pt x="0" y="1444752"/>
+                  </a:lnTo>
+                  <a:lnTo>
+                    <a:pt x="10160" y="1444752"/>
+                  </a:lnTo>
+                  <a:lnTo>
+                    <a:pt x="10160" y="0"/>
+                  </a:lnTo>
+                  <a:close/>
+                </a:path>
+              </a:pathLst>
+            </a:custGeom>
+            <a:solidFill>
+              <a:srgbClr val="E4E7EB"/>
+            </a:solidFill>
+          </p:spPr>
+        </p:sp>
+        <p:sp>
+          <p:nvSpPr>
+            <p:cNvPr id="54" name="Freeform 54"/>
+            <p:cNvSpPr/>
+            <p:nvPr/>
+          </p:nvSpPr>
+          <p:spPr>
+            <a:xfrm>
+              <a:off x="1554608" y="63500"/>
+              <a:ext cx="10160" cy="1444752"/>
+            </a:xfrm>
+            <a:custGeom>
+              <a:avLst/>
+              <a:gdLst/>
+              <a:ahLst/>
+              <a:cxnLst/>
+              <a:rect l="l" t="t" r="r" b="b"/>
+              <a:pathLst>
+                <a:path w="10160" h="1444752">
+                  <a:moveTo>
+                    <a:pt x="0" y="0"/>
+                  </a:moveTo>
+                  <a:lnTo>
+                    <a:pt x="0" y="1444752"/>
+                  </a:lnTo>
+                  <a:lnTo>
+                    <a:pt x="10160" y="1444752"/>
+                  </a:lnTo>
+                  <a:lnTo>
+                    <a:pt x="10160" y="0"/>
+                  </a:lnTo>
+                  <a:close/>
+                </a:path>
+              </a:pathLst>
+            </a:custGeom>
+            <a:solidFill>
+              <a:srgbClr val="E4E7EB"/>
+            </a:solidFill>
+          </p:spPr>
+        </p:sp>
+        <p:sp>
+          <p:nvSpPr>
+            <p:cNvPr id="55" name="Freeform 55"/>
+            <p:cNvSpPr/>
+            <p:nvPr/>
+          </p:nvSpPr>
+          <p:spPr>
+            <a:xfrm>
+              <a:off x="2051686" y="63500"/>
+              <a:ext cx="10160" cy="1444752"/>
+            </a:xfrm>
+            <a:custGeom>
+              <a:avLst/>
+              <a:gdLst/>
+              <a:ahLst/>
+              <a:cxnLst/>
+              <a:rect l="l" t="t" r="r" b="b"/>
+              <a:pathLst>
+                <a:path w="10160" h="1444752">
+                  <a:moveTo>
+                    <a:pt x="0" y="0"/>
+                  </a:moveTo>
+                  <a:lnTo>
+                    <a:pt x="0" y="1444752"/>
+                  </a:lnTo>
+                  <a:lnTo>
+                    <a:pt x="10160" y="1444752"/>
+                  </a:lnTo>
+                  <a:lnTo>
+                    <a:pt x="10160" y="0"/>
+                  </a:lnTo>
+                  <a:close/>
+                </a:path>
+              </a:pathLst>
+            </a:custGeom>
+            <a:solidFill>
+              <a:srgbClr val="E4E7EB"/>
+            </a:solidFill>
+          </p:spPr>
+        </p:sp>
+        <p:sp>
+          <p:nvSpPr>
+            <p:cNvPr id="56" name="Freeform 56"/>
+            <p:cNvSpPr/>
+            <p:nvPr/>
+          </p:nvSpPr>
+          <p:spPr>
+            <a:xfrm>
+              <a:off x="2548764" y="63500"/>
+              <a:ext cx="5080" cy="1444752"/>
+            </a:xfrm>
+            <a:custGeom>
+              <a:avLst/>
+              <a:gdLst/>
+              <a:ahLst/>
+              <a:cxnLst/>
+              <a:rect l="l" t="t" r="r" b="b"/>
+              <a:pathLst>
+                <a:path w="5080" h="1444752">
+                  <a:moveTo>
+                    <a:pt x="0" y="0"/>
+                  </a:moveTo>
+                  <a:lnTo>
+                    <a:pt x="0" y="1444752"/>
+                  </a:lnTo>
+                  <a:lnTo>
+                    <a:pt x="5080" y="1444752"/>
+                  </a:lnTo>
+                  <a:lnTo>
+                    <a:pt x="5080" y="0"/>
+                  </a:lnTo>
+                  <a:close/>
+                </a:path>
+              </a:pathLst>
+            </a:custGeom>
+            <a:solidFill>
+              <a:srgbClr val="E4E7EB"/>
+            </a:solidFill>
+          </p:spPr>
+        </p:sp>
+        <p:sp>
+          <p:nvSpPr>
+            <p:cNvPr id="57" name="Freeform 57"/>
+            <p:cNvSpPr/>
+            <p:nvPr/>
+          </p:nvSpPr>
+          <p:spPr>
+            <a:xfrm>
+              <a:off x="63500" y="1503172"/>
+              <a:ext cx="2495424" cy="10160"/>
+            </a:xfrm>
+            <a:custGeom>
+              <a:avLst/>
+              <a:gdLst/>
+              <a:ahLst/>
+              <a:cxnLst/>
+              <a:rect l="l" t="t" r="r" b="b"/>
+              <a:pathLst>
+                <a:path w="2495424" h="10160">
+                  <a:moveTo>
+                    <a:pt x="5080" y="0"/>
+                  </a:moveTo>
+                  <a:lnTo>
+                    <a:pt x="2490344" y="0"/>
+                  </a:lnTo>
+                  <a:lnTo>
+                    <a:pt x="2495424" y="0"/>
+                  </a:lnTo>
+                  <a:lnTo>
+                    <a:pt x="2495424" y="10160"/>
+                  </a:lnTo>
+                  <a:lnTo>
+                    <a:pt x="2490344" y="10160"/>
+                  </a:lnTo>
+                  <a:lnTo>
+                    <a:pt x="5080" y="10160"/>
+                  </a:lnTo>
+                  <a:lnTo>
+                    <a:pt x="0" y="10160"/>
+                  </a:lnTo>
+                  <a:lnTo>
+                    <a:pt x="0" y="0"/>
+                  </a:lnTo>
+                  <a:close/>
+                </a:path>
+              </a:pathLst>
+            </a:custGeom>
+            <a:solidFill>
+              <a:srgbClr val="5A626B"/>
+            </a:solidFill>
+          </p:spPr>
+        </p:sp>
+        <p:sp>
+          <p:nvSpPr>
+            <p:cNvPr id="58" name="Freeform 58"/>
+            <p:cNvSpPr/>
+            <p:nvPr/>
+          </p:nvSpPr>
+          <p:spPr>
+            <a:xfrm>
+              <a:off x="68580" y="129159"/>
+              <a:ext cx="1739647" cy="310769"/>
+            </a:xfrm>
+            <a:custGeom>
+              <a:avLst/>
+              <a:gdLst/>
+              <a:ahLst/>
+              <a:cxnLst/>
+              <a:rect l="l" t="t" r="r" b="b"/>
+              <a:pathLst>
+                <a:path w="1739647" h="310769">
+                  <a:moveTo>
+                    <a:pt x="0" y="0"/>
+                  </a:moveTo>
+                  <a:lnTo>
+                    <a:pt x="0" y="310769"/>
+                  </a:lnTo>
+                  <a:lnTo>
+                    <a:pt x="1739647" y="310769"/>
+                  </a:lnTo>
+                  <a:lnTo>
+                    <a:pt x="1739647" y="0"/>
+                  </a:lnTo>
+                  <a:close/>
+                </a:path>
+              </a:pathLst>
+            </a:custGeom>
+            <a:solidFill>
+              <a:srgbClr val="2E6FB5"/>
+            </a:solidFill>
+          </p:spPr>
+        </p:sp>
+        <p:sp>
+          <p:nvSpPr>
+            <p:cNvPr id="59" name="Freeform 59"/>
+            <p:cNvSpPr/>
+            <p:nvPr/>
+          </p:nvSpPr>
+          <p:spPr>
+            <a:xfrm>
+              <a:off x="68580" y="630428"/>
+              <a:ext cx="994029" cy="310896"/>
+            </a:xfrm>
+            <a:custGeom>
+              <a:avLst/>
+              <a:gdLst/>
+              <a:ahLst/>
+              <a:cxnLst/>
+              <a:rect l="l" t="t" r="r" b="b"/>
+              <a:pathLst>
+                <a:path w="994029" h="310896">
+                  <a:moveTo>
+                    <a:pt x="0" y="0"/>
+                  </a:moveTo>
+                  <a:lnTo>
+                    <a:pt x="0" y="310896"/>
+                  </a:lnTo>
+                  <a:lnTo>
+                    <a:pt x="994029" y="310896"/>
+                  </a:lnTo>
+                  <a:lnTo>
+                    <a:pt x="994029" y="0"/>
+                  </a:lnTo>
+                  <a:close/>
+                </a:path>
+              </a:pathLst>
+            </a:custGeom>
+            <a:solidFill>
+              <a:srgbClr val="2E8B57"/>
+            </a:solidFill>
+          </p:spPr>
+        </p:sp>
+        <p:sp>
+          <p:nvSpPr>
+            <p:cNvPr id="60" name="Freeform 60"/>
+            <p:cNvSpPr/>
+            <p:nvPr/>
+          </p:nvSpPr>
+          <p:spPr>
+            <a:xfrm>
+              <a:off x="68580" y="1131824"/>
+              <a:ext cx="1491108" cy="310769"/>
+            </a:xfrm>
+            <a:custGeom>
+              <a:avLst/>
+              <a:gdLst/>
+              <a:ahLst/>
+              <a:cxnLst/>
+              <a:rect l="l" t="t" r="r" b="b"/>
+              <a:pathLst>
+                <a:path w="1491108" h="310769">
+                  <a:moveTo>
+                    <a:pt x="0" y="0"/>
+                  </a:moveTo>
+                  <a:lnTo>
+                    <a:pt x="0" y="310769"/>
+                  </a:lnTo>
+                  <a:lnTo>
+                    <a:pt x="1491108" y="310769"/>
+                  </a:lnTo>
+                  <a:lnTo>
+                    <a:pt x="1491108" y="0"/>
+                  </a:lnTo>
+                  <a:close/>
+                </a:path>
+              </a:pathLst>
+            </a:custGeom>
+            <a:solidFill>
+              <a:srgbClr val="C77A2B"/>
+            </a:solidFill>
+          </p:spPr>
+        </p:sp>
+      </p:grpSp>
+      <p:sp>
+        <p:nvSpPr>
+          <p:cNvPr id="146" name="Patch MedRec H8"/>
+          <p:cNvSpPr/>
+          <p:nvPr/>
+        </p:nvSpPr>
+        <p:spPr>
+          <a:xfrm>
+            <a:off x="3855478" y="4898529"/>
+            <a:ext cx="1230983" cy="562328"/>
+          </a:xfrm>
+          <a:prstGeom prst="rect">
+            <a:avLst/>
+          </a:prstGeom>
+          <a:solidFill>
+            <a:srgbClr val="E9CB4F"/>
+          </a:solidFill>
+          <a:ln>
+            <a:noFill/>
+          </a:ln>
+          <a:effectLst/>
+        </p:spPr>
+        <p:style>
+          <a:lnRef idx="1">
+            <a:schemeClr val="accent1"/>
+          </a:lnRef>
+          <a:fillRef idx="3">
+            <a:schemeClr val="accent1"/>
+          </a:fillRef>
+          <a:effectRef idx="2">
+            <a:schemeClr val="accent1"/>
+          </a:effectRef>
+          <a:fontRef idx="minor">
+            <a:schemeClr val="lt1"/>
+          </a:fontRef>
+        </p:style>
+        <p:txBody>
+          <a:bodyPr rtlCol="0" anchor="ctr"/>
+          <a:lstStyle/>
+          <a:p>
+            <a:pPr algn="ctr"/>
+            <a:endParaRPr sz="1199">
+              <a:latin typeface="Times New Roman" panose="02020603050405020304" pitchFamily="18" charset="0"/>
+              <a:cs typeface="Times New Roman" panose="02020603050405020304" pitchFamily="18" charset="0"/>
+            </a:endParaRPr>
+          </a:p>
+        </p:txBody>
+      </p:sp>
+      <p:sp>
+        <p:nvSpPr>
+          <p:cNvPr id="147" name="Patch Patientory H8"/>
+          <p:cNvSpPr/>
+          <p:nvPr/>
+        </p:nvSpPr>
+        <p:spPr>
+          <a:xfrm>
+            <a:off x="5116460" y="4898529"/>
+            <a:ext cx="1243682" cy="562328"/>
+          </a:xfrm>
+          <a:prstGeom prst="rect">
+            <a:avLst/>
+          </a:prstGeom>
+          <a:solidFill>
+            <a:srgbClr val="A9CE6B"/>
+          </a:solidFill>
+          <a:ln>
+            <a:noFill/>
+          </a:ln>
+          <a:effectLst/>
+        </p:spPr>
+        <p:style>
+          <a:lnRef idx="1">
+            <a:schemeClr val="accent1"/>
+          </a:lnRef>
+          <a:fillRef idx="3">
+            <a:schemeClr val="accent1"/>
+          </a:fillRef>
+          <a:effectRef idx="2">
+            <a:schemeClr val="accent1"/>
+          </a:effectRef>
+          <a:fontRef idx="minor">
+            <a:schemeClr val="lt1"/>
+          </a:fontRef>
+        </p:style>
+        <p:txBody>
+          <a:bodyPr rtlCol="0" anchor="ctr"/>
+          <a:lstStyle/>
+          <a:p>
+            <a:pPr algn="ctr"/>
+            <a:endParaRPr sz="1600">
+              <a:latin typeface="Times New Roman" panose="02020603050405020304" pitchFamily="18" charset="0"/>
+              <a:cs typeface="Times New Roman" panose="02020603050405020304" pitchFamily="18" charset="0"/>
+            </a:endParaRPr>
+          </a:p>
+        </p:txBody>
+      </p:sp>
+      <p:sp>
+        <p:nvSpPr>
+          <p:cNvPr id="61" name="TextBox 61"/>
+          <p:cNvSpPr txBox="1"/>
+          <p:nvPr/>
+        </p:nvSpPr>
+        <p:spPr>
+          <a:xfrm>
+            <a:off x="4181846" y="431884"/>
+            <a:ext cx="888359" cy="298159"/>
+          </a:xfrm>
+          <a:prstGeom prst="rect">
+            <a:avLst/>
+          </a:prstGeom>
+        </p:spPr>
+        <p:txBody>
+          <a:bodyPr wrap="square" lIns="0" tIns="0" rIns="0" bIns="0" rtlCol="0" anchor="t">
+            <a:spAutoFit/>
+          </a:bodyPr>
+          <a:lstStyle/>
+          <a:p>
+            <a:pPr algn="ctr">
+              <a:lnSpc>
+                <a:spcPts val="2626"/>
+              </a:lnSpc>
+            </a:pPr>
+            <a:r>
+              <a:rPr lang="en-US" sz="1600" b="1" dirty="0" err="1">
+                <a:latin typeface="Times New Roman" panose="02020603050405020304" pitchFamily="18" charset="0"/>
+                <a:ea typeface="DejaVu Sans Bold"/>
+                <a:cs typeface="Times New Roman" panose="02020603050405020304" pitchFamily="18" charset="0"/>
+                <a:sym typeface="DejaVu Sans Bold"/>
+              </a:rPr>
+              <a:t>MedRec</a:t>
+            </a:r>
+            <a:r>
+              <a:rPr lang="en-US" sz="1600" b="1" dirty="0">
+                <a:latin typeface="Times New Roman" panose="02020603050405020304" pitchFamily="18" charset="0"/>
+                <a:ea typeface="DejaVu Sans Bold"/>
+                <a:cs typeface="Times New Roman" panose="02020603050405020304" pitchFamily="18" charset="0"/>
+                <a:sym typeface="DejaVu Sans Bold"/>
+              </a:rPr>
+              <a:t> </a:t>
+            </a:r>
+          </a:p>
+        </p:txBody>
+      </p:sp>
+      <p:sp>
+        <p:nvSpPr>
+          <p:cNvPr id="62" name="TextBox 62"/>
+          <p:cNvSpPr txBox="1"/>
+          <p:nvPr/>
+        </p:nvSpPr>
+        <p:spPr>
+          <a:xfrm>
+            <a:off x="4430879" y="1546727"/>
+            <a:ext cx="94669" cy="192360"/>
+          </a:xfrm>
+          <a:prstGeom prst="rect">
+            <a:avLst/>
+          </a:prstGeom>
+        </p:spPr>
+        <p:txBody>
+          <a:bodyPr lIns="0" tIns="0" rIns="0" bIns="0" rtlCol="0" anchor="t">
+            <a:spAutoFit/>
+          </a:bodyPr>
+          <a:lstStyle/>
+          <a:p>
+            <a:pPr>
+              <a:lnSpc>
+                <a:spcPts val="1470"/>
+              </a:lnSpc>
+            </a:pPr>
+            <a:r>
+              <a:rPr lang="en-US" sz="1600" b="1">
+                <a:solidFill>
+                  <a:srgbClr val="FFFFFF"/>
+                </a:solidFill>
+                <a:latin typeface="Times New Roman" panose="02020603050405020304" pitchFamily="18" charset="0"/>
+                <a:ea typeface="DejaVu Sans Bold"/>
+                <a:cs typeface="Times New Roman" panose="02020603050405020304" pitchFamily="18" charset="0"/>
+                <a:sym typeface="DejaVu Sans Bold"/>
+              </a:rPr>
+              <a:t>3</a:t>
+            </a:r>
+          </a:p>
+        </p:txBody>
+      </p:sp>
+      <p:sp>
+        <p:nvSpPr>
+          <p:cNvPr id="63" name="TextBox 63"/>
+          <p:cNvSpPr txBox="1"/>
+          <p:nvPr/>
+        </p:nvSpPr>
+        <p:spPr>
+          <a:xfrm>
+            <a:off x="4430879" y="2139068"/>
+            <a:ext cx="94669" cy="192360"/>
+          </a:xfrm>
+          <a:prstGeom prst="rect">
+            <a:avLst/>
+          </a:prstGeom>
+        </p:spPr>
+        <p:txBody>
+          <a:bodyPr lIns="0" tIns="0" rIns="0" bIns="0" rtlCol="0" anchor="t">
+            <a:spAutoFit/>
+          </a:bodyPr>
+          <a:lstStyle/>
+          <a:p>
+            <a:pPr>
+              <a:lnSpc>
+                <a:spcPts val="1470"/>
+              </a:lnSpc>
+            </a:pPr>
+            <a:r>
+              <a:rPr lang="en-US" sz="1600" b="1">
+                <a:solidFill>
+                  <a:srgbClr val="FFFFFF"/>
+                </a:solidFill>
+                <a:latin typeface="Times New Roman" panose="02020603050405020304" pitchFamily="18" charset="0"/>
+                <a:ea typeface="DejaVu Sans Bold"/>
+                <a:cs typeface="Times New Roman" panose="02020603050405020304" pitchFamily="18" charset="0"/>
+                <a:sym typeface="DejaVu Sans Bold"/>
+              </a:rPr>
+              <a:t>4</a:t>
+            </a:r>
+          </a:p>
+        </p:txBody>
+      </p:sp>
+      <p:sp>
+        <p:nvSpPr>
+          <p:cNvPr id="64" name="TextBox 64"/>
+          <p:cNvSpPr txBox="1"/>
+          <p:nvPr/>
+        </p:nvSpPr>
+        <p:spPr>
+          <a:xfrm>
+            <a:off x="4430879" y="2731419"/>
+            <a:ext cx="94669" cy="192360"/>
+          </a:xfrm>
+          <a:prstGeom prst="rect">
+            <a:avLst/>
+          </a:prstGeom>
+        </p:spPr>
+        <p:txBody>
+          <a:bodyPr lIns="0" tIns="0" rIns="0" bIns="0" rtlCol="0" anchor="t">
+            <a:spAutoFit/>
+          </a:bodyPr>
+          <a:lstStyle/>
+          <a:p>
+            <a:pPr>
+              <a:lnSpc>
+                <a:spcPts val="1470"/>
+              </a:lnSpc>
+            </a:pPr>
+            <a:r>
+              <a:rPr lang="en-US" sz="1600" b="1">
+                <a:solidFill>
+                  <a:srgbClr val="20242A"/>
+                </a:solidFill>
+                <a:latin typeface="Times New Roman" panose="02020603050405020304" pitchFamily="18" charset="0"/>
+                <a:ea typeface="DejaVu Sans Bold"/>
+                <a:cs typeface="Times New Roman" panose="02020603050405020304" pitchFamily="18" charset="0"/>
+                <a:sym typeface="DejaVu Sans Bold"/>
+              </a:rPr>
+              <a:t>2</a:t>
+            </a:r>
+          </a:p>
+        </p:txBody>
+      </p:sp>
+      <p:sp>
+        <p:nvSpPr>
+          <p:cNvPr id="65" name="TextBox 65"/>
+          <p:cNvSpPr txBox="1"/>
+          <p:nvPr/>
+        </p:nvSpPr>
+        <p:spPr>
+          <a:xfrm>
+            <a:off x="4430879" y="3323768"/>
+            <a:ext cx="94669" cy="192360"/>
+          </a:xfrm>
+          <a:prstGeom prst="rect">
+            <a:avLst/>
+          </a:prstGeom>
+        </p:spPr>
+        <p:txBody>
+          <a:bodyPr lIns="0" tIns="0" rIns="0" bIns="0" rtlCol="0" anchor="t">
+            <a:spAutoFit/>
+          </a:bodyPr>
+          <a:lstStyle/>
+          <a:p>
+            <a:pPr>
+              <a:lnSpc>
+                <a:spcPts val="1470"/>
+              </a:lnSpc>
+            </a:pPr>
+            <a:r>
+              <a:rPr lang="en-US" sz="1600" b="1">
+                <a:solidFill>
+                  <a:srgbClr val="FFFFFF"/>
+                </a:solidFill>
+                <a:latin typeface="Times New Roman" panose="02020603050405020304" pitchFamily="18" charset="0"/>
+                <a:ea typeface="DejaVu Sans Bold"/>
+                <a:cs typeface="Times New Roman" panose="02020603050405020304" pitchFamily="18" charset="0"/>
+                <a:sym typeface="DejaVu Sans Bold"/>
+              </a:rPr>
+              <a:t>3</a:t>
+            </a:r>
+          </a:p>
+        </p:txBody>
+      </p:sp>
+      <p:sp>
+        <p:nvSpPr>
+          <p:cNvPr id="66" name="TextBox 66"/>
+          <p:cNvSpPr txBox="1"/>
+          <p:nvPr/>
+        </p:nvSpPr>
+        <p:spPr>
+          <a:xfrm>
+            <a:off x="4430879" y="3916118"/>
+            <a:ext cx="94669" cy="192360"/>
+          </a:xfrm>
+          <a:prstGeom prst="rect">
+            <a:avLst/>
+          </a:prstGeom>
+        </p:spPr>
+        <p:txBody>
+          <a:bodyPr lIns="0" tIns="0" rIns="0" bIns="0" rtlCol="0" anchor="t">
+            <a:spAutoFit/>
+          </a:bodyPr>
+          <a:lstStyle/>
+          <a:p>
+            <a:pPr>
+              <a:lnSpc>
+                <a:spcPts val="1470"/>
+              </a:lnSpc>
+            </a:pPr>
+            <a:r>
+              <a:rPr lang="en-US" sz="1600" b="1">
+                <a:solidFill>
+                  <a:srgbClr val="FFFFFF"/>
+                </a:solidFill>
+                <a:latin typeface="Times New Roman" panose="02020603050405020304" pitchFamily="18" charset="0"/>
+                <a:ea typeface="DejaVu Sans Bold"/>
+                <a:cs typeface="Times New Roman" panose="02020603050405020304" pitchFamily="18" charset="0"/>
+                <a:sym typeface="DejaVu Sans Bold"/>
+              </a:rPr>
+              <a:t>3</a:t>
+            </a:r>
+          </a:p>
+        </p:txBody>
+      </p:sp>
+      <p:sp>
+        <p:nvSpPr>
+          <p:cNvPr id="67" name="TextBox 67"/>
+          <p:cNvSpPr txBox="1"/>
+          <p:nvPr/>
+        </p:nvSpPr>
+        <p:spPr>
+          <a:xfrm>
+            <a:off x="4430879" y="4508468"/>
+            <a:ext cx="94669" cy="192360"/>
+          </a:xfrm>
+          <a:prstGeom prst="rect">
+            <a:avLst/>
+          </a:prstGeom>
+        </p:spPr>
+        <p:txBody>
+          <a:bodyPr lIns="0" tIns="0" rIns="0" bIns="0" rtlCol="0" anchor="t">
+            <a:spAutoFit/>
+          </a:bodyPr>
+          <a:lstStyle/>
+          <a:p>
+            <a:pPr>
+              <a:lnSpc>
+                <a:spcPts val="1470"/>
+              </a:lnSpc>
+            </a:pPr>
+            <a:r>
+              <a:rPr lang="en-US" sz="1600" b="1">
+                <a:solidFill>
+                  <a:srgbClr val="20242A"/>
+                </a:solidFill>
+                <a:latin typeface="Times New Roman" panose="02020603050405020304" pitchFamily="18" charset="0"/>
+                <a:ea typeface="DejaVu Sans Bold"/>
+                <a:cs typeface="Times New Roman" panose="02020603050405020304" pitchFamily="18" charset="0"/>
+                <a:sym typeface="DejaVu Sans Bold"/>
+              </a:rPr>
+              <a:t>2</a:t>
+            </a:r>
+          </a:p>
+        </p:txBody>
+      </p:sp>
+      <p:sp>
+        <p:nvSpPr>
+          <p:cNvPr id="68" name="TextBox 68"/>
+          <p:cNvSpPr txBox="1"/>
+          <p:nvPr/>
+        </p:nvSpPr>
+        <p:spPr>
+          <a:xfrm>
+            <a:off x="4430879" y="5100810"/>
+            <a:ext cx="94669" cy="192360"/>
+          </a:xfrm>
+          <a:prstGeom prst="rect">
+            <a:avLst/>
+          </a:prstGeom>
+        </p:spPr>
+        <p:txBody>
+          <a:bodyPr lIns="0" tIns="0" rIns="0" bIns="0" rtlCol="0" anchor="t">
+            <a:spAutoFit/>
+          </a:bodyPr>
+          <a:lstStyle/>
+          <a:p>
+            <a:pPr>
+              <a:lnSpc>
+                <a:spcPts val="1470"/>
+              </a:lnSpc>
+            </a:pPr>
+            <a:r>
+              <a:rPr lang="en-US" sz="1600" b="1">
+                <a:solidFill>
+                  <a:srgbClr val="20242A"/>
+                </a:solidFill>
+                <a:latin typeface="Times New Roman" panose="02020603050405020304" pitchFamily="18" charset="0"/>
+                <a:ea typeface="DejaVu Sans Bold"/>
+                <a:cs typeface="Times New Roman" panose="02020603050405020304" pitchFamily="18" charset="0"/>
+                <a:sym typeface="DejaVu Sans Bold"/>
+              </a:rPr>
+              <a:t>2</a:t>
+            </a:r>
+          </a:p>
+        </p:txBody>
+      </p:sp>
+      <p:sp>
+        <p:nvSpPr>
+          <p:cNvPr id="69" name="TextBox 69"/>
+          <p:cNvSpPr txBox="1"/>
+          <p:nvPr/>
+        </p:nvSpPr>
+        <p:spPr>
+          <a:xfrm>
+            <a:off x="4430879" y="5693159"/>
+            <a:ext cx="94669" cy="192360"/>
+          </a:xfrm>
+          <a:prstGeom prst="rect">
+            <a:avLst/>
+          </a:prstGeom>
+        </p:spPr>
+        <p:txBody>
+          <a:bodyPr lIns="0" tIns="0" rIns="0" bIns="0" rtlCol="0" anchor="t">
+            <a:spAutoFit/>
+          </a:bodyPr>
+          <a:lstStyle/>
+          <a:p>
+            <a:pPr>
+              <a:lnSpc>
+                <a:spcPts val="1470"/>
+              </a:lnSpc>
+            </a:pPr>
+            <a:r>
+              <a:rPr lang="en-US" sz="1600" b="1">
+                <a:solidFill>
+                  <a:srgbClr val="FFFFFF"/>
+                </a:solidFill>
+                <a:latin typeface="Times New Roman" panose="02020603050405020304" pitchFamily="18" charset="0"/>
+                <a:ea typeface="DejaVu Sans Bold"/>
+                <a:cs typeface="Times New Roman" panose="02020603050405020304" pitchFamily="18" charset="0"/>
+                <a:sym typeface="DejaVu Sans Bold"/>
+              </a:rPr>
+              <a:t>4</a:t>
+            </a:r>
+          </a:p>
+        </p:txBody>
+      </p:sp>
+      <p:sp>
+        <p:nvSpPr>
+          <p:cNvPr id="70" name="TextBox 70"/>
+          <p:cNvSpPr txBox="1"/>
+          <p:nvPr/>
+        </p:nvSpPr>
+        <p:spPr>
+          <a:xfrm>
+            <a:off x="4430879" y="6285509"/>
+            <a:ext cx="94669" cy="192360"/>
+          </a:xfrm>
+          <a:prstGeom prst="rect">
+            <a:avLst/>
+          </a:prstGeom>
+        </p:spPr>
+        <p:txBody>
+          <a:bodyPr lIns="0" tIns="0" rIns="0" bIns="0" rtlCol="0" anchor="t">
+            <a:spAutoFit/>
+          </a:bodyPr>
+          <a:lstStyle/>
+          <a:p>
+            <a:pPr>
+              <a:lnSpc>
+                <a:spcPts val="1470"/>
+              </a:lnSpc>
+            </a:pPr>
+            <a:r>
+              <a:rPr lang="en-US" sz="1600" b="1">
+                <a:solidFill>
+                  <a:srgbClr val="FFFFFF"/>
+                </a:solidFill>
+                <a:latin typeface="Times New Roman" panose="02020603050405020304" pitchFamily="18" charset="0"/>
+                <a:ea typeface="DejaVu Sans Bold"/>
+                <a:cs typeface="Times New Roman" panose="02020603050405020304" pitchFamily="18" charset="0"/>
+                <a:sym typeface="DejaVu Sans Bold"/>
+              </a:rPr>
+              <a:t>3</a:t>
+            </a:r>
+          </a:p>
+        </p:txBody>
+      </p:sp>
+      <p:sp>
+        <p:nvSpPr>
+          <p:cNvPr id="71" name="TextBox 71"/>
+          <p:cNvSpPr txBox="1"/>
+          <p:nvPr/>
+        </p:nvSpPr>
+        <p:spPr>
+          <a:xfrm>
+            <a:off x="5950602" y="260518"/>
+            <a:ext cx="56351" cy="199542"/>
+          </a:xfrm>
+          <a:prstGeom prst="rect">
+            <a:avLst/>
+          </a:prstGeom>
+        </p:spPr>
+        <p:txBody>
+          <a:bodyPr lIns="0" tIns="0" rIns="0" bIns="0" rtlCol="0" anchor="t">
+            <a:spAutoFit/>
+          </a:bodyPr>
+          <a:lstStyle/>
+          <a:p>
+            <a:pPr>
+              <a:lnSpc>
+                <a:spcPts val="1749"/>
+              </a:lnSpc>
+            </a:pPr>
+            <a:r>
+              <a:rPr lang="en-US" sz="1199" b="1">
+                <a:solidFill>
+                  <a:srgbClr val="000000"/>
+                </a:solidFill>
+                <a:latin typeface="Times New Roman" panose="02020603050405020304" pitchFamily="18" charset="0"/>
+                <a:ea typeface="DejaVu Sans Bold"/>
+                <a:cs typeface="Times New Roman" panose="02020603050405020304" pitchFamily="18" charset="0"/>
+                <a:sym typeface="DejaVu Sans Bold"/>
+              </a:rPr>
+              <a:t> </a:t>
+            </a:r>
+          </a:p>
+        </p:txBody>
+      </p:sp>
+      <p:sp>
+        <p:nvSpPr>
+          <p:cNvPr id="72" name="TextBox 72"/>
+          <p:cNvSpPr txBox="1"/>
+          <p:nvPr/>
+        </p:nvSpPr>
+        <p:spPr>
+          <a:xfrm>
+            <a:off x="5357289" y="430694"/>
+            <a:ext cx="945109" cy="298159"/>
+          </a:xfrm>
+          <a:prstGeom prst="rect">
+            <a:avLst/>
+          </a:prstGeom>
+        </p:spPr>
+        <p:txBody>
+          <a:bodyPr wrap="square" lIns="0" tIns="0" rIns="0" bIns="0" rtlCol="0" anchor="t">
+            <a:spAutoFit/>
+          </a:bodyPr>
+          <a:lstStyle/>
+          <a:p>
+            <a:pPr algn="ctr">
+              <a:lnSpc>
+                <a:spcPts val="2626"/>
+              </a:lnSpc>
+            </a:pPr>
+            <a:r>
+              <a:rPr lang="en-US" sz="1600" b="1" dirty="0" err="1">
+                <a:latin typeface="Times New Roman" panose="02020603050405020304" pitchFamily="18" charset="0"/>
+                <a:ea typeface="DejaVu Sans Bold"/>
+                <a:cs typeface="Times New Roman" panose="02020603050405020304" pitchFamily="18" charset="0"/>
+                <a:sym typeface="DejaVu Sans Bold"/>
+              </a:rPr>
+              <a:t>Patientory</a:t>
+            </a:r>
+            <a:r>
+              <a:rPr lang="en-US" sz="1600" b="1" dirty="0">
+                <a:latin typeface="Times New Roman" panose="02020603050405020304" pitchFamily="18" charset="0"/>
+                <a:ea typeface="DejaVu Sans Bold"/>
+                <a:cs typeface="Times New Roman" panose="02020603050405020304" pitchFamily="18" charset="0"/>
+                <a:sym typeface="DejaVu Sans Bold"/>
+              </a:rPr>
+              <a:t> </a:t>
+            </a:r>
+          </a:p>
+        </p:txBody>
+      </p:sp>
+      <p:sp>
+        <p:nvSpPr>
+          <p:cNvPr id="73" name="TextBox 73"/>
+          <p:cNvSpPr txBox="1"/>
+          <p:nvPr/>
+        </p:nvSpPr>
+        <p:spPr>
+          <a:xfrm>
+            <a:off x="5704551" y="1546727"/>
+            <a:ext cx="94669" cy="192360"/>
+          </a:xfrm>
+          <a:prstGeom prst="rect">
+            <a:avLst/>
+          </a:prstGeom>
+        </p:spPr>
+        <p:txBody>
+          <a:bodyPr lIns="0" tIns="0" rIns="0" bIns="0" rtlCol="0" anchor="t">
+            <a:spAutoFit/>
+          </a:bodyPr>
+          <a:lstStyle/>
+          <a:p>
+            <a:pPr>
+              <a:lnSpc>
+                <a:spcPts val="1470"/>
+              </a:lnSpc>
+            </a:pPr>
+            <a:r>
+              <a:rPr lang="en-US" sz="1600" b="1" dirty="0">
+                <a:solidFill>
+                  <a:srgbClr val="20242A"/>
+                </a:solidFill>
+                <a:latin typeface="Times New Roman" panose="02020603050405020304" pitchFamily="18" charset="0"/>
+                <a:ea typeface="DejaVu Sans Bold"/>
+                <a:cs typeface="Times New Roman" panose="02020603050405020304" pitchFamily="18" charset="0"/>
+                <a:sym typeface="DejaVu Sans Bold"/>
+              </a:rPr>
+              <a:t>2</a:t>
+            </a:r>
+          </a:p>
+        </p:txBody>
+      </p:sp>
+      <p:sp>
+        <p:nvSpPr>
+          <p:cNvPr id="74" name="TextBox 74"/>
+          <p:cNvSpPr txBox="1"/>
+          <p:nvPr/>
+        </p:nvSpPr>
+        <p:spPr>
+          <a:xfrm>
+            <a:off x="5704551" y="2139068"/>
+            <a:ext cx="94669" cy="192360"/>
+          </a:xfrm>
+          <a:prstGeom prst="rect">
+            <a:avLst/>
+          </a:prstGeom>
+        </p:spPr>
+        <p:txBody>
+          <a:bodyPr lIns="0" tIns="0" rIns="0" bIns="0" rtlCol="0" anchor="t">
+            <a:spAutoFit/>
+          </a:bodyPr>
+          <a:lstStyle/>
+          <a:p>
+            <a:pPr>
+              <a:lnSpc>
+                <a:spcPts val="1470"/>
+              </a:lnSpc>
+            </a:pPr>
+            <a:r>
+              <a:rPr lang="en-US" sz="1600" b="1">
+                <a:solidFill>
+                  <a:srgbClr val="FFFFFF"/>
+                </a:solidFill>
+                <a:latin typeface="Times New Roman" panose="02020603050405020304" pitchFamily="18" charset="0"/>
+                <a:ea typeface="DejaVu Sans Bold"/>
+                <a:cs typeface="Times New Roman" panose="02020603050405020304" pitchFamily="18" charset="0"/>
+                <a:sym typeface="DejaVu Sans Bold"/>
+              </a:rPr>
+              <a:t>3</a:t>
+            </a:r>
+          </a:p>
+        </p:txBody>
+      </p:sp>
+      <p:sp>
+        <p:nvSpPr>
+          <p:cNvPr id="75" name="TextBox 75"/>
+          <p:cNvSpPr txBox="1"/>
+          <p:nvPr/>
+        </p:nvSpPr>
+        <p:spPr>
+          <a:xfrm>
+            <a:off x="5704551" y="2731419"/>
+            <a:ext cx="94669" cy="192360"/>
+          </a:xfrm>
+          <a:prstGeom prst="rect">
+            <a:avLst/>
+          </a:prstGeom>
+        </p:spPr>
+        <p:txBody>
+          <a:bodyPr lIns="0" tIns="0" rIns="0" bIns="0" rtlCol="0" anchor="t">
+            <a:spAutoFit/>
+          </a:bodyPr>
+          <a:lstStyle/>
+          <a:p>
+            <a:pPr>
+              <a:lnSpc>
+                <a:spcPts val="1470"/>
+              </a:lnSpc>
+            </a:pPr>
+            <a:r>
+              <a:rPr lang="en-US" sz="1600" b="1">
+                <a:solidFill>
+                  <a:srgbClr val="20242A"/>
+                </a:solidFill>
+                <a:latin typeface="Times New Roman" panose="02020603050405020304" pitchFamily="18" charset="0"/>
+                <a:ea typeface="DejaVu Sans Bold"/>
+                <a:cs typeface="Times New Roman" panose="02020603050405020304" pitchFamily="18" charset="0"/>
+                <a:sym typeface="DejaVu Sans Bold"/>
+              </a:rPr>
+              <a:t>2</a:t>
+            </a:r>
+          </a:p>
+        </p:txBody>
+      </p:sp>
+      <p:sp>
+        <p:nvSpPr>
+          <p:cNvPr id="76" name="TextBox 76"/>
+          <p:cNvSpPr txBox="1"/>
+          <p:nvPr/>
+        </p:nvSpPr>
+        <p:spPr>
+          <a:xfrm>
+            <a:off x="5704551" y="3323768"/>
+            <a:ext cx="94669" cy="192360"/>
+          </a:xfrm>
+          <a:prstGeom prst="rect">
+            <a:avLst/>
+          </a:prstGeom>
+        </p:spPr>
+        <p:txBody>
+          <a:bodyPr lIns="0" tIns="0" rIns="0" bIns="0" rtlCol="0" anchor="t">
+            <a:spAutoFit/>
+          </a:bodyPr>
+          <a:lstStyle/>
+          <a:p>
+            <a:pPr>
+              <a:lnSpc>
+                <a:spcPts val="1470"/>
+              </a:lnSpc>
+            </a:pPr>
+            <a:r>
+              <a:rPr lang="en-US" sz="1600" b="1">
+                <a:solidFill>
+                  <a:srgbClr val="FFFFFF"/>
+                </a:solidFill>
+                <a:latin typeface="Times New Roman" panose="02020603050405020304" pitchFamily="18" charset="0"/>
+                <a:ea typeface="DejaVu Sans Bold"/>
+                <a:cs typeface="Times New Roman" panose="02020603050405020304" pitchFamily="18" charset="0"/>
+                <a:sym typeface="DejaVu Sans Bold"/>
+              </a:rPr>
+              <a:t>3</a:t>
+            </a:r>
+          </a:p>
+        </p:txBody>
+      </p:sp>
+      <p:sp>
+        <p:nvSpPr>
+          <p:cNvPr id="77" name="TextBox 77"/>
+          <p:cNvSpPr txBox="1"/>
+          <p:nvPr/>
+        </p:nvSpPr>
+        <p:spPr>
+          <a:xfrm>
+            <a:off x="5704551" y="3916118"/>
+            <a:ext cx="94669" cy="192360"/>
+          </a:xfrm>
+          <a:prstGeom prst="rect">
+            <a:avLst/>
+          </a:prstGeom>
+        </p:spPr>
+        <p:txBody>
+          <a:bodyPr lIns="0" tIns="0" rIns="0" bIns="0" rtlCol="0" anchor="t">
+            <a:spAutoFit/>
+          </a:bodyPr>
+          <a:lstStyle/>
+          <a:p>
+            <a:pPr>
+              <a:lnSpc>
+                <a:spcPts val="1470"/>
+              </a:lnSpc>
+            </a:pPr>
+            <a:r>
+              <a:rPr lang="en-US" sz="1600" b="1">
+                <a:solidFill>
+                  <a:srgbClr val="20242A"/>
+                </a:solidFill>
+                <a:latin typeface="Times New Roman" panose="02020603050405020304" pitchFamily="18" charset="0"/>
+                <a:ea typeface="DejaVu Sans Bold"/>
+                <a:cs typeface="Times New Roman" panose="02020603050405020304" pitchFamily="18" charset="0"/>
+                <a:sym typeface="DejaVu Sans Bold"/>
+              </a:rPr>
+              <a:t>2</a:t>
+            </a:r>
+          </a:p>
+        </p:txBody>
+      </p:sp>
+      <p:sp>
+        <p:nvSpPr>
+          <p:cNvPr id="78" name="TextBox 78"/>
+          <p:cNvSpPr txBox="1"/>
+          <p:nvPr/>
+        </p:nvSpPr>
+        <p:spPr>
+          <a:xfrm>
+            <a:off x="5704551" y="4508468"/>
+            <a:ext cx="94669" cy="192360"/>
+          </a:xfrm>
+          <a:prstGeom prst="rect">
+            <a:avLst/>
+          </a:prstGeom>
+        </p:spPr>
+        <p:txBody>
+          <a:bodyPr lIns="0" tIns="0" rIns="0" bIns="0" rtlCol="0" anchor="t">
+            <a:spAutoFit/>
+          </a:bodyPr>
+          <a:lstStyle/>
+          <a:p>
+            <a:pPr>
+              <a:lnSpc>
+                <a:spcPts val="1470"/>
+              </a:lnSpc>
+            </a:pPr>
+            <a:r>
+              <a:rPr lang="en-US" sz="1600" b="1">
+                <a:solidFill>
+                  <a:srgbClr val="20242A"/>
+                </a:solidFill>
+                <a:latin typeface="Times New Roman" panose="02020603050405020304" pitchFamily="18" charset="0"/>
+                <a:ea typeface="DejaVu Sans Bold"/>
+                <a:cs typeface="Times New Roman" panose="02020603050405020304" pitchFamily="18" charset="0"/>
+                <a:sym typeface="DejaVu Sans Bold"/>
+              </a:rPr>
+              <a:t>2</a:t>
+            </a:r>
+          </a:p>
+        </p:txBody>
+      </p:sp>
+      <p:sp>
+        <p:nvSpPr>
+          <p:cNvPr id="79" name="TextBox 79"/>
+          <p:cNvSpPr txBox="1"/>
+          <p:nvPr/>
+        </p:nvSpPr>
+        <p:spPr>
+          <a:xfrm>
+            <a:off x="5704551" y="5100810"/>
+            <a:ext cx="94669" cy="192360"/>
+          </a:xfrm>
+          <a:prstGeom prst="rect">
+            <a:avLst/>
+          </a:prstGeom>
+        </p:spPr>
+        <p:txBody>
+          <a:bodyPr lIns="0" tIns="0" rIns="0" bIns="0" rtlCol="0" anchor="t">
+            <a:spAutoFit/>
+          </a:bodyPr>
+          <a:lstStyle/>
+          <a:p>
+            <a:pPr>
+              <a:lnSpc>
+                <a:spcPts val="1470"/>
+              </a:lnSpc>
+            </a:pPr>
+            <a:r>
+              <a:rPr lang="en-US" sz="1600" b="1">
+                <a:solidFill>
+                  <a:srgbClr val="20242A"/>
+                </a:solidFill>
+                <a:latin typeface="Times New Roman" panose="02020603050405020304" pitchFamily="18" charset="0"/>
+                <a:ea typeface="DejaVu Sans Bold"/>
+                <a:cs typeface="Times New Roman" panose="02020603050405020304" pitchFamily="18" charset="0"/>
+                <a:sym typeface="DejaVu Sans Bold"/>
+              </a:rPr>
+              <a:t>1</a:t>
+            </a:r>
+          </a:p>
+        </p:txBody>
+      </p:sp>
+      <p:sp>
+        <p:nvSpPr>
+          <p:cNvPr id="80" name="TextBox 80"/>
+          <p:cNvSpPr txBox="1"/>
+          <p:nvPr/>
+        </p:nvSpPr>
+        <p:spPr>
+          <a:xfrm>
+            <a:off x="5704551" y="5693159"/>
+            <a:ext cx="94669" cy="192360"/>
+          </a:xfrm>
+          <a:prstGeom prst="rect">
+            <a:avLst/>
+          </a:prstGeom>
+        </p:spPr>
+        <p:txBody>
+          <a:bodyPr lIns="0" tIns="0" rIns="0" bIns="0" rtlCol="0" anchor="t">
+            <a:spAutoFit/>
+          </a:bodyPr>
+          <a:lstStyle/>
+          <a:p>
+            <a:pPr>
+              <a:lnSpc>
+                <a:spcPts val="1470"/>
+              </a:lnSpc>
+            </a:pPr>
+            <a:r>
+              <a:rPr lang="en-US" sz="1600" b="1">
+                <a:solidFill>
+                  <a:srgbClr val="FFFFFF"/>
+                </a:solidFill>
+                <a:latin typeface="Times New Roman" panose="02020603050405020304" pitchFamily="18" charset="0"/>
+                <a:ea typeface="DejaVu Sans Bold"/>
+                <a:cs typeface="Times New Roman" panose="02020603050405020304" pitchFamily="18" charset="0"/>
+                <a:sym typeface="DejaVu Sans Bold"/>
+              </a:rPr>
+              <a:t>3</a:t>
+            </a:r>
+          </a:p>
+        </p:txBody>
+      </p:sp>
+      <p:sp>
+        <p:nvSpPr>
+          <p:cNvPr id="81" name="TextBox 81"/>
+          <p:cNvSpPr txBox="1"/>
+          <p:nvPr/>
+        </p:nvSpPr>
+        <p:spPr>
+          <a:xfrm>
+            <a:off x="5704551" y="6285509"/>
+            <a:ext cx="94669" cy="192360"/>
+          </a:xfrm>
+          <a:prstGeom prst="rect">
+            <a:avLst/>
+          </a:prstGeom>
+        </p:spPr>
+        <p:txBody>
+          <a:bodyPr lIns="0" tIns="0" rIns="0" bIns="0" rtlCol="0" anchor="t">
+            <a:spAutoFit/>
+          </a:bodyPr>
+          <a:lstStyle/>
+          <a:p>
+            <a:pPr>
+              <a:lnSpc>
+                <a:spcPts val="1470"/>
+              </a:lnSpc>
+            </a:pPr>
+            <a:r>
+              <a:rPr lang="en-US" sz="1600" b="1">
+                <a:solidFill>
+                  <a:srgbClr val="20242A"/>
+                </a:solidFill>
+                <a:latin typeface="Times New Roman" panose="02020603050405020304" pitchFamily="18" charset="0"/>
+                <a:ea typeface="DejaVu Sans Bold"/>
+                <a:cs typeface="Times New Roman" panose="02020603050405020304" pitchFamily="18" charset="0"/>
+                <a:sym typeface="DejaVu Sans Bold"/>
+              </a:rPr>
+              <a:t>2</a:t>
+            </a:r>
+          </a:p>
+        </p:txBody>
+      </p:sp>
+      <p:sp>
+        <p:nvSpPr>
+          <p:cNvPr id="82" name="TextBox 82"/>
+          <p:cNvSpPr txBox="1"/>
+          <p:nvPr/>
+        </p:nvSpPr>
+        <p:spPr>
+          <a:xfrm>
+            <a:off x="7084714" y="260518"/>
+            <a:ext cx="56351" cy="199542"/>
+          </a:xfrm>
+          <a:prstGeom prst="rect">
+            <a:avLst/>
+          </a:prstGeom>
+        </p:spPr>
+        <p:txBody>
+          <a:bodyPr lIns="0" tIns="0" rIns="0" bIns="0" rtlCol="0" anchor="t">
+            <a:spAutoFit/>
+          </a:bodyPr>
+          <a:lstStyle/>
+          <a:p>
+            <a:pPr>
+              <a:lnSpc>
+                <a:spcPts val="1749"/>
+              </a:lnSpc>
+            </a:pPr>
+            <a:r>
+              <a:rPr lang="en-US" sz="1199" b="1">
+                <a:solidFill>
+                  <a:srgbClr val="000000"/>
+                </a:solidFill>
+                <a:latin typeface="Times New Roman" panose="02020603050405020304" pitchFamily="18" charset="0"/>
+                <a:ea typeface="DejaVu Sans Bold"/>
+                <a:cs typeface="Times New Roman" panose="02020603050405020304" pitchFamily="18" charset="0"/>
+                <a:sym typeface="DejaVu Sans Bold"/>
+              </a:rPr>
+              <a:t> </a:t>
+            </a:r>
+          </a:p>
+        </p:txBody>
+      </p:sp>
+      <p:sp>
+        <p:nvSpPr>
+          <p:cNvPr id="83" name="TextBox 83"/>
+          <p:cNvSpPr txBox="1"/>
+          <p:nvPr/>
+        </p:nvSpPr>
+        <p:spPr>
+          <a:xfrm>
+            <a:off x="6740596" y="431884"/>
+            <a:ext cx="792623" cy="298159"/>
+          </a:xfrm>
+          <a:prstGeom prst="rect">
+            <a:avLst/>
+          </a:prstGeom>
+        </p:spPr>
+        <p:txBody>
+          <a:bodyPr wrap="square" lIns="0" tIns="0" rIns="0" bIns="0" rtlCol="0" anchor="t">
+            <a:spAutoFit/>
+          </a:bodyPr>
+          <a:lstStyle/>
+          <a:p>
+            <a:pPr algn="ctr">
+              <a:lnSpc>
+                <a:spcPts val="2626"/>
+              </a:lnSpc>
+            </a:pPr>
+            <a:r>
+              <a:rPr lang="en-US" sz="1600" b="1" dirty="0" err="1">
+                <a:latin typeface="Times New Roman" panose="02020603050405020304" pitchFamily="18" charset="0"/>
+                <a:ea typeface="DejaVu Sans Bold"/>
+                <a:cs typeface="Times New Roman" panose="02020603050405020304" pitchFamily="18" charset="0"/>
+                <a:sym typeface="DejaVu Sans Bold"/>
+              </a:rPr>
+              <a:t>BurstIQ</a:t>
+            </a:r>
+            <a:r>
+              <a:rPr lang="en-US" sz="1199" b="1" dirty="0">
+                <a:latin typeface="Times New Roman" panose="02020603050405020304" pitchFamily="18" charset="0"/>
+                <a:ea typeface="DejaVu Sans Bold"/>
+                <a:cs typeface="Times New Roman" panose="02020603050405020304" pitchFamily="18" charset="0"/>
+                <a:sym typeface="DejaVu Sans Bold"/>
+              </a:rPr>
+              <a:t> </a:t>
+            </a:r>
+          </a:p>
+        </p:txBody>
+      </p:sp>
+      <p:sp>
+        <p:nvSpPr>
+          <p:cNvPr id="84" name="TextBox 84"/>
+          <p:cNvSpPr txBox="1"/>
+          <p:nvPr/>
+        </p:nvSpPr>
+        <p:spPr>
+          <a:xfrm>
+            <a:off x="6978225" y="1546727"/>
+            <a:ext cx="94669" cy="192360"/>
+          </a:xfrm>
+          <a:prstGeom prst="rect">
+            <a:avLst/>
+          </a:prstGeom>
+        </p:spPr>
+        <p:txBody>
+          <a:bodyPr lIns="0" tIns="0" rIns="0" bIns="0" rtlCol="0" anchor="t">
+            <a:spAutoFit/>
+          </a:bodyPr>
+          <a:lstStyle/>
+          <a:p>
+            <a:pPr>
+              <a:lnSpc>
+                <a:spcPts val="1470"/>
+              </a:lnSpc>
+            </a:pPr>
+            <a:r>
+              <a:rPr lang="en-US" sz="1600" b="1">
+                <a:solidFill>
+                  <a:srgbClr val="FFFFFF"/>
+                </a:solidFill>
+                <a:latin typeface="Times New Roman" panose="02020603050405020304" pitchFamily="18" charset="0"/>
+                <a:ea typeface="DejaVu Sans Bold"/>
+                <a:cs typeface="Times New Roman" panose="02020603050405020304" pitchFamily="18" charset="0"/>
+                <a:sym typeface="DejaVu Sans Bold"/>
+              </a:rPr>
+              <a:t>3</a:t>
+            </a:r>
+          </a:p>
+        </p:txBody>
+      </p:sp>
+      <p:sp>
+        <p:nvSpPr>
+          <p:cNvPr id="85" name="TextBox 85"/>
+          <p:cNvSpPr txBox="1"/>
+          <p:nvPr/>
+        </p:nvSpPr>
+        <p:spPr>
+          <a:xfrm>
+            <a:off x="6978225" y="2139068"/>
+            <a:ext cx="94669" cy="192360"/>
+          </a:xfrm>
+          <a:prstGeom prst="rect">
+            <a:avLst/>
+          </a:prstGeom>
+        </p:spPr>
+        <p:txBody>
+          <a:bodyPr lIns="0" tIns="0" rIns="0" bIns="0" rtlCol="0" anchor="t">
+            <a:spAutoFit/>
+          </a:bodyPr>
+          <a:lstStyle/>
+          <a:p>
+            <a:pPr>
+              <a:lnSpc>
+                <a:spcPts val="1470"/>
+              </a:lnSpc>
+            </a:pPr>
+            <a:r>
+              <a:rPr lang="en-US" sz="1600" b="1">
+                <a:solidFill>
+                  <a:srgbClr val="FFFFFF"/>
+                </a:solidFill>
+                <a:latin typeface="Times New Roman" panose="02020603050405020304" pitchFamily="18" charset="0"/>
+                <a:ea typeface="DejaVu Sans Bold"/>
+                <a:cs typeface="Times New Roman" panose="02020603050405020304" pitchFamily="18" charset="0"/>
+                <a:sym typeface="DejaVu Sans Bold"/>
+              </a:rPr>
+              <a:t>4</a:t>
+            </a:r>
+          </a:p>
+        </p:txBody>
+      </p:sp>
+      <p:sp>
+        <p:nvSpPr>
+          <p:cNvPr id="86" name="TextBox 86"/>
+          <p:cNvSpPr txBox="1"/>
+          <p:nvPr/>
+        </p:nvSpPr>
+        <p:spPr>
+          <a:xfrm>
+            <a:off x="6978225" y="2731419"/>
+            <a:ext cx="94669" cy="192360"/>
+          </a:xfrm>
+          <a:prstGeom prst="rect">
+            <a:avLst/>
+          </a:prstGeom>
+        </p:spPr>
+        <p:txBody>
+          <a:bodyPr lIns="0" tIns="0" rIns="0" bIns="0" rtlCol="0" anchor="t">
+            <a:spAutoFit/>
+          </a:bodyPr>
+          <a:lstStyle/>
+          <a:p>
+            <a:pPr>
+              <a:lnSpc>
+                <a:spcPts val="1470"/>
+              </a:lnSpc>
+            </a:pPr>
+            <a:r>
+              <a:rPr lang="en-US" sz="1600" b="1">
+                <a:solidFill>
+                  <a:srgbClr val="20242A"/>
+                </a:solidFill>
+                <a:latin typeface="Times New Roman" panose="02020603050405020304" pitchFamily="18" charset="0"/>
+                <a:ea typeface="DejaVu Sans Bold"/>
+                <a:cs typeface="Times New Roman" panose="02020603050405020304" pitchFamily="18" charset="0"/>
+                <a:sym typeface="DejaVu Sans Bold"/>
+              </a:rPr>
+              <a:t>2</a:t>
+            </a:r>
+          </a:p>
+        </p:txBody>
+      </p:sp>
+      <p:sp>
+        <p:nvSpPr>
+          <p:cNvPr id="87" name="TextBox 87"/>
+          <p:cNvSpPr txBox="1"/>
+          <p:nvPr/>
+        </p:nvSpPr>
+        <p:spPr>
+          <a:xfrm>
+            <a:off x="6978225" y="3323768"/>
+            <a:ext cx="94669" cy="192360"/>
+          </a:xfrm>
+          <a:prstGeom prst="rect">
+            <a:avLst/>
+          </a:prstGeom>
+        </p:spPr>
+        <p:txBody>
+          <a:bodyPr lIns="0" tIns="0" rIns="0" bIns="0" rtlCol="0" anchor="t">
+            <a:spAutoFit/>
+          </a:bodyPr>
+          <a:lstStyle/>
+          <a:p>
+            <a:pPr>
+              <a:lnSpc>
+                <a:spcPts val="1470"/>
+              </a:lnSpc>
+            </a:pPr>
+            <a:r>
+              <a:rPr lang="en-US" sz="1600" b="1">
+                <a:solidFill>
+                  <a:srgbClr val="FFFFFF"/>
+                </a:solidFill>
+                <a:latin typeface="Times New Roman" panose="02020603050405020304" pitchFamily="18" charset="0"/>
+                <a:ea typeface="DejaVu Sans Bold"/>
+                <a:cs typeface="Times New Roman" panose="02020603050405020304" pitchFamily="18" charset="0"/>
+                <a:sym typeface="DejaVu Sans Bold"/>
+              </a:rPr>
+              <a:t>3</a:t>
+            </a:r>
+          </a:p>
+        </p:txBody>
+      </p:sp>
+      <p:sp>
+        <p:nvSpPr>
+          <p:cNvPr id="88" name="TextBox 88"/>
+          <p:cNvSpPr txBox="1"/>
+          <p:nvPr/>
+        </p:nvSpPr>
+        <p:spPr>
+          <a:xfrm>
+            <a:off x="6978225" y="3916118"/>
+            <a:ext cx="94669" cy="192360"/>
+          </a:xfrm>
+          <a:prstGeom prst="rect">
+            <a:avLst/>
+          </a:prstGeom>
+        </p:spPr>
+        <p:txBody>
+          <a:bodyPr lIns="0" tIns="0" rIns="0" bIns="0" rtlCol="0" anchor="t">
+            <a:spAutoFit/>
+          </a:bodyPr>
+          <a:lstStyle/>
+          <a:p>
+            <a:pPr>
+              <a:lnSpc>
+                <a:spcPts val="1470"/>
+              </a:lnSpc>
+            </a:pPr>
+            <a:r>
+              <a:rPr lang="en-US" sz="1600" b="1">
+                <a:solidFill>
+                  <a:srgbClr val="FFFFFF"/>
+                </a:solidFill>
+                <a:latin typeface="Times New Roman" panose="02020603050405020304" pitchFamily="18" charset="0"/>
+                <a:ea typeface="DejaVu Sans Bold"/>
+                <a:cs typeface="Times New Roman" panose="02020603050405020304" pitchFamily="18" charset="0"/>
+                <a:sym typeface="DejaVu Sans Bold"/>
+              </a:rPr>
+              <a:t>3</a:t>
+            </a:r>
+          </a:p>
+        </p:txBody>
+      </p:sp>
+      <p:sp>
+        <p:nvSpPr>
+          <p:cNvPr id="89" name="TextBox 89"/>
+          <p:cNvSpPr txBox="1"/>
+          <p:nvPr/>
+        </p:nvSpPr>
+        <p:spPr>
+          <a:xfrm>
+            <a:off x="6978225" y="4508468"/>
+            <a:ext cx="94669" cy="192360"/>
+          </a:xfrm>
+          <a:prstGeom prst="rect">
+            <a:avLst/>
+          </a:prstGeom>
+        </p:spPr>
+        <p:txBody>
+          <a:bodyPr lIns="0" tIns="0" rIns="0" bIns="0" rtlCol="0" anchor="t">
+            <a:spAutoFit/>
+          </a:bodyPr>
+          <a:lstStyle/>
+          <a:p>
+            <a:pPr>
+              <a:lnSpc>
+                <a:spcPts val="1470"/>
+              </a:lnSpc>
+            </a:pPr>
+            <a:r>
+              <a:rPr lang="en-US" sz="1600" b="1">
+                <a:solidFill>
+                  <a:srgbClr val="20242A"/>
+                </a:solidFill>
+                <a:latin typeface="Times New Roman" panose="02020603050405020304" pitchFamily="18" charset="0"/>
+                <a:ea typeface="DejaVu Sans Bold"/>
+                <a:cs typeface="Times New Roman" panose="02020603050405020304" pitchFamily="18" charset="0"/>
+                <a:sym typeface="DejaVu Sans Bold"/>
+              </a:rPr>
+              <a:t>2</a:t>
+            </a:r>
+          </a:p>
+        </p:txBody>
+      </p:sp>
+      <p:sp>
+        <p:nvSpPr>
+          <p:cNvPr id="90" name="TextBox 90"/>
+          <p:cNvSpPr txBox="1"/>
+          <p:nvPr/>
+        </p:nvSpPr>
+        <p:spPr>
+          <a:xfrm>
+            <a:off x="6978225" y="5100810"/>
+            <a:ext cx="94669" cy="192360"/>
+          </a:xfrm>
+          <a:prstGeom prst="rect">
+            <a:avLst/>
+          </a:prstGeom>
+        </p:spPr>
+        <p:txBody>
+          <a:bodyPr lIns="0" tIns="0" rIns="0" bIns="0" rtlCol="0" anchor="t">
+            <a:spAutoFit/>
+          </a:bodyPr>
+          <a:lstStyle/>
+          <a:p>
+            <a:pPr>
+              <a:lnSpc>
+                <a:spcPts val="1470"/>
+              </a:lnSpc>
+            </a:pPr>
+            <a:r>
+              <a:rPr lang="en-US" sz="1600" b="1">
+                <a:solidFill>
+                  <a:srgbClr val="20242A"/>
+                </a:solidFill>
+                <a:latin typeface="Times New Roman" panose="02020603050405020304" pitchFamily="18" charset="0"/>
+                <a:ea typeface="DejaVu Sans Bold"/>
+                <a:cs typeface="Times New Roman" panose="02020603050405020304" pitchFamily="18" charset="0"/>
+                <a:sym typeface="DejaVu Sans Bold"/>
+              </a:rPr>
+              <a:t>2</a:t>
+            </a:r>
+          </a:p>
+        </p:txBody>
+      </p:sp>
+      <p:sp>
+        <p:nvSpPr>
+          <p:cNvPr id="91" name="TextBox 91"/>
+          <p:cNvSpPr txBox="1"/>
+          <p:nvPr/>
+        </p:nvSpPr>
+        <p:spPr>
+          <a:xfrm>
+            <a:off x="6978225" y="5693159"/>
+            <a:ext cx="94669" cy="192360"/>
+          </a:xfrm>
+          <a:prstGeom prst="rect">
+            <a:avLst/>
+          </a:prstGeom>
+        </p:spPr>
+        <p:txBody>
+          <a:bodyPr lIns="0" tIns="0" rIns="0" bIns="0" rtlCol="0" anchor="t">
+            <a:spAutoFit/>
+          </a:bodyPr>
+          <a:lstStyle/>
+          <a:p>
+            <a:pPr>
+              <a:lnSpc>
+                <a:spcPts val="1470"/>
+              </a:lnSpc>
+            </a:pPr>
+            <a:r>
+              <a:rPr lang="en-US" sz="1600" b="1">
+                <a:solidFill>
+                  <a:srgbClr val="FFFFFF"/>
+                </a:solidFill>
+                <a:latin typeface="Times New Roman" panose="02020603050405020304" pitchFamily="18" charset="0"/>
+                <a:ea typeface="DejaVu Sans Bold"/>
+                <a:cs typeface="Times New Roman" panose="02020603050405020304" pitchFamily="18" charset="0"/>
+                <a:sym typeface="DejaVu Sans Bold"/>
+              </a:rPr>
+              <a:t>4</a:t>
+            </a:r>
+          </a:p>
+        </p:txBody>
+      </p:sp>
+      <p:sp>
+        <p:nvSpPr>
+          <p:cNvPr id="92" name="TextBox 92"/>
+          <p:cNvSpPr txBox="1"/>
+          <p:nvPr/>
+        </p:nvSpPr>
+        <p:spPr>
+          <a:xfrm>
+            <a:off x="6978225" y="6285509"/>
+            <a:ext cx="94669" cy="192360"/>
+          </a:xfrm>
+          <a:prstGeom prst="rect">
+            <a:avLst/>
+          </a:prstGeom>
+        </p:spPr>
+        <p:txBody>
+          <a:bodyPr lIns="0" tIns="0" rIns="0" bIns="0" rtlCol="0" anchor="t">
+            <a:spAutoFit/>
+          </a:bodyPr>
+          <a:lstStyle/>
+          <a:p>
+            <a:pPr>
+              <a:lnSpc>
+                <a:spcPts val="1470"/>
+              </a:lnSpc>
+            </a:pPr>
+            <a:r>
+              <a:rPr lang="en-US" sz="1600" b="1">
+                <a:solidFill>
+                  <a:srgbClr val="FFFFFF"/>
+                </a:solidFill>
+                <a:latin typeface="Times New Roman" panose="02020603050405020304" pitchFamily="18" charset="0"/>
+                <a:ea typeface="DejaVu Sans Bold"/>
+                <a:cs typeface="Times New Roman" panose="02020603050405020304" pitchFamily="18" charset="0"/>
+                <a:sym typeface="DejaVu Sans Bold"/>
+              </a:rPr>
+              <a:t>3</a:t>
+            </a:r>
+          </a:p>
+        </p:txBody>
+      </p:sp>
+      <p:sp>
+        <p:nvSpPr>
+          <p:cNvPr id="93" name="TextBox 93"/>
+          <p:cNvSpPr txBox="1"/>
+          <p:nvPr/>
+        </p:nvSpPr>
+        <p:spPr>
+          <a:xfrm>
+            <a:off x="8076971" y="431884"/>
+            <a:ext cx="700489" cy="298159"/>
+          </a:xfrm>
+          <a:prstGeom prst="rect">
+            <a:avLst/>
+          </a:prstGeom>
+        </p:spPr>
+        <p:txBody>
+          <a:bodyPr wrap="square" lIns="0" tIns="0" rIns="0" bIns="0" rtlCol="0" anchor="t">
+            <a:spAutoFit/>
+          </a:bodyPr>
+          <a:lstStyle/>
+          <a:p>
+            <a:pPr algn="ctr">
+              <a:lnSpc>
+                <a:spcPts val="2626"/>
+              </a:lnSpc>
+            </a:pPr>
+            <a:r>
+              <a:rPr lang="en-US" sz="1600" b="1" dirty="0">
+                <a:latin typeface="Times New Roman" panose="02020603050405020304" pitchFamily="18" charset="0"/>
+                <a:ea typeface="DejaVu Sans Bold"/>
+                <a:cs typeface="Times New Roman" panose="02020603050405020304" pitchFamily="18" charset="0"/>
+                <a:sym typeface="DejaVu Sans Bold"/>
+              </a:rPr>
+              <a:t>Worst </a:t>
+            </a:r>
+          </a:p>
+        </p:txBody>
+      </p:sp>
+      <p:sp>
+        <p:nvSpPr>
+          <p:cNvPr id="94" name="TextBox 94"/>
+          <p:cNvSpPr txBox="1"/>
+          <p:nvPr/>
+        </p:nvSpPr>
+        <p:spPr>
+          <a:xfrm>
+            <a:off x="8251888" y="1546727"/>
+            <a:ext cx="94669" cy="192360"/>
+          </a:xfrm>
+          <a:prstGeom prst="rect">
+            <a:avLst/>
+          </a:prstGeom>
+        </p:spPr>
+        <p:txBody>
+          <a:bodyPr lIns="0" tIns="0" rIns="0" bIns="0" rtlCol="0" anchor="t">
+            <a:spAutoFit/>
+          </a:bodyPr>
+          <a:lstStyle/>
+          <a:p>
+            <a:pPr>
+              <a:lnSpc>
+                <a:spcPts val="1470"/>
+              </a:lnSpc>
+            </a:pPr>
+            <a:r>
+              <a:rPr lang="en-US" sz="1600" b="1">
+                <a:solidFill>
+                  <a:srgbClr val="FFFFFF"/>
+                </a:solidFill>
+                <a:latin typeface="Times New Roman" panose="02020603050405020304" pitchFamily="18" charset="0"/>
+                <a:ea typeface="DejaVu Sans Bold"/>
+                <a:cs typeface="Times New Roman" panose="02020603050405020304" pitchFamily="18" charset="0"/>
+                <a:sym typeface="DejaVu Sans Bold"/>
+              </a:rPr>
+              <a:t>3</a:t>
+            </a:r>
+          </a:p>
+        </p:txBody>
+      </p:sp>
+      <p:sp>
+        <p:nvSpPr>
+          <p:cNvPr id="95" name="TextBox 95"/>
+          <p:cNvSpPr txBox="1"/>
+          <p:nvPr/>
+        </p:nvSpPr>
+        <p:spPr>
+          <a:xfrm>
+            <a:off x="8251888" y="2139068"/>
+            <a:ext cx="94669" cy="192360"/>
+          </a:xfrm>
+          <a:prstGeom prst="rect">
+            <a:avLst/>
+          </a:prstGeom>
+        </p:spPr>
+        <p:txBody>
+          <a:bodyPr lIns="0" tIns="0" rIns="0" bIns="0" rtlCol="0" anchor="t">
+            <a:spAutoFit/>
+          </a:bodyPr>
+          <a:lstStyle/>
+          <a:p>
+            <a:pPr>
+              <a:lnSpc>
+                <a:spcPts val="1470"/>
+              </a:lnSpc>
+            </a:pPr>
+            <a:r>
+              <a:rPr lang="en-US" sz="1600" b="1">
+                <a:solidFill>
+                  <a:srgbClr val="FFFFFF"/>
+                </a:solidFill>
+                <a:latin typeface="Times New Roman" panose="02020603050405020304" pitchFamily="18" charset="0"/>
+                <a:ea typeface="DejaVu Sans Bold"/>
+                <a:cs typeface="Times New Roman" panose="02020603050405020304" pitchFamily="18" charset="0"/>
+                <a:sym typeface="DejaVu Sans Bold"/>
+              </a:rPr>
+              <a:t>4</a:t>
+            </a:r>
+          </a:p>
+        </p:txBody>
+      </p:sp>
+      <p:sp>
+        <p:nvSpPr>
+          <p:cNvPr id="96" name="TextBox 96"/>
+          <p:cNvSpPr txBox="1"/>
+          <p:nvPr/>
+        </p:nvSpPr>
+        <p:spPr>
+          <a:xfrm>
+            <a:off x="8251888" y="2731419"/>
+            <a:ext cx="94669" cy="192360"/>
+          </a:xfrm>
+          <a:prstGeom prst="rect">
+            <a:avLst/>
+          </a:prstGeom>
+        </p:spPr>
+        <p:txBody>
+          <a:bodyPr lIns="0" tIns="0" rIns="0" bIns="0" rtlCol="0" anchor="t">
+            <a:spAutoFit/>
+          </a:bodyPr>
+          <a:lstStyle/>
+          <a:p>
+            <a:pPr>
+              <a:lnSpc>
+                <a:spcPts val="1470"/>
+              </a:lnSpc>
+            </a:pPr>
+            <a:r>
+              <a:rPr lang="en-US" sz="1600" b="1">
+                <a:solidFill>
+                  <a:srgbClr val="20242A"/>
+                </a:solidFill>
+                <a:latin typeface="Times New Roman" panose="02020603050405020304" pitchFamily="18" charset="0"/>
+                <a:ea typeface="DejaVu Sans Bold"/>
+                <a:cs typeface="Times New Roman" panose="02020603050405020304" pitchFamily="18" charset="0"/>
+                <a:sym typeface="DejaVu Sans Bold"/>
+              </a:rPr>
+              <a:t>2</a:t>
+            </a:r>
+          </a:p>
+        </p:txBody>
+      </p:sp>
+      <p:sp>
+        <p:nvSpPr>
+          <p:cNvPr id="97" name="TextBox 97"/>
+          <p:cNvSpPr txBox="1"/>
+          <p:nvPr/>
+        </p:nvSpPr>
+        <p:spPr>
+          <a:xfrm>
+            <a:off x="8251888" y="3323768"/>
+            <a:ext cx="94669" cy="192360"/>
+          </a:xfrm>
+          <a:prstGeom prst="rect">
+            <a:avLst/>
+          </a:prstGeom>
+        </p:spPr>
+        <p:txBody>
+          <a:bodyPr lIns="0" tIns="0" rIns="0" bIns="0" rtlCol="0" anchor="t">
+            <a:spAutoFit/>
+          </a:bodyPr>
+          <a:lstStyle/>
+          <a:p>
+            <a:pPr>
+              <a:lnSpc>
+                <a:spcPts val="1470"/>
+              </a:lnSpc>
+            </a:pPr>
+            <a:r>
+              <a:rPr lang="en-US" sz="1600" b="1">
+                <a:solidFill>
+                  <a:srgbClr val="FFFFFF"/>
+                </a:solidFill>
+                <a:latin typeface="Times New Roman" panose="02020603050405020304" pitchFamily="18" charset="0"/>
+                <a:ea typeface="DejaVu Sans Bold"/>
+                <a:cs typeface="Times New Roman" panose="02020603050405020304" pitchFamily="18" charset="0"/>
+                <a:sym typeface="DejaVu Sans Bold"/>
+              </a:rPr>
+              <a:t>3</a:t>
+            </a:r>
+          </a:p>
+        </p:txBody>
+      </p:sp>
+      <p:sp>
+        <p:nvSpPr>
+          <p:cNvPr id="98" name="TextBox 98"/>
+          <p:cNvSpPr txBox="1"/>
+          <p:nvPr/>
+        </p:nvSpPr>
+        <p:spPr>
+          <a:xfrm>
+            <a:off x="8251888" y="3916118"/>
+            <a:ext cx="94669" cy="192360"/>
+          </a:xfrm>
+          <a:prstGeom prst="rect">
+            <a:avLst/>
+          </a:prstGeom>
+        </p:spPr>
+        <p:txBody>
+          <a:bodyPr lIns="0" tIns="0" rIns="0" bIns="0" rtlCol="0" anchor="t">
+            <a:spAutoFit/>
+          </a:bodyPr>
+          <a:lstStyle/>
+          <a:p>
+            <a:pPr>
+              <a:lnSpc>
+                <a:spcPts val="1470"/>
+              </a:lnSpc>
+            </a:pPr>
+            <a:r>
+              <a:rPr lang="en-US" sz="1600" b="1">
+                <a:solidFill>
+                  <a:srgbClr val="FFFFFF"/>
+                </a:solidFill>
+                <a:latin typeface="Times New Roman" panose="02020603050405020304" pitchFamily="18" charset="0"/>
+                <a:ea typeface="DejaVu Sans Bold"/>
+                <a:cs typeface="Times New Roman" panose="02020603050405020304" pitchFamily="18" charset="0"/>
+                <a:sym typeface="DejaVu Sans Bold"/>
+              </a:rPr>
+              <a:t>3</a:t>
+            </a:r>
+          </a:p>
+        </p:txBody>
+      </p:sp>
+      <p:sp>
+        <p:nvSpPr>
+          <p:cNvPr id="99" name="TextBox 99"/>
+          <p:cNvSpPr txBox="1"/>
+          <p:nvPr/>
+        </p:nvSpPr>
+        <p:spPr>
+          <a:xfrm>
+            <a:off x="8251888" y="4508468"/>
+            <a:ext cx="94669" cy="192360"/>
+          </a:xfrm>
+          <a:prstGeom prst="rect">
+            <a:avLst/>
+          </a:prstGeom>
+        </p:spPr>
+        <p:txBody>
+          <a:bodyPr lIns="0" tIns="0" rIns="0" bIns="0" rtlCol="0" anchor="t">
+            <a:spAutoFit/>
+          </a:bodyPr>
+          <a:lstStyle/>
+          <a:p>
+            <a:pPr>
+              <a:lnSpc>
+                <a:spcPts val="1470"/>
+              </a:lnSpc>
+            </a:pPr>
+            <a:r>
+              <a:rPr lang="en-US" sz="1600" b="1">
+                <a:solidFill>
+                  <a:srgbClr val="20242A"/>
+                </a:solidFill>
+                <a:latin typeface="Times New Roman" panose="02020603050405020304" pitchFamily="18" charset="0"/>
+                <a:ea typeface="DejaVu Sans Bold"/>
+                <a:cs typeface="Times New Roman" panose="02020603050405020304" pitchFamily="18" charset="0"/>
+                <a:sym typeface="DejaVu Sans Bold"/>
+              </a:rPr>
+              <a:t>2</a:t>
+            </a:r>
+          </a:p>
+        </p:txBody>
+      </p:sp>
+      <p:sp>
+        <p:nvSpPr>
+          <p:cNvPr id="100" name="TextBox 100"/>
+          <p:cNvSpPr txBox="1"/>
+          <p:nvPr/>
+        </p:nvSpPr>
+        <p:spPr>
+          <a:xfrm>
+            <a:off x="8251888" y="5100810"/>
+            <a:ext cx="94669" cy="192360"/>
+          </a:xfrm>
+          <a:prstGeom prst="rect">
+            <a:avLst/>
+          </a:prstGeom>
+        </p:spPr>
+        <p:txBody>
+          <a:bodyPr lIns="0" tIns="0" rIns="0" bIns="0" rtlCol="0" anchor="t">
+            <a:spAutoFit/>
+          </a:bodyPr>
+          <a:lstStyle/>
+          <a:p>
+            <a:pPr>
+              <a:lnSpc>
+                <a:spcPts val="1470"/>
+              </a:lnSpc>
+            </a:pPr>
+            <a:r>
+              <a:rPr lang="en-US" sz="1600" b="1">
+                <a:solidFill>
+                  <a:srgbClr val="20242A"/>
+                </a:solidFill>
+                <a:latin typeface="Times New Roman" panose="02020603050405020304" pitchFamily="18" charset="0"/>
+                <a:ea typeface="DejaVu Sans Bold"/>
+                <a:cs typeface="Times New Roman" panose="02020603050405020304" pitchFamily="18" charset="0"/>
+                <a:sym typeface="DejaVu Sans Bold"/>
+              </a:rPr>
+              <a:t>2</a:t>
+            </a:r>
+          </a:p>
+        </p:txBody>
+      </p:sp>
+      <p:sp>
+        <p:nvSpPr>
+          <p:cNvPr id="101" name="TextBox 101"/>
+          <p:cNvSpPr txBox="1"/>
+          <p:nvPr/>
+        </p:nvSpPr>
+        <p:spPr>
+          <a:xfrm>
+            <a:off x="8251888" y="5693159"/>
+            <a:ext cx="94669" cy="192360"/>
+          </a:xfrm>
+          <a:prstGeom prst="rect">
+            <a:avLst/>
+          </a:prstGeom>
+        </p:spPr>
+        <p:txBody>
+          <a:bodyPr lIns="0" tIns="0" rIns="0" bIns="0" rtlCol="0" anchor="t">
+            <a:spAutoFit/>
+          </a:bodyPr>
+          <a:lstStyle/>
+          <a:p>
+            <a:pPr>
+              <a:lnSpc>
+                <a:spcPts val="1470"/>
+              </a:lnSpc>
+            </a:pPr>
+            <a:r>
+              <a:rPr lang="en-US" sz="1600" b="1">
+                <a:solidFill>
+                  <a:srgbClr val="FFFFFF"/>
+                </a:solidFill>
+                <a:latin typeface="Times New Roman" panose="02020603050405020304" pitchFamily="18" charset="0"/>
+                <a:ea typeface="DejaVu Sans Bold"/>
+                <a:cs typeface="Times New Roman" panose="02020603050405020304" pitchFamily="18" charset="0"/>
+                <a:sym typeface="DejaVu Sans Bold"/>
+              </a:rPr>
+              <a:t>4</a:t>
+            </a:r>
+          </a:p>
+        </p:txBody>
+      </p:sp>
+      <p:sp>
+        <p:nvSpPr>
+          <p:cNvPr id="102" name="TextBox 102"/>
+          <p:cNvSpPr txBox="1"/>
+          <p:nvPr/>
+        </p:nvSpPr>
+        <p:spPr>
+          <a:xfrm>
+            <a:off x="8251888" y="6285509"/>
+            <a:ext cx="94669" cy="192360"/>
+          </a:xfrm>
+          <a:prstGeom prst="rect">
+            <a:avLst/>
+          </a:prstGeom>
+        </p:spPr>
+        <p:txBody>
+          <a:bodyPr lIns="0" tIns="0" rIns="0" bIns="0" rtlCol="0" anchor="t">
+            <a:spAutoFit/>
+          </a:bodyPr>
+          <a:lstStyle/>
+          <a:p>
+            <a:pPr>
+              <a:lnSpc>
+                <a:spcPts val="1470"/>
+              </a:lnSpc>
+            </a:pPr>
+            <a:r>
+              <a:rPr lang="en-US" sz="1600" b="1">
+                <a:solidFill>
+                  <a:srgbClr val="FFFFFF"/>
+                </a:solidFill>
+                <a:latin typeface="Times New Roman" panose="02020603050405020304" pitchFamily="18" charset="0"/>
+                <a:ea typeface="DejaVu Sans Bold"/>
+                <a:cs typeface="Times New Roman" panose="02020603050405020304" pitchFamily="18" charset="0"/>
+                <a:sym typeface="DejaVu Sans Bold"/>
+              </a:rPr>
+              <a:t>3</a:t>
+            </a:r>
+          </a:p>
+        </p:txBody>
+      </p:sp>
+      <p:sp>
+        <p:nvSpPr>
+          <p:cNvPr id="103" name="TextBox 103"/>
+          <p:cNvSpPr txBox="1"/>
+          <p:nvPr/>
+        </p:nvSpPr>
+        <p:spPr>
+          <a:xfrm>
+            <a:off x="1600201" y="978438"/>
+            <a:ext cx="2239072" cy="167162"/>
+          </a:xfrm>
+          <a:prstGeom prst="rect">
+            <a:avLst/>
+          </a:prstGeom>
+        </p:spPr>
+        <p:txBody>
+          <a:bodyPr wrap="square" lIns="0" tIns="0" rIns="0" bIns="0" rtlCol="0" anchor="t">
+            <a:spAutoFit/>
+          </a:bodyPr>
+          <a:lstStyle/>
+          <a:p>
+            <a:pPr>
+              <a:lnSpc>
+                <a:spcPts val="1344"/>
+              </a:lnSpc>
+            </a:pPr>
+            <a:r>
+              <a:rPr lang="en-US" sz="1401" dirty="0">
+                <a:solidFill>
+                  <a:srgbClr val="000000"/>
+                </a:solidFill>
+                <a:latin typeface="Times New Roman" panose="02020603050405020304" pitchFamily="18" charset="0"/>
+                <a:ea typeface="DejaVu Sans Light"/>
+                <a:cs typeface="Times New Roman" panose="02020603050405020304" pitchFamily="18" charset="0"/>
+                <a:sym typeface="DejaVu Sans Light"/>
+              </a:rPr>
+              <a:t>H1 · Visibility of system status</a:t>
+            </a:r>
+          </a:p>
+        </p:txBody>
+      </p:sp>
+      <p:sp>
+        <p:nvSpPr>
+          <p:cNvPr id="104" name="TextBox 104"/>
+          <p:cNvSpPr txBox="1"/>
+          <p:nvPr/>
+        </p:nvSpPr>
+        <p:spPr>
+          <a:xfrm>
+            <a:off x="1600201" y="1570787"/>
+            <a:ext cx="2239072" cy="333874"/>
+          </a:xfrm>
+          <a:prstGeom prst="rect">
+            <a:avLst/>
+          </a:prstGeom>
+        </p:spPr>
+        <p:txBody>
+          <a:bodyPr wrap="square" lIns="0" tIns="0" rIns="0" bIns="0" rtlCol="0" anchor="t">
+            <a:spAutoFit/>
+          </a:bodyPr>
+          <a:lstStyle/>
+          <a:p>
+            <a:pPr>
+              <a:lnSpc>
+                <a:spcPts val="1344"/>
+              </a:lnSpc>
+            </a:pPr>
+            <a:r>
+              <a:rPr lang="en-US" sz="1401" dirty="0">
+                <a:solidFill>
+                  <a:srgbClr val="000000"/>
+                </a:solidFill>
+                <a:latin typeface="Times New Roman" panose="02020603050405020304" pitchFamily="18" charset="0"/>
+                <a:ea typeface="DejaVu Sans Light"/>
+                <a:cs typeface="Times New Roman" panose="02020603050405020304" pitchFamily="18" charset="0"/>
+                <a:sym typeface="DejaVu Sans Light"/>
+              </a:rPr>
+              <a:t>H2 · Match between system and real world</a:t>
+            </a:r>
+          </a:p>
+        </p:txBody>
+      </p:sp>
+      <p:sp>
+        <p:nvSpPr>
+          <p:cNvPr id="105" name="TextBox 105"/>
+          <p:cNvSpPr txBox="1"/>
+          <p:nvPr/>
+        </p:nvSpPr>
+        <p:spPr>
+          <a:xfrm>
+            <a:off x="1600201" y="2168861"/>
+            <a:ext cx="2239072" cy="167162"/>
+          </a:xfrm>
+          <a:prstGeom prst="rect">
+            <a:avLst/>
+          </a:prstGeom>
+        </p:spPr>
+        <p:txBody>
+          <a:bodyPr wrap="square" lIns="0" tIns="0" rIns="0" bIns="0" rtlCol="0" anchor="t">
+            <a:spAutoFit/>
+          </a:bodyPr>
+          <a:lstStyle/>
+          <a:p>
+            <a:pPr>
+              <a:lnSpc>
+                <a:spcPts val="1344"/>
+              </a:lnSpc>
+            </a:pPr>
+            <a:r>
+              <a:rPr lang="en-US" sz="1401" b="1" dirty="0">
+                <a:solidFill>
+                  <a:srgbClr val="B0202A"/>
+                </a:solidFill>
+                <a:latin typeface="Times New Roman" panose="02020603050405020304" pitchFamily="18" charset="0"/>
+                <a:ea typeface="DejaVu Sans Bold"/>
+                <a:cs typeface="Times New Roman" panose="02020603050405020304" pitchFamily="18" charset="0"/>
+                <a:sym typeface="DejaVu Sans Bold"/>
+              </a:rPr>
+              <a:t>H3 · User control &amp; freedom</a:t>
+            </a:r>
+          </a:p>
+        </p:txBody>
+      </p:sp>
+      <p:sp>
+        <p:nvSpPr>
+          <p:cNvPr id="106" name="TextBox 106"/>
+          <p:cNvSpPr txBox="1"/>
+          <p:nvPr/>
+        </p:nvSpPr>
+        <p:spPr>
+          <a:xfrm>
+            <a:off x="1600201" y="2755487"/>
+            <a:ext cx="2239072" cy="333874"/>
+          </a:xfrm>
+          <a:prstGeom prst="rect">
+            <a:avLst/>
+          </a:prstGeom>
+        </p:spPr>
+        <p:txBody>
+          <a:bodyPr wrap="square" lIns="0" tIns="0" rIns="0" bIns="0" rtlCol="0" anchor="t">
+            <a:spAutoFit/>
+          </a:bodyPr>
+          <a:lstStyle/>
+          <a:p>
+            <a:pPr>
+              <a:lnSpc>
+                <a:spcPts val="1344"/>
+              </a:lnSpc>
+            </a:pPr>
+            <a:r>
+              <a:rPr lang="en-US" sz="1401" dirty="0">
+                <a:solidFill>
+                  <a:srgbClr val="000000"/>
+                </a:solidFill>
+                <a:latin typeface="Times New Roman" panose="02020603050405020304" pitchFamily="18" charset="0"/>
+                <a:ea typeface="DejaVu Sans Light"/>
+                <a:cs typeface="Times New Roman" panose="02020603050405020304" pitchFamily="18" charset="0"/>
+                <a:sym typeface="DejaVu Sans Light"/>
+              </a:rPr>
+              <a:t>H4 · Consistency and   standards</a:t>
+            </a:r>
+          </a:p>
+        </p:txBody>
+      </p:sp>
+      <p:sp>
+        <p:nvSpPr>
+          <p:cNvPr id="107" name="TextBox 107"/>
+          <p:cNvSpPr txBox="1"/>
+          <p:nvPr/>
+        </p:nvSpPr>
+        <p:spPr>
+          <a:xfrm>
+            <a:off x="1600201" y="3347379"/>
+            <a:ext cx="2239072" cy="167162"/>
+          </a:xfrm>
+          <a:prstGeom prst="rect">
+            <a:avLst/>
+          </a:prstGeom>
+        </p:spPr>
+        <p:txBody>
+          <a:bodyPr wrap="square" lIns="0" tIns="0" rIns="0" bIns="0" rtlCol="0" anchor="t">
+            <a:spAutoFit/>
+          </a:bodyPr>
+          <a:lstStyle/>
+          <a:p>
+            <a:pPr>
+              <a:lnSpc>
+                <a:spcPts val="1344"/>
+              </a:lnSpc>
+            </a:pPr>
+            <a:r>
+              <a:rPr lang="en-US" sz="1401" dirty="0">
+                <a:solidFill>
+                  <a:srgbClr val="000000"/>
+                </a:solidFill>
+                <a:latin typeface="Times New Roman" panose="02020603050405020304" pitchFamily="18" charset="0"/>
+                <a:ea typeface="DejaVu Sans Light"/>
+                <a:cs typeface="Times New Roman" panose="02020603050405020304" pitchFamily="18" charset="0"/>
+                <a:sym typeface="DejaVu Sans Light"/>
+              </a:rPr>
+              <a:t>H5 · Error prevention</a:t>
+            </a:r>
+          </a:p>
+        </p:txBody>
+      </p:sp>
+      <p:sp>
+        <p:nvSpPr>
+          <p:cNvPr id="108" name="TextBox 108"/>
+          <p:cNvSpPr txBox="1"/>
+          <p:nvPr/>
+        </p:nvSpPr>
+        <p:spPr>
+          <a:xfrm>
+            <a:off x="1600201" y="3934444"/>
+            <a:ext cx="2120369" cy="167162"/>
+          </a:xfrm>
+          <a:prstGeom prst="rect">
+            <a:avLst/>
+          </a:prstGeom>
+        </p:spPr>
+        <p:txBody>
+          <a:bodyPr wrap="square" lIns="0" tIns="0" rIns="0" bIns="0" rtlCol="0" anchor="t">
+            <a:spAutoFit/>
+          </a:bodyPr>
+          <a:lstStyle/>
+          <a:p>
+            <a:pPr>
+              <a:lnSpc>
+                <a:spcPts val="1344"/>
+              </a:lnSpc>
+            </a:pPr>
+            <a:r>
+              <a:rPr lang="en-US" sz="1401" dirty="0">
+                <a:solidFill>
+                  <a:srgbClr val="000000"/>
+                </a:solidFill>
+                <a:latin typeface="Times New Roman" panose="02020603050405020304" pitchFamily="18" charset="0"/>
+                <a:ea typeface="DejaVu Sans Light"/>
+                <a:cs typeface="Times New Roman" panose="02020603050405020304" pitchFamily="18" charset="0"/>
+                <a:sym typeface="DejaVu Sans Light"/>
+              </a:rPr>
+              <a:t>H6 · Recognition over Recall</a:t>
+            </a:r>
+          </a:p>
+        </p:txBody>
+      </p:sp>
+      <p:sp>
+        <p:nvSpPr>
+          <p:cNvPr id="109" name="TextBox 109"/>
+          <p:cNvSpPr txBox="1"/>
+          <p:nvPr/>
+        </p:nvSpPr>
+        <p:spPr>
+          <a:xfrm>
+            <a:off x="1600201" y="4532528"/>
+            <a:ext cx="2239072" cy="333874"/>
+          </a:xfrm>
+          <a:prstGeom prst="rect">
+            <a:avLst/>
+          </a:prstGeom>
+        </p:spPr>
+        <p:txBody>
+          <a:bodyPr wrap="square" lIns="0" tIns="0" rIns="0" bIns="0" rtlCol="0" anchor="t">
+            <a:spAutoFit/>
+          </a:bodyPr>
+          <a:lstStyle/>
+          <a:p>
+            <a:pPr>
+              <a:lnSpc>
+                <a:spcPts val="1344"/>
+              </a:lnSpc>
+            </a:pPr>
+            <a:r>
+              <a:rPr lang="en-US" sz="1401" dirty="0">
+                <a:solidFill>
+                  <a:srgbClr val="000000"/>
+                </a:solidFill>
+                <a:latin typeface="Times New Roman" panose="02020603050405020304" pitchFamily="18" charset="0"/>
+                <a:ea typeface="DejaVu Sans Light"/>
+                <a:cs typeface="Times New Roman" panose="02020603050405020304" pitchFamily="18" charset="0"/>
+                <a:sym typeface="DejaVu Sans Light"/>
+              </a:rPr>
+              <a:t>H7 · Flexibility and efficiency of use</a:t>
+            </a:r>
+          </a:p>
+        </p:txBody>
+      </p:sp>
+      <p:sp>
+        <p:nvSpPr>
+          <p:cNvPr id="110" name="TextBox 110"/>
+          <p:cNvSpPr txBox="1"/>
+          <p:nvPr/>
+        </p:nvSpPr>
+        <p:spPr>
+          <a:xfrm>
+            <a:off x="1600201" y="5126456"/>
+            <a:ext cx="2308707" cy="333874"/>
+          </a:xfrm>
+          <a:prstGeom prst="rect">
+            <a:avLst/>
+          </a:prstGeom>
+        </p:spPr>
+        <p:txBody>
+          <a:bodyPr wrap="square" lIns="0" tIns="0" rIns="0" bIns="0" rtlCol="0" anchor="t">
+            <a:spAutoFit/>
+          </a:bodyPr>
+          <a:lstStyle/>
+          <a:p>
+            <a:pPr>
+              <a:lnSpc>
+                <a:spcPts val="1344"/>
+              </a:lnSpc>
+            </a:pPr>
+            <a:r>
+              <a:rPr lang="en-US" sz="1401" dirty="0">
+                <a:solidFill>
+                  <a:srgbClr val="000000"/>
+                </a:solidFill>
+                <a:latin typeface="Times New Roman" panose="02020603050405020304" pitchFamily="18" charset="0"/>
+                <a:ea typeface="DejaVu Sans Light"/>
+                <a:cs typeface="Times New Roman" panose="02020603050405020304" pitchFamily="18" charset="0"/>
+                <a:sym typeface="DejaVu Sans Light"/>
+              </a:rPr>
+              <a:t>H8 · Aesthetic and minimalist design</a:t>
+            </a:r>
+          </a:p>
+        </p:txBody>
+      </p:sp>
+      <p:sp>
+        <p:nvSpPr>
+          <p:cNvPr id="111" name="TextBox 111"/>
+          <p:cNvSpPr txBox="1"/>
+          <p:nvPr/>
+        </p:nvSpPr>
+        <p:spPr>
+          <a:xfrm>
+            <a:off x="1600201" y="5693160"/>
+            <a:ext cx="2239072" cy="167162"/>
+          </a:xfrm>
+          <a:prstGeom prst="rect">
+            <a:avLst/>
+          </a:prstGeom>
+        </p:spPr>
+        <p:txBody>
+          <a:bodyPr wrap="square" lIns="0" tIns="0" rIns="0" bIns="0" rtlCol="0" anchor="t">
+            <a:spAutoFit/>
+          </a:bodyPr>
+          <a:lstStyle/>
+          <a:p>
+            <a:pPr>
+              <a:lnSpc>
+                <a:spcPts val="1344"/>
+              </a:lnSpc>
+            </a:pPr>
+            <a:r>
+              <a:rPr lang="en-US" sz="1401" b="1" dirty="0">
+                <a:solidFill>
+                  <a:srgbClr val="B0202A"/>
+                </a:solidFill>
+                <a:latin typeface="Times New Roman" panose="02020603050405020304" pitchFamily="18" charset="0"/>
+                <a:ea typeface="DejaVu Sans Bold"/>
+                <a:cs typeface="Times New Roman" panose="02020603050405020304" pitchFamily="18" charset="0"/>
+                <a:sym typeface="DejaVu Sans Bold"/>
+              </a:rPr>
+              <a:t>H9 · Error Recovery</a:t>
+            </a:r>
+          </a:p>
+        </p:txBody>
+      </p:sp>
+      <p:sp>
+        <p:nvSpPr>
+          <p:cNvPr id="112" name="TextBox 112"/>
+          <p:cNvSpPr txBox="1"/>
+          <p:nvPr/>
+        </p:nvSpPr>
+        <p:spPr>
+          <a:xfrm>
+            <a:off x="1600201" y="6311606"/>
+            <a:ext cx="2239072" cy="167162"/>
+          </a:xfrm>
+          <a:prstGeom prst="rect">
+            <a:avLst/>
+          </a:prstGeom>
+        </p:spPr>
+        <p:txBody>
+          <a:bodyPr wrap="square" lIns="0" tIns="0" rIns="0" bIns="0" rtlCol="0" anchor="t">
+            <a:spAutoFit/>
+          </a:bodyPr>
+          <a:lstStyle/>
+          <a:p>
+            <a:pPr>
+              <a:lnSpc>
+                <a:spcPts val="1344"/>
+              </a:lnSpc>
+            </a:pPr>
+            <a:r>
+              <a:rPr lang="en-US" sz="1401" dirty="0">
+                <a:solidFill>
+                  <a:srgbClr val="000000"/>
+                </a:solidFill>
+                <a:latin typeface="Times New Roman" panose="02020603050405020304" pitchFamily="18" charset="0"/>
+                <a:ea typeface="DejaVu Sans Light"/>
+                <a:cs typeface="Times New Roman" panose="02020603050405020304" pitchFamily="18" charset="0"/>
+                <a:sym typeface="DejaVu Sans Light"/>
+              </a:rPr>
+              <a:t>H10 · Help and documentation</a:t>
+            </a:r>
+          </a:p>
+        </p:txBody>
+      </p:sp>
+      <p:sp>
+        <p:nvSpPr>
+          <p:cNvPr id="113" name="TextBox 113"/>
+          <p:cNvSpPr txBox="1"/>
+          <p:nvPr/>
+        </p:nvSpPr>
+        <p:spPr>
+          <a:xfrm>
+            <a:off x="9325518" y="3123781"/>
+            <a:ext cx="633984" cy="167162"/>
+          </a:xfrm>
+          <a:prstGeom prst="rect">
+            <a:avLst/>
+          </a:prstGeom>
+        </p:spPr>
+        <p:txBody>
+          <a:bodyPr wrap="square" lIns="0" tIns="0" rIns="0" bIns="0" rtlCol="0" anchor="t">
+            <a:spAutoFit/>
+          </a:bodyPr>
+          <a:lstStyle/>
+          <a:p>
+            <a:pPr>
+              <a:lnSpc>
+                <a:spcPts val="1344"/>
+              </a:lnSpc>
+            </a:pPr>
+            <a:r>
+              <a:rPr lang="en-US" sz="1401" dirty="0" err="1">
+                <a:solidFill>
+                  <a:srgbClr val="000000"/>
+                </a:solidFill>
+                <a:latin typeface="Times New Roman" panose="02020603050405020304" pitchFamily="18" charset="0"/>
+                <a:ea typeface="DejaVu Sans Light"/>
+                <a:cs typeface="Times New Roman" panose="02020603050405020304" pitchFamily="18" charset="0"/>
+                <a:sym typeface="DejaVu Sans Light"/>
+              </a:rPr>
+              <a:t>MedRec</a:t>
+            </a:r>
+            <a:endParaRPr lang="en-US" sz="1401" dirty="0">
+              <a:solidFill>
+                <a:srgbClr val="000000"/>
+              </a:solidFill>
+              <a:latin typeface="Times New Roman" panose="02020603050405020304" pitchFamily="18" charset="0"/>
+              <a:ea typeface="DejaVu Sans Light"/>
+              <a:cs typeface="Times New Roman" panose="02020603050405020304" pitchFamily="18" charset="0"/>
+              <a:sym typeface="DejaVu Sans Light"/>
+            </a:endParaRPr>
+          </a:p>
+        </p:txBody>
+      </p:sp>
+      <p:sp>
+        <p:nvSpPr>
+          <p:cNvPr id="114" name="TextBox 114"/>
+          <p:cNvSpPr txBox="1"/>
+          <p:nvPr/>
+        </p:nvSpPr>
+        <p:spPr>
+          <a:xfrm>
+            <a:off x="9220201" y="3644456"/>
+            <a:ext cx="741597" cy="167162"/>
+          </a:xfrm>
+          <a:prstGeom prst="rect">
+            <a:avLst/>
+          </a:prstGeom>
+        </p:spPr>
+        <p:txBody>
+          <a:bodyPr wrap="square" lIns="0" tIns="0" rIns="0" bIns="0" rtlCol="0" anchor="t">
+            <a:spAutoFit/>
+          </a:bodyPr>
+          <a:lstStyle/>
+          <a:p>
+            <a:pPr>
+              <a:lnSpc>
+                <a:spcPts val="1344"/>
+              </a:lnSpc>
+            </a:pPr>
+            <a:r>
+              <a:rPr lang="en-US" sz="1401" dirty="0" err="1">
+                <a:solidFill>
+                  <a:srgbClr val="000000"/>
+                </a:solidFill>
+                <a:latin typeface="Times New Roman" panose="02020603050405020304" pitchFamily="18" charset="0"/>
+                <a:ea typeface="DejaVu Sans Light"/>
+                <a:cs typeface="Times New Roman" panose="02020603050405020304" pitchFamily="18" charset="0"/>
+                <a:sym typeface="DejaVu Sans Light"/>
+              </a:rPr>
+              <a:t>Patientory</a:t>
+            </a:r>
+            <a:endParaRPr lang="en-US" sz="1401" dirty="0">
+              <a:solidFill>
+                <a:srgbClr val="000000"/>
+              </a:solidFill>
+              <a:latin typeface="Times New Roman" panose="02020603050405020304" pitchFamily="18" charset="0"/>
+              <a:ea typeface="DejaVu Sans Light"/>
+              <a:cs typeface="Times New Roman" panose="02020603050405020304" pitchFamily="18" charset="0"/>
+              <a:sym typeface="DejaVu Sans Light"/>
+            </a:endParaRPr>
+          </a:p>
+        </p:txBody>
+      </p:sp>
+      <p:sp>
+        <p:nvSpPr>
+          <p:cNvPr id="115" name="TextBox 115"/>
+          <p:cNvSpPr txBox="1"/>
+          <p:nvPr/>
+        </p:nvSpPr>
+        <p:spPr>
+          <a:xfrm>
+            <a:off x="9325520" y="4101607"/>
+            <a:ext cx="634127" cy="167162"/>
+          </a:xfrm>
+          <a:prstGeom prst="rect">
+            <a:avLst/>
+          </a:prstGeom>
+        </p:spPr>
+        <p:txBody>
+          <a:bodyPr wrap="square" lIns="0" tIns="0" rIns="0" bIns="0" rtlCol="0" anchor="t">
+            <a:spAutoFit/>
+          </a:bodyPr>
+          <a:lstStyle/>
+          <a:p>
+            <a:pPr>
+              <a:lnSpc>
+                <a:spcPts val="1344"/>
+              </a:lnSpc>
+            </a:pPr>
+            <a:r>
+              <a:rPr lang="en-US" sz="1401" dirty="0" err="1">
+                <a:solidFill>
+                  <a:srgbClr val="000000"/>
+                </a:solidFill>
+                <a:latin typeface="Times New Roman" panose="02020603050405020304" pitchFamily="18" charset="0"/>
+                <a:ea typeface="DejaVu Sans Light"/>
+                <a:cs typeface="Times New Roman" panose="02020603050405020304" pitchFamily="18" charset="0"/>
+                <a:sym typeface="DejaVu Sans Light"/>
+              </a:rPr>
+              <a:t>BurstIQ</a:t>
+            </a:r>
+            <a:endParaRPr lang="en-US" sz="1401" dirty="0">
+              <a:solidFill>
+                <a:srgbClr val="000000"/>
+              </a:solidFill>
+              <a:latin typeface="Times New Roman" panose="02020603050405020304" pitchFamily="18" charset="0"/>
+              <a:ea typeface="DejaVu Sans Light"/>
+              <a:cs typeface="Times New Roman" panose="02020603050405020304" pitchFamily="18" charset="0"/>
+              <a:sym typeface="DejaVu Sans Light"/>
+            </a:endParaRPr>
+          </a:p>
+        </p:txBody>
+      </p:sp>
+      <p:sp>
+        <p:nvSpPr>
+          <p:cNvPr id="116" name="TextBox 116"/>
+          <p:cNvSpPr txBox="1"/>
+          <p:nvPr/>
+        </p:nvSpPr>
+        <p:spPr>
+          <a:xfrm>
+            <a:off x="9955970" y="4455423"/>
+            <a:ext cx="82390" cy="179536"/>
+          </a:xfrm>
+          <a:prstGeom prst="rect">
+            <a:avLst/>
+          </a:prstGeom>
+        </p:spPr>
+        <p:txBody>
+          <a:bodyPr lIns="0" tIns="0" rIns="0" bIns="0" rtlCol="0" anchor="t">
+            <a:spAutoFit/>
+          </a:bodyPr>
+          <a:lstStyle/>
+          <a:p>
+            <a:pPr>
+              <a:lnSpc>
+                <a:spcPts val="1401"/>
+              </a:lnSpc>
+            </a:pPr>
+            <a:r>
+              <a:rPr lang="en-US" sz="1401">
+                <a:solidFill>
+                  <a:srgbClr val="000000"/>
+                </a:solidFill>
+                <a:latin typeface="Times New Roman" panose="02020603050405020304" pitchFamily="18" charset="0"/>
+                <a:ea typeface="DejaVu Sans Light"/>
+                <a:cs typeface="Times New Roman" panose="02020603050405020304" pitchFamily="18" charset="0"/>
+                <a:sym typeface="DejaVu Sans Light"/>
+              </a:rPr>
+              <a:t>0</a:t>
+            </a:r>
+          </a:p>
+        </p:txBody>
+      </p:sp>
+      <p:sp>
+        <p:nvSpPr>
+          <p:cNvPr id="117" name="TextBox 117"/>
+          <p:cNvSpPr txBox="1"/>
+          <p:nvPr/>
+        </p:nvSpPr>
+        <p:spPr>
+          <a:xfrm>
+            <a:off x="9325376" y="5382074"/>
+            <a:ext cx="634127" cy="167162"/>
+          </a:xfrm>
+          <a:prstGeom prst="rect">
+            <a:avLst/>
+          </a:prstGeom>
+        </p:spPr>
+        <p:txBody>
+          <a:bodyPr wrap="square" lIns="0" tIns="0" rIns="0" bIns="0" rtlCol="0" anchor="t">
+            <a:spAutoFit/>
+          </a:bodyPr>
+          <a:lstStyle/>
+          <a:p>
+            <a:pPr>
+              <a:lnSpc>
+                <a:spcPts val="1344"/>
+              </a:lnSpc>
+            </a:pPr>
+            <a:r>
+              <a:rPr lang="en-US" sz="1401" dirty="0" err="1">
+                <a:solidFill>
+                  <a:srgbClr val="000000"/>
+                </a:solidFill>
+                <a:latin typeface="Times New Roman" panose="02020603050405020304" pitchFamily="18" charset="0"/>
+                <a:ea typeface="DejaVu Sans Light"/>
+                <a:cs typeface="Times New Roman" panose="02020603050405020304" pitchFamily="18" charset="0"/>
+                <a:sym typeface="DejaVu Sans Light"/>
+              </a:rPr>
+              <a:t>MedRec</a:t>
+            </a:r>
+            <a:endParaRPr lang="en-US" sz="1401" dirty="0">
+              <a:solidFill>
+                <a:srgbClr val="000000"/>
+              </a:solidFill>
+              <a:latin typeface="Times New Roman" panose="02020603050405020304" pitchFamily="18" charset="0"/>
+              <a:ea typeface="DejaVu Sans Light"/>
+              <a:cs typeface="Times New Roman" panose="02020603050405020304" pitchFamily="18" charset="0"/>
+              <a:sym typeface="DejaVu Sans Light"/>
+            </a:endParaRPr>
+          </a:p>
+        </p:txBody>
+      </p:sp>
+      <p:sp>
+        <p:nvSpPr>
+          <p:cNvPr id="118" name="TextBox 118"/>
+          <p:cNvSpPr txBox="1"/>
+          <p:nvPr/>
+        </p:nvSpPr>
+        <p:spPr>
+          <a:xfrm>
+            <a:off x="9220201" y="5883373"/>
+            <a:ext cx="741597" cy="167162"/>
+          </a:xfrm>
+          <a:prstGeom prst="rect">
+            <a:avLst/>
+          </a:prstGeom>
+        </p:spPr>
+        <p:txBody>
+          <a:bodyPr wrap="square" lIns="0" tIns="0" rIns="0" bIns="0" rtlCol="0" anchor="t">
+            <a:spAutoFit/>
+          </a:bodyPr>
+          <a:lstStyle/>
+          <a:p>
+            <a:pPr>
+              <a:lnSpc>
+                <a:spcPts val="1344"/>
+              </a:lnSpc>
+            </a:pPr>
+            <a:r>
+              <a:rPr lang="en-US" sz="1401" dirty="0" err="1">
+                <a:solidFill>
+                  <a:srgbClr val="000000"/>
+                </a:solidFill>
+                <a:latin typeface="Times New Roman" panose="02020603050405020304" pitchFamily="18" charset="0"/>
+                <a:ea typeface="DejaVu Sans Light"/>
+                <a:cs typeface="Times New Roman" panose="02020603050405020304" pitchFamily="18" charset="0"/>
+                <a:sym typeface="DejaVu Sans Light"/>
+              </a:rPr>
+              <a:t>Patientory</a:t>
+            </a:r>
+            <a:endParaRPr lang="en-US" sz="1199" dirty="0">
+              <a:solidFill>
+                <a:srgbClr val="000000"/>
+              </a:solidFill>
+              <a:latin typeface="Times New Roman" panose="02020603050405020304" pitchFamily="18" charset="0"/>
+              <a:ea typeface="DejaVu Sans Light"/>
+              <a:cs typeface="Times New Roman" panose="02020603050405020304" pitchFamily="18" charset="0"/>
+              <a:sym typeface="DejaVu Sans Light"/>
+            </a:endParaRPr>
+          </a:p>
+        </p:txBody>
+      </p:sp>
+      <p:sp>
+        <p:nvSpPr>
+          <p:cNvPr id="119" name="TextBox 119"/>
+          <p:cNvSpPr txBox="1"/>
+          <p:nvPr/>
+        </p:nvSpPr>
+        <p:spPr>
+          <a:xfrm>
+            <a:off x="9325518" y="6384674"/>
+            <a:ext cx="634128" cy="167162"/>
+          </a:xfrm>
+          <a:prstGeom prst="rect">
+            <a:avLst/>
+          </a:prstGeom>
+        </p:spPr>
+        <p:txBody>
+          <a:bodyPr wrap="square" lIns="0" tIns="0" rIns="0" bIns="0" rtlCol="0" anchor="t">
+            <a:spAutoFit/>
+          </a:bodyPr>
+          <a:lstStyle/>
+          <a:p>
+            <a:pPr>
+              <a:lnSpc>
+                <a:spcPts val="1344"/>
+              </a:lnSpc>
+            </a:pPr>
+            <a:r>
+              <a:rPr lang="en-US" sz="1401" dirty="0" err="1">
+                <a:solidFill>
+                  <a:srgbClr val="000000"/>
+                </a:solidFill>
+                <a:latin typeface="Times New Roman" panose="02020603050405020304" pitchFamily="18" charset="0"/>
+                <a:ea typeface="DejaVu Sans Light"/>
+                <a:cs typeface="Times New Roman" panose="02020603050405020304" pitchFamily="18" charset="0"/>
+                <a:sym typeface="DejaVu Sans Light"/>
+              </a:rPr>
+              <a:t>BurstIQ</a:t>
+            </a:r>
+            <a:endParaRPr lang="en-US" sz="1401" dirty="0">
+              <a:solidFill>
+                <a:srgbClr val="000000"/>
+              </a:solidFill>
+              <a:latin typeface="Times New Roman" panose="02020603050405020304" pitchFamily="18" charset="0"/>
+              <a:ea typeface="DejaVu Sans Light"/>
+              <a:cs typeface="Times New Roman" panose="02020603050405020304" pitchFamily="18" charset="0"/>
+              <a:sym typeface="DejaVu Sans Light"/>
+            </a:endParaRPr>
+          </a:p>
+        </p:txBody>
+      </p:sp>
+      <p:sp>
+        <p:nvSpPr>
+          <p:cNvPr id="120" name="TextBox 120"/>
+          <p:cNvSpPr txBox="1"/>
+          <p:nvPr/>
+        </p:nvSpPr>
+        <p:spPr>
+          <a:xfrm>
+            <a:off x="9955970" y="6694788"/>
+            <a:ext cx="82390" cy="179536"/>
+          </a:xfrm>
+          <a:prstGeom prst="rect">
+            <a:avLst/>
+          </a:prstGeom>
+        </p:spPr>
+        <p:txBody>
+          <a:bodyPr lIns="0" tIns="0" rIns="0" bIns="0" rtlCol="0" anchor="t">
+            <a:spAutoFit/>
+          </a:bodyPr>
+          <a:lstStyle/>
+          <a:p>
+            <a:pPr>
+              <a:lnSpc>
+                <a:spcPts val="1401"/>
+              </a:lnSpc>
+            </a:pPr>
+            <a:r>
+              <a:rPr lang="en-US" sz="1401">
+                <a:solidFill>
+                  <a:srgbClr val="000000"/>
+                </a:solidFill>
+                <a:latin typeface="Times New Roman" panose="02020603050405020304" pitchFamily="18" charset="0"/>
+                <a:ea typeface="DejaVu Sans Light"/>
+                <a:cs typeface="Times New Roman" panose="02020603050405020304" pitchFamily="18" charset="0"/>
+                <a:sym typeface="DejaVu Sans Light"/>
+              </a:rPr>
+              <a:t>0</a:t>
+            </a:r>
+          </a:p>
+        </p:txBody>
+      </p:sp>
+      <p:sp>
+        <p:nvSpPr>
+          <p:cNvPr id="121" name="TextBox 121"/>
+          <p:cNvSpPr txBox="1"/>
+          <p:nvPr/>
+        </p:nvSpPr>
+        <p:spPr>
+          <a:xfrm>
+            <a:off x="11027713" y="5864448"/>
+            <a:ext cx="86554" cy="167162"/>
+          </a:xfrm>
+          <a:prstGeom prst="rect">
+            <a:avLst/>
+          </a:prstGeom>
+        </p:spPr>
+        <p:txBody>
+          <a:bodyPr lIns="0" tIns="0" rIns="0" bIns="0" rtlCol="0" anchor="t">
+            <a:spAutoFit/>
+          </a:bodyPr>
+          <a:lstStyle/>
+          <a:p>
+            <a:pPr>
+              <a:lnSpc>
+                <a:spcPts val="1344"/>
+              </a:lnSpc>
+            </a:pPr>
+            <a:r>
+              <a:rPr lang="en-US" sz="1401" b="1" dirty="0">
+                <a:solidFill>
+                  <a:srgbClr val="20242A"/>
+                </a:solidFill>
+                <a:latin typeface="Times New Roman" panose="02020603050405020304" pitchFamily="18" charset="0"/>
+                <a:ea typeface="DejaVu Sans Bold"/>
+                <a:cs typeface="Times New Roman" panose="02020603050405020304" pitchFamily="18" charset="0"/>
+                <a:sym typeface="DejaVu Sans Bold"/>
+              </a:rPr>
+              <a:t>4</a:t>
+            </a:r>
+          </a:p>
+        </p:txBody>
+      </p:sp>
+      <p:sp>
+        <p:nvSpPr>
+          <p:cNvPr id="122" name="TextBox 122"/>
+          <p:cNvSpPr txBox="1"/>
+          <p:nvPr/>
+        </p:nvSpPr>
+        <p:spPr>
+          <a:xfrm>
+            <a:off x="10640177" y="565900"/>
+            <a:ext cx="48683" cy="180306"/>
+          </a:xfrm>
+          <a:prstGeom prst="rect">
+            <a:avLst/>
+          </a:prstGeom>
+        </p:spPr>
+        <p:txBody>
+          <a:bodyPr lIns="0" tIns="0" rIns="0" bIns="0" rtlCol="0" anchor="t">
+            <a:spAutoFit/>
+          </a:bodyPr>
+          <a:lstStyle/>
+          <a:p>
+            <a:pPr>
+              <a:lnSpc>
+                <a:spcPts val="1512"/>
+              </a:lnSpc>
+            </a:pPr>
+            <a:r>
+              <a:rPr lang="en-US" sz="1199" b="1">
+                <a:solidFill>
+                  <a:srgbClr val="000000"/>
+                </a:solidFill>
+                <a:latin typeface="Times New Roman" panose="02020603050405020304" pitchFamily="18" charset="0"/>
+                <a:ea typeface="DejaVu Sans Bold"/>
+                <a:cs typeface="Times New Roman" panose="02020603050405020304" pitchFamily="18" charset="0"/>
+                <a:sym typeface="DejaVu Sans Bold"/>
+              </a:rPr>
+              <a:t> </a:t>
+            </a:r>
+          </a:p>
+        </p:txBody>
+      </p:sp>
+      <p:sp>
+        <p:nvSpPr>
+          <p:cNvPr id="123" name="TextBox 123"/>
+          <p:cNvSpPr txBox="1"/>
+          <p:nvPr/>
+        </p:nvSpPr>
+        <p:spPr>
+          <a:xfrm>
+            <a:off x="10543100" y="785612"/>
+            <a:ext cx="1238438" cy="1449115"/>
+          </a:xfrm>
+          <a:prstGeom prst="rect">
+            <a:avLst/>
+          </a:prstGeom>
+        </p:spPr>
+        <p:txBody>
+          <a:bodyPr wrap="square" lIns="0" tIns="0" rIns="0" bIns="0" rtlCol="0" anchor="t">
+            <a:spAutoFit/>
+          </a:bodyPr>
+          <a:lstStyle/>
+          <a:p>
+            <a:pPr algn="just">
+              <a:lnSpc>
+                <a:spcPts val="2274"/>
+              </a:lnSpc>
+            </a:pPr>
+            <a:r>
+              <a:rPr lang="en-US" sz="1600" dirty="0">
+                <a:solidFill>
+                  <a:srgbClr val="20242A"/>
+                </a:solidFill>
+                <a:latin typeface="Times New Roman" panose="02020603050405020304" pitchFamily="18" charset="0"/>
+                <a:ea typeface="DejaVu Sans Light"/>
+                <a:cs typeface="Times New Roman" panose="02020603050405020304" pitchFamily="18" charset="0"/>
+                <a:sym typeface="DejaVu Sans Light"/>
+              </a:rPr>
+              <a:t>0 No problem</a:t>
+            </a:r>
+          </a:p>
+          <a:p>
+            <a:pPr algn="just">
+              <a:lnSpc>
+                <a:spcPts val="2274"/>
+              </a:lnSpc>
+            </a:pPr>
+            <a:r>
+              <a:rPr lang="en-US" sz="1600" dirty="0">
+                <a:solidFill>
+                  <a:srgbClr val="20242A"/>
+                </a:solidFill>
+                <a:latin typeface="Times New Roman" panose="02020603050405020304" pitchFamily="18" charset="0"/>
+                <a:ea typeface="DejaVu Sans Light"/>
+                <a:cs typeface="Times New Roman" panose="02020603050405020304" pitchFamily="18" charset="0"/>
+                <a:sym typeface="DejaVu Sans Light"/>
+              </a:rPr>
+              <a:t>1 Cosmetic</a:t>
+            </a:r>
+          </a:p>
+          <a:p>
+            <a:pPr algn="just">
+              <a:lnSpc>
+                <a:spcPts val="2274"/>
+              </a:lnSpc>
+            </a:pPr>
+            <a:r>
+              <a:rPr lang="en-US" sz="1600" dirty="0">
+                <a:solidFill>
+                  <a:srgbClr val="20242A"/>
+                </a:solidFill>
+                <a:latin typeface="Times New Roman" panose="02020603050405020304" pitchFamily="18" charset="0"/>
+                <a:ea typeface="DejaVu Sans Light"/>
+                <a:cs typeface="Times New Roman" panose="02020603050405020304" pitchFamily="18" charset="0"/>
+                <a:sym typeface="DejaVu Sans Light"/>
+              </a:rPr>
+              <a:t>2 Minor</a:t>
+            </a:r>
+          </a:p>
+          <a:p>
+            <a:pPr algn="just">
+              <a:lnSpc>
+                <a:spcPts val="2274"/>
+              </a:lnSpc>
+            </a:pPr>
+            <a:r>
+              <a:rPr lang="en-US" sz="1600" dirty="0">
+                <a:solidFill>
+                  <a:srgbClr val="20242A"/>
+                </a:solidFill>
+                <a:latin typeface="Times New Roman" panose="02020603050405020304" pitchFamily="18" charset="0"/>
+                <a:ea typeface="DejaVu Sans Light"/>
+                <a:cs typeface="Times New Roman" panose="02020603050405020304" pitchFamily="18" charset="0"/>
+                <a:sym typeface="DejaVu Sans Light"/>
+              </a:rPr>
+              <a:t>3 Major</a:t>
+            </a:r>
+          </a:p>
+          <a:p>
+            <a:pPr algn="just">
+              <a:lnSpc>
+                <a:spcPts val="2274"/>
+              </a:lnSpc>
+            </a:pPr>
+            <a:r>
+              <a:rPr lang="en-US" sz="1600" dirty="0">
+                <a:solidFill>
+                  <a:srgbClr val="20242A"/>
+                </a:solidFill>
+                <a:latin typeface="Times New Roman" panose="02020603050405020304" pitchFamily="18" charset="0"/>
+                <a:ea typeface="DejaVu Sans Light"/>
+                <a:cs typeface="Times New Roman" panose="02020603050405020304" pitchFamily="18" charset="0"/>
+                <a:sym typeface="DejaVu Sans Light"/>
+              </a:rPr>
+              <a:t>4 Catastrophic</a:t>
+            </a:r>
+          </a:p>
+        </p:txBody>
+      </p:sp>
+      <p:sp>
+        <p:nvSpPr>
+          <p:cNvPr id="124" name="TextBox 124"/>
+          <p:cNvSpPr txBox="1"/>
+          <p:nvPr/>
+        </p:nvSpPr>
+        <p:spPr>
+          <a:xfrm>
+            <a:off x="11524756" y="6365748"/>
+            <a:ext cx="86554" cy="167162"/>
+          </a:xfrm>
+          <a:prstGeom prst="rect">
+            <a:avLst/>
+          </a:prstGeom>
+        </p:spPr>
+        <p:txBody>
+          <a:bodyPr lIns="0" tIns="0" rIns="0" bIns="0" rtlCol="0" anchor="t">
+            <a:spAutoFit/>
+          </a:bodyPr>
+          <a:lstStyle/>
+          <a:p>
+            <a:pPr>
+              <a:lnSpc>
+                <a:spcPts val="1344"/>
+              </a:lnSpc>
+            </a:pPr>
+            <a:r>
+              <a:rPr lang="en-US" sz="1401" b="1" dirty="0">
+                <a:solidFill>
+                  <a:srgbClr val="20242A"/>
+                </a:solidFill>
+                <a:latin typeface="Times New Roman" panose="02020603050405020304" pitchFamily="18" charset="0"/>
+                <a:ea typeface="DejaVu Sans Bold"/>
+                <a:cs typeface="Times New Roman" panose="02020603050405020304" pitchFamily="18" charset="0"/>
+                <a:sym typeface="DejaVu Sans Bold"/>
+              </a:rPr>
+              <a:t>6</a:t>
+            </a:r>
+          </a:p>
+        </p:txBody>
+      </p:sp>
+      <p:sp>
+        <p:nvSpPr>
+          <p:cNvPr id="125" name="TextBox 125"/>
+          <p:cNvSpPr txBox="1"/>
+          <p:nvPr/>
+        </p:nvSpPr>
+        <p:spPr>
+          <a:xfrm>
+            <a:off x="11644047" y="2781806"/>
+            <a:ext cx="47787" cy="180306"/>
+          </a:xfrm>
+          <a:prstGeom prst="rect">
+            <a:avLst/>
+          </a:prstGeom>
+        </p:spPr>
+        <p:txBody>
+          <a:bodyPr lIns="0" tIns="0" rIns="0" bIns="0" rtlCol="0" anchor="t">
+            <a:spAutoFit/>
+          </a:bodyPr>
+          <a:lstStyle/>
+          <a:p>
+            <a:pPr>
+              <a:lnSpc>
+                <a:spcPts val="1484"/>
+              </a:lnSpc>
+            </a:pPr>
+            <a:r>
+              <a:rPr lang="en-US" sz="1199" b="1">
+                <a:solidFill>
+                  <a:srgbClr val="000000"/>
+                </a:solidFill>
+                <a:latin typeface="Times New Roman" panose="02020603050405020304" pitchFamily="18" charset="0"/>
+                <a:ea typeface="DejaVu Sans Bold"/>
+                <a:cs typeface="Times New Roman" panose="02020603050405020304" pitchFamily="18" charset="0"/>
+                <a:sym typeface="DejaVu Sans Bold"/>
+              </a:rPr>
+              <a:t> </a:t>
+            </a:r>
+          </a:p>
+        </p:txBody>
+      </p:sp>
+      <p:sp>
+        <p:nvSpPr>
+          <p:cNvPr id="126" name="TextBox 126"/>
+          <p:cNvSpPr txBox="1"/>
+          <p:nvPr/>
+        </p:nvSpPr>
+        <p:spPr>
+          <a:xfrm>
+            <a:off x="11700491" y="3123781"/>
+            <a:ext cx="317734" cy="167162"/>
+          </a:xfrm>
+          <a:prstGeom prst="rect">
+            <a:avLst/>
+          </a:prstGeom>
+        </p:spPr>
+        <p:txBody>
+          <a:bodyPr wrap="square" lIns="0" tIns="0" rIns="0" bIns="0" rtlCol="0" anchor="t">
+            <a:spAutoFit/>
+          </a:bodyPr>
+          <a:lstStyle/>
+          <a:p>
+            <a:pPr>
+              <a:lnSpc>
+                <a:spcPts val="1344"/>
+              </a:lnSpc>
+            </a:pPr>
+            <a:r>
+              <a:rPr lang="en-US" sz="1401" b="1" dirty="0">
+                <a:solidFill>
+                  <a:srgbClr val="20242A"/>
+                </a:solidFill>
+                <a:latin typeface="Times New Roman" panose="02020603050405020304" pitchFamily="18" charset="0"/>
+                <a:ea typeface="DejaVu Sans Bold"/>
+                <a:cs typeface="Times New Roman" panose="02020603050405020304" pitchFamily="18" charset="0"/>
+                <a:sym typeface="DejaVu Sans Bold"/>
+              </a:rPr>
+              <a:t>2.9</a:t>
+            </a:r>
+            <a:endParaRPr lang="en-US" sz="1199" b="1" dirty="0">
+              <a:solidFill>
+                <a:srgbClr val="20242A"/>
+              </a:solidFill>
+              <a:latin typeface="Times New Roman" panose="02020603050405020304" pitchFamily="18" charset="0"/>
+              <a:ea typeface="DejaVu Sans Bold"/>
+              <a:cs typeface="Times New Roman" panose="02020603050405020304" pitchFamily="18" charset="0"/>
+              <a:sym typeface="DejaVu Sans Bold"/>
+            </a:endParaRPr>
+          </a:p>
+        </p:txBody>
+      </p:sp>
+      <p:sp>
+        <p:nvSpPr>
+          <p:cNvPr id="127" name="TextBox 127"/>
+          <p:cNvSpPr txBox="1"/>
+          <p:nvPr/>
+        </p:nvSpPr>
+        <p:spPr>
+          <a:xfrm>
+            <a:off x="11463804" y="3625083"/>
+            <a:ext cx="317734" cy="167162"/>
+          </a:xfrm>
+          <a:prstGeom prst="rect">
+            <a:avLst/>
+          </a:prstGeom>
+        </p:spPr>
+        <p:txBody>
+          <a:bodyPr wrap="square" lIns="0" tIns="0" rIns="0" bIns="0" rtlCol="0" anchor="t">
+            <a:spAutoFit/>
+          </a:bodyPr>
+          <a:lstStyle/>
+          <a:p>
+            <a:pPr>
+              <a:lnSpc>
+                <a:spcPts val="1344"/>
+              </a:lnSpc>
+            </a:pPr>
+            <a:r>
+              <a:rPr lang="en-US" sz="1401" b="1" dirty="0">
+                <a:solidFill>
+                  <a:srgbClr val="20242A"/>
+                </a:solidFill>
+                <a:latin typeface="Times New Roman" panose="02020603050405020304" pitchFamily="18" charset="0"/>
+                <a:ea typeface="DejaVu Sans Bold"/>
+                <a:cs typeface="Times New Roman" panose="02020603050405020304" pitchFamily="18" charset="0"/>
+                <a:sym typeface="DejaVu Sans Bold"/>
+              </a:rPr>
+              <a:t>2.3</a:t>
+            </a:r>
+            <a:endParaRPr lang="en-US" sz="1199" b="1" dirty="0">
+              <a:solidFill>
+                <a:srgbClr val="20242A"/>
+              </a:solidFill>
+              <a:latin typeface="Times New Roman" panose="02020603050405020304" pitchFamily="18" charset="0"/>
+              <a:ea typeface="DejaVu Sans Bold"/>
+              <a:cs typeface="Times New Roman" panose="02020603050405020304" pitchFamily="18" charset="0"/>
+              <a:sym typeface="DejaVu Sans Bold"/>
+            </a:endParaRPr>
+          </a:p>
+        </p:txBody>
+      </p:sp>
+      <p:sp>
+        <p:nvSpPr>
+          <p:cNvPr id="128" name="TextBox 128"/>
+          <p:cNvSpPr txBox="1"/>
+          <p:nvPr/>
+        </p:nvSpPr>
+        <p:spPr>
+          <a:xfrm>
+            <a:off x="11700491" y="4126382"/>
+            <a:ext cx="317734" cy="167162"/>
+          </a:xfrm>
+          <a:prstGeom prst="rect">
+            <a:avLst/>
+          </a:prstGeom>
+        </p:spPr>
+        <p:txBody>
+          <a:bodyPr wrap="square" lIns="0" tIns="0" rIns="0" bIns="0" rtlCol="0" anchor="t">
+            <a:spAutoFit/>
+          </a:bodyPr>
+          <a:lstStyle/>
+          <a:p>
+            <a:pPr>
+              <a:lnSpc>
+                <a:spcPts val="1344"/>
+              </a:lnSpc>
+            </a:pPr>
+            <a:r>
+              <a:rPr lang="en-US" sz="1401" b="1" dirty="0">
+                <a:solidFill>
+                  <a:srgbClr val="20242A"/>
+                </a:solidFill>
+                <a:latin typeface="Times New Roman" panose="02020603050405020304" pitchFamily="18" charset="0"/>
+                <a:ea typeface="DejaVu Sans Bold"/>
+                <a:cs typeface="Times New Roman" panose="02020603050405020304" pitchFamily="18" charset="0"/>
+                <a:sym typeface="DejaVu Sans Bold"/>
+              </a:rPr>
+              <a:t>2.8</a:t>
+            </a:r>
+          </a:p>
+        </p:txBody>
+      </p:sp>
+      <p:sp>
+        <p:nvSpPr>
+          <p:cNvPr id="129" name="TextBox 129"/>
+          <p:cNvSpPr txBox="1"/>
+          <p:nvPr/>
+        </p:nvSpPr>
+        <p:spPr>
+          <a:xfrm>
+            <a:off x="11731114" y="4455423"/>
+            <a:ext cx="82390" cy="179536"/>
+          </a:xfrm>
+          <a:prstGeom prst="rect">
+            <a:avLst/>
+          </a:prstGeom>
+        </p:spPr>
+        <p:txBody>
+          <a:bodyPr lIns="0" tIns="0" rIns="0" bIns="0" rtlCol="0" anchor="t">
+            <a:spAutoFit/>
+          </a:bodyPr>
+          <a:lstStyle/>
+          <a:p>
+            <a:pPr>
+              <a:lnSpc>
+                <a:spcPts val="1401"/>
+              </a:lnSpc>
+            </a:pPr>
+            <a:r>
+              <a:rPr lang="en-US" sz="1401">
+                <a:solidFill>
+                  <a:srgbClr val="000000"/>
+                </a:solidFill>
+                <a:latin typeface="Times New Roman" panose="02020603050405020304" pitchFamily="18" charset="0"/>
+                <a:ea typeface="DejaVu Sans Light"/>
+                <a:cs typeface="Times New Roman" panose="02020603050405020304" pitchFamily="18" charset="0"/>
+                <a:sym typeface="DejaVu Sans Light"/>
+              </a:rPr>
+              <a:t>3</a:t>
+            </a:r>
+          </a:p>
+        </p:txBody>
+      </p:sp>
+      <p:sp>
+        <p:nvSpPr>
+          <p:cNvPr id="130" name="TextBox 130"/>
+          <p:cNvSpPr txBox="1"/>
+          <p:nvPr/>
+        </p:nvSpPr>
+        <p:spPr>
+          <a:xfrm>
+            <a:off x="4364851" y="260518"/>
+            <a:ext cx="4125525" cy="218008"/>
+          </a:xfrm>
+          <a:prstGeom prst="rect">
+            <a:avLst/>
+          </a:prstGeom>
+        </p:spPr>
+        <p:txBody>
+          <a:bodyPr lIns="0" tIns="0" rIns="0" bIns="0" rtlCol="0" anchor="t">
+            <a:spAutoFit/>
+          </a:bodyPr>
+          <a:lstStyle/>
+          <a:p>
+            <a:pPr>
+              <a:lnSpc>
+                <a:spcPts val="1749"/>
+              </a:lnSpc>
+            </a:pPr>
+            <a:r>
+              <a:rPr lang="en-US" sz="1600" b="1" dirty="0">
+                <a:solidFill>
+                  <a:srgbClr val="000000"/>
+                </a:solidFill>
+                <a:latin typeface="Times New Roman" panose="02020603050405020304" pitchFamily="18" charset="0"/>
+                <a:ea typeface="DejaVu Sans Bold"/>
+                <a:cs typeface="Times New Roman" panose="02020603050405020304" pitchFamily="18" charset="0"/>
+                <a:sym typeface="DejaVu Sans Bold"/>
+              </a:rPr>
+              <a:t>Heuristic severity scores (0–4) by application</a:t>
+            </a:r>
+          </a:p>
+        </p:txBody>
+      </p:sp>
+      <p:sp>
+        <p:nvSpPr>
+          <p:cNvPr id="131" name="TextBox 131"/>
+          <p:cNvSpPr txBox="1"/>
+          <p:nvPr/>
+        </p:nvSpPr>
+        <p:spPr>
+          <a:xfrm>
+            <a:off x="9996345" y="565900"/>
+            <a:ext cx="1543736" cy="180306"/>
+          </a:xfrm>
+          <a:prstGeom prst="rect">
+            <a:avLst/>
+          </a:prstGeom>
+        </p:spPr>
+        <p:txBody>
+          <a:bodyPr lIns="0" tIns="0" rIns="0" bIns="0" rtlCol="0" anchor="t">
+            <a:spAutoFit/>
+          </a:bodyPr>
+          <a:lstStyle/>
+          <a:p>
+            <a:pPr>
+              <a:lnSpc>
+                <a:spcPts val="1512"/>
+              </a:lnSpc>
+            </a:pPr>
+            <a:r>
+              <a:rPr lang="en-US" sz="1199" b="1" dirty="0">
+                <a:solidFill>
+                  <a:srgbClr val="000000"/>
+                </a:solidFill>
+                <a:latin typeface="Times New Roman" panose="02020603050405020304" pitchFamily="18" charset="0"/>
+                <a:ea typeface="DejaVu Sans Bold"/>
+                <a:cs typeface="Times New Roman" panose="02020603050405020304" pitchFamily="18" charset="0"/>
+                <a:sym typeface="DejaVu Sans Bold"/>
+              </a:rPr>
+              <a:t>Severity scale (0–4)</a:t>
+            </a:r>
+          </a:p>
+        </p:txBody>
+      </p:sp>
+      <p:sp>
+        <p:nvSpPr>
+          <p:cNvPr id="132" name="TextBox 132"/>
+          <p:cNvSpPr txBox="1"/>
+          <p:nvPr/>
+        </p:nvSpPr>
+        <p:spPr>
+          <a:xfrm>
+            <a:off x="10453012" y="6694788"/>
+            <a:ext cx="82390" cy="179536"/>
+          </a:xfrm>
+          <a:prstGeom prst="rect">
+            <a:avLst/>
+          </a:prstGeom>
+        </p:spPr>
+        <p:txBody>
+          <a:bodyPr lIns="0" tIns="0" rIns="0" bIns="0" rtlCol="0" anchor="t">
+            <a:spAutoFit/>
+          </a:bodyPr>
+          <a:lstStyle/>
+          <a:p>
+            <a:pPr>
+              <a:lnSpc>
+                <a:spcPts val="1401"/>
+              </a:lnSpc>
+            </a:pPr>
+            <a:r>
+              <a:rPr lang="en-US" sz="1401">
+                <a:solidFill>
+                  <a:srgbClr val="000000"/>
+                </a:solidFill>
+                <a:latin typeface="Times New Roman" panose="02020603050405020304" pitchFamily="18" charset="0"/>
+                <a:ea typeface="DejaVu Sans Light"/>
+                <a:cs typeface="Times New Roman" panose="02020603050405020304" pitchFamily="18" charset="0"/>
+                <a:sym typeface="DejaVu Sans Light"/>
+              </a:rPr>
+              <a:t>2</a:t>
+            </a:r>
+          </a:p>
+        </p:txBody>
+      </p:sp>
+      <p:sp>
+        <p:nvSpPr>
+          <p:cNvPr id="133" name="TextBox 133"/>
+          <p:cNvSpPr txBox="1"/>
+          <p:nvPr/>
+        </p:nvSpPr>
+        <p:spPr>
+          <a:xfrm>
+            <a:off x="10547681" y="4455423"/>
+            <a:ext cx="82390" cy="179536"/>
+          </a:xfrm>
+          <a:prstGeom prst="rect">
+            <a:avLst/>
+          </a:prstGeom>
+        </p:spPr>
+        <p:txBody>
+          <a:bodyPr lIns="0" tIns="0" rIns="0" bIns="0" rtlCol="0" anchor="t">
+            <a:spAutoFit/>
+          </a:bodyPr>
+          <a:lstStyle/>
+          <a:p>
+            <a:pPr>
+              <a:lnSpc>
+                <a:spcPts val="1401"/>
+              </a:lnSpc>
+            </a:pPr>
+            <a:r>
+              <a:rPr lang="en-US" sz="1401">
+                <a:solidFill>
+                  <a:srgbClr val="000000"/>
+                </a:solidFill>
+                <a:latin typeface="Times New Roman" panose="02020603050405020304" pitchFamily="18" charset="0"/>
+                <a:ea typeface="DejaVu Sans Light"/>
+                <a:cs typeface="Times New Roman" panose="02020603050405020304" pitchFamily="18" charset="0"/>
+                <a:sym typeface="DejaVu Sans Light"/>
+              </a:rPr>
+              <a:t>1</a:t>
+            </a:r>
+          </a:p>
+        </p:txBody>
+      </p:sp>
+      <p:sp>
+        <p:nvSpPr>
+          <p:cNvPr id="134" name="TextBox 134"/>
+          <p:cNvSpPr txBox="1"/>
+          <p:nvPr/>
+        </p:nvSpPr>
+        <p:spPr>
+          <a:xfrm>
+            <a:off x="10950055" y="6694788"/>
+            <a:ext cx="82390" cy="179536"/>
+          </a:xfrm>
+          <a:prstGeom prst="rect">
+            <a:avLst/>
+          </a:prstGeom>
+        </p:spPr>
+        <p:txBody>
+          <a:bodyPr lIns="0" tIns="0" rIns="0" bIns="0" rtlCol="0" anchor="t">
+            <a:spAutoFit/>
+          </a:bodyPr>
+          <a:lstStyle/>
+          <a:p>
+            <a:pPr>
+              <a:lnSpc>
+                <a:spcPts val="1401"/>
+              </a:lnSpc>
+            </a:pPr>
+            <a:r>
+              <a:rPr lang="en-US" sz="1401">
+                <a:solidFill>
+                  <a:srgbClr val="000000"/>
+                </a:solidFill>
+                <a:latin typeface="Times New Roman" panose="02020603050405020304" pitchFamily="18" charset="0"/>
+                <a:ea typeface="DejaVu Sans Light"/>
+                <a:cs typeface="Times New Roman" panose="02020603050405020304" pitchFamily="18" charset="0"/>
+                <a:sym typeface="DejaVu Sans Light"/>
+              </a:rPr>
+              <a:t>4</a:t>
+            </a:r>
+          </a:p>
+        </p:txBody>
+      </p:sp>
+      <p:sp>
+        <p:nvSpPr>
+          <p:cNvPr id="135" name="TextBox 135"/>
+          <p:cNvSpPr txBox="1"/>
+          <p:nvPr/>
+        </p:nvSpPr>
+        <p:spPr>
+          <a:xfrm>
+            <a:off x="11139403" y="4455423"/>
+            <a:ext cx="82390" cy="179536"/>
+          </a:xfrm>
+          <a:prstGeom prst="rect">
+            <a:avLst/>
+          </a:prstGeom>
+        </p:spPr>
+        <p:txBody>
+          <a:bodyPr lIns="0" tIns="0" rIns="0" bIns="0" rtlCol="0" anchor="t">
+            <a:spAutoFit/>
+          </a:bodyPr>
+          <a:lstStyle/>
+          <a:p>
+            <a:pPr>
+              <a:lnSpc>
+                <a:spcPts val="1401"/>
+              </a:lnSpc>
+            </a:pPr>
+            <a:r>
+              <a:rPr lang="en-US" sz="1401">
+                <a:solidFill>
+                  <a:srgbClr val="000000"/>
+                </a:solidFill>
+                <a:latin typeface="Times New Roman" panose="02020603050405020304" pitchFamily="18" charset="0"/>
+                <a:ea typeface="DejaVu Sans Light"/>
+                <a:cs typeface="Times New Roman" panose="02020603050405020304" pitchFamily="18" charset="0"/>
+                <a:sym typeface="DejaVu Sans Light"/>
+              </a:rPr>
+              <a:t>2</a:t>
+            </a:r>
+          </a:p>
+        </p:txBody>
+      </p:sp>
+      <p:sp>
+        <p:nvSpPr>
+          <p:cNvPr id="136" name="TextBox 136"/>
+          <p:cNvSpPr txBox="1"/>
+          <p:nvPr/>
+        </p:nvSpPr>
+        <p:spPr>
+          <a:xfrm>
+            <a:off x="11447098" y="6694788"/>
+            <a:ext cx="82390" cy="179536"/>
+          </a:xfrm>
+          <a:prstGeom prst="rect">
+            <a:avLst/>
+          </a:prstGeom>
+        </p:spPr>
+        <p:txBody>
+          <a:bodyPr lIns="0" tIns="0" rIns="0" bIns="0" rtlCol="0" anchor="t">
+            <a:spAutoFit/>
+          </a:bodyPr>
+          <a:lstStyle/>
+          <a:p>
+            <a:pPr>
+              <a:lnSpc>
+                <a:spcPts val="1401"/>
+              </a:lnSpc>
+            </a:pPr>
+            <a:r>
+              <a:rPr lang="en-US" sz="1401">
+                <a:solidFill>
+                  <a:srgbClr val="000000"/>
+                </a:solidFill>
+                <a:latin typeface="Times New Roman" panose="02020603050405020304" pitchFamily="18" charset="0"/>
+                <a:ea typeface="DejaVu Sans Light"/>
+                <a:cs typeface="Times New Roman" panose="02020603050405020304" pitchFamily="18" charset="0"/>
+                <a:sym typeface="DejaVu Sans Light"/>
+              </a:rPr>
+              <a:t>6</a:t>
+            </a:r>
+          </a:p>
+        </p:txBody>
+      </p:sp>
+      <p:sp>
+        <p:nvSpPr>
+          <p:cNvPr id="137" name="TextBox 137"/>
+          <p:cNvSpPr txBox="1"/>
+          <p:nvPr/>
+        </p:nvSpPr>
+        <p:spPr>
+          <a:xfrm>
+            <a:off x="11944141" y="6694788"/>
+            <a:ext cx="82390" cy="179536"/>
+          </a:xfrm>
+          <a:prstGeom prst="rect">
+            <a:avLst/>
+          </a:prstGeom>
+        </p:spPr>
+        <p:txBody>
+          <a:bodyPr lIns="0" tIns="0" rIns="0" bIns="0" rtlCol="0" anchor="t">
+            <a:spAutoFit/>
+          </a:bodyPr>
+          <a:lstStyle/>
+          <a:p>
+            <a:pPr>
+              <a:lnSpc>
+                <a:spcPts val="1401"/>
+              </a:lnSpc>
+            </a:pPr>
+            <a:r>
+              <a:rPr lang="en-US" sz="1401">
+                <a:solidFill>
+                  <a:srgbClr val="000000"/>
+                </a:solidFill>
+                <a:latin typeface="Times New Roman" panose="02020603050405020304" pitchFamily="18" charset="0"/>
+                <a:ea typeface="DejaVu Sans Light"/>
+                <a:cs typeface="Times New Roman" panose="02020603050405020304" pitchFamily="18" charset="0"/>
+                <a:sym typeface="DejaVu Sans Light"/>
+              </a:rPr>
+              <a:t>8</a:t>
+            </a:r>
+          </a:p>
+        </p:txBody>
+      </p:sp>
+      <p:sp>
+        <p:nvSpPr>
+          <p:cNvPr id="138" name="TextBox 138"/>
+          <p:cNvSpPr txBox="1"/>
+          <p:nvPr/>
+        </p:nvSpPr>
+        <p:spPr>
+          <a:xfrm>
+            <a:off x="12322836" y="4455423"/>
+            <a:ext cx="82390" cy="179536"/>
+          </a:xfrm>
+          <a:prstGeom prst="rect">
+            <a:avLst/>
+          </a:prstGeom>
+        </p:spPr>
+        <p:txBody>
+          <a:bodyPr lIns="0" tIns="0" rIns="0" bIns="0" rtlCol="0" anchor="t">
+            <a:spAutoFit/>
+          </a:bodyPr>
+          <a:lstStyle/>
+          <a:p>
+            <a:pPr>
+              <a:lnSpc>
+                <a:spcPts val="1401"/>
+              </a:lnSpc>
+            </a:pPr>
+            <a:r>
+              <a:rPr lang="en-US" sz="1401">
+                <a:solidFill>
+                  <a:srgbClr val="000000"/>
+                </a:solidFill>
+                <a:latin typeface="Times New Roman" panose="02020603050405020304" pitchFamily="18" charset="0"/>
+                <a:ea typeface="DejaVu Sans Light"/>
+                <a:cs typeface="Times New Roman" panose="02020603050405020304" pitchFamily="18" charset="0"/>
+                <a:sym typeface="DejaVu Sans Light"/>
+              </a:rPr>
+              <a:t>4</a:t>
+            </a:r>
+          </a:p>
+        </p:txBody>
+      </p:sp>
+      <p:sp>
+        <p:nvSpPr>
+          <p:cNvPr id="139" name="TextBox 139"/>
+          <p:cNvSpPr txBox="1"/>
+          <p:nvPr/>
+        </p:nvSpPr>
+        <p:spPr>
+          <a:xfrm>
+            <a:off x="12344400" y="6694789"/>
+            <a:ext cx="221171" cy="179536"/>
+          </a:xfrm>
+          <a:prstGeom prst="rect">
+            <a:avLst/>
+          </a:prstGeom>
+        </p:spPr>
+        <p:txBody>
+          <a:bodyPr wrap="square" lIns="0" tIns="0" rIns="0" bIns="0" rtlCol="0" anchor="t">
+            <a:spAutoFit/>
+          </a:bodyPr>
+          <a:lstStyle/>
+          <a:p>
+            <a:pPr>
+              <a:lnSpc>
+                <a:spcPts val="1401"/>
+              </a:lnSpc>
+            </a:pPr>
+            <a:r>
+              <a:rPr lang="en-US" sz="1401" dirty="0">
+                <a:solidFill>
+                  <a:srgbClr val="000000"/>
+                </a:solidFill>
+                <a:latin typeface="Times New Roman" panose="02020603050405020304" pitchFamily="18" charset="0"/>
+                <a:ea typeface="DejaVu Sans Light"/>
+                <a:cs typeface="Times New Roman" panose="02020603050405020304" pitchFamily="18" charset="0"/>
+                <a:sym typeface="DejaVu Sans Light"/>
+              </a:rPr>
+              <a:t>10</a:t>
+            </a:r>
+          </a:p>
+        </p:txBody>
+      </p:sp>
+      <p:sp>
+        <p:nvSpPr>
+          <p:cNvPr id="140" name="TextBox 140"/>
+          <p:cNvSpPr txBox="1"/>
+          <p:nvPr/>
+        </p:nvSpPr>
+        <p:spPr>
+          <a:xfrm>
+            <a:off x="12356194" y="7081466"/>
+            <a:ext cx="35422" cy="153888"/>
+          </a:xfrm>
+          <a:prstGeom prst="rect">
+            <a:avLst/>
+          </a:prstGeom>
+        </p:spPr>
+        <p:txBody>
+          <a:bodyPr lIns="0" tIns="0" rIns="0" bIns="0" rtlCol="0" anchor="t">
+            <a:spAutoFit/>
+          </a:bodyPr>
+          <a:lstStyle/>
+          <a:p>
+            <a:pPr>
+              <a:lnSpc>
+                <a:spcPts val="1205"/>
+              </a:lnSpc>
+            </a:pPr>
+            <a:r>
+              <a:rPr lang="en-US" sz="1199">
+                <a:solidFill>
+                  <a:srgbClr val="4A515A"/>
+                </a:solidFill>
+                <a:latin typeface="Times New Roman" panose="02020603050405020304" pitchFamily="18" charset="0"/>
+                <a:ea typeface="DejaVu Sans Light"/>
+                <a:cs typeface="Times New Roman" panose="02020603050405020304" pitchFamily="18" charset="0"/>
+                <a:sym typeface="DejaVu Sans Light"/>
+              </a:rPr>
+              <a:t> </a:t>
+            </a:r>
+          </a:p>
+        </p:txBody>
+      </p:sp>
+      <p:sp>
+        <p:nvSpPr>
+          <p:cNvPr id="141" name="TextBox 141"/>
+          <p:cNvSpPr txBox="1"/>
+          <p:nvPr/>
+        </p:nvSpPr>
+        <p:spPr>
+          <a:xfrm>
+            <a:off x="9996346" y="2747506"/>
+            <a:ext cx="1650000" cy="147926"/>
+          </a:xfrm>
+          <a:prstGeom prst="rect">
+            <a:avLst/>
+          </a:prstGeom>
+        </p:spPr>
+        <p:txBody>
+          <a:bodyPr lIns="0" tIns="0" rIns="0" bIns="0" rtlCol="0" anchor="t">
+            <a:spAutoFit/>
+          </a:bodyPr>
+          <a:lstStyle/>
+          <a:p>
+            <a:pPr>
+              <a:lnSpc>
+                <a:spcPts val="1147"/>
+              </a:lnSpc>
+            </a:pPr>
+            <a:r>
+              <a:rPr lang="en-US" sz="1401" b="1" dirty="0">
+                <a:solidFill>
+                  <a:srgbClr val="000000"/>
+                </a:solidFill>
+                <a:latin typeface="Times New Roman" panose="02020603050405020304" pitchFamily="18" charset="0"/>
+                <a:ea typeface="DejaVu Sans Bold"/>
+                <a:cs typeface="Times New Roman" panose="02020603050405020304" pitchFamily="18" charset="0"/>
+                <a:sym typeface="DejaVu Sans Bold"/>
+              </a:rPr>
+              <a:t>Average severity</a:t>
+            </a:r>
+          </a:p>
+        </p:txBody>
+      </p:sp>
+      <p:sp>
+        <p:nvSpPr>
+          <p:cNvPr id="143" name="TextBox 143"/>
+          <p:cNvSpPr txBox="1"/>
+          <p:nvPr/>
+        </p:nvSpPr>
+        <p:spPr>
+          <a:xfrm>
+            <a:off x="9996346" y="4882658"/>
+            <a:ext cx="2172557" cy="311432"/>
+          </a:xfrm>
+          <a:prstGeom prst="rect">
+            <a:avLst/>
+          </a:prstGeom>
+        </p:spPr>
+        <p:txBody>
+          <a:bodyPr lIns="0" tIns="0" rIns="0" bIns="0" rtlCol="0" anchor="t">
+            <a:spAutoFit/>
+          </a:bodyPr>
+          <a:lstStyle/>
+          <a:p>
+            <a:pPr>
+              <a:lnSpc>
+                <a:spcPts val="1240"/>
+              </a:lnSpc>
+            </a:pPr>
+            <a:r>
+              <a:rPr lang="en-US" sz="1401" b="1" dirty="0">
+                <a:solidFill>
+                  <a:srgbClr val="000000"/>
+                </a:solidFill>
+                <a:latin typeface="Times New Roman" panose="02020603050405020304" pitchFamily="18" charset="0"/>
+                <a:ea typeface="DejaVu Sans Bold"/>
+                <a:cs typeface="Times New Roman" panose="02020603050405020304" pitchFamily="18" charset="0"/>
+                <a:sym typeface="DejaVu Sans Bold"/>
+              </a:rPr>
+              <a:t>Major (3) + Catastrophic (4) violations (of 10 heuristics)</a:t>
+            </a:r>
+          </a:p>
+        </p:txBody>
+      </p:sp>
+      <p:sp>
+        <p:nvSpPr>
+          <p:cNvPr id="144" name="TextBox 144"/>
+          <p:cNvSpPr txBox="1"/>
+          <p:nvPr/>
+        </p:nvSpPr>
+        <p:spPr>
+          <a:xfrm>
+            <a:off x="11773271" y="5363146"/>
+            <a:ext cx="86554" cy="167162"/>
+          </a:xfrm>
+          <a:prstGeom prst="rect">
+            <a:avLst/>
+          </a:prstGeom>
+        </p:spPr>
+        <p:txBody>
+          <a:bodyPr lIns="0" tIns="0" rIns="0" bIns="0" rtlCol="0" anchor="t">
+            <a:spAutoFit/>
+          </a:bodyPr>
+          <a:lstStyle/>
+          <a:p>
+            <a:pPr>
+              <a:lnSpc>
+                <a:spcPts val="1344"/>
+              </a:lnSpc>
+            </a:pPr>
+            <a:r>
+              <a:rPr lang="en-US" sz="1401" b="1" dirty="0">
+                <a:solidFill>
+                  <a:srgbClr val="20242A"/>
+                </a:solidFill>
+                <a:latin typeface="Times New Roman" panose="02020603050405020304" pitchFamily="18" charset="0"/>
+                <a:ea typeface="DejaVu Sans Bold"/>
+                <a:cs typeface="Times New Roman" panose="02020603050405020304" pitchFamily="18" charset="0"/>
+                <a:sym typeface="DejaVu Sans Bold"/>
+              </a:rPr>
+              <a:t>7</a:t>
+            </a:r>
+          </a:p>
+        </p:txBody>
+      </p:sp>
+      <p:sp>
+        <p:nvSpPr>
+          <p:cNvPr id="142" name="TextBox 73">
+            <a:extLst>
+              <a:ext uri="{FF2B5EF4-FFF2-40B4-BE49-F238E27FC236}">
+                <a16:creationId xmlns:a16="http://schemas.microsoft.com/office/drawing/2014/main" id="{807A60CD-A34E-45A7-A179-FD9C7850E984}"/>
+              </a:ext>
+            </a:extLst>
+          </p:cNvPr>
+          <p:cNvSpPr txBox="1"/>
+          <p:nvPr/>
+        </p:nvSpPr>
+        <p:spPr>
+          <a:xfrm>
+            <a:off x="5638800" y="850900"/>
+            <a:ext cx="94669" cy="192360"/>
+          </a:xfrm>
+          <a:prstGeom prst="rect">
+            <a:avLst/>
+          </a:prstGeom>
+        </p:spPr>
+        <p:txBody>
+          <a:bodyPr lIns="0" tIns="0" rIns="0" bIns="0" rtlCol="0" anchor="t">
+            <a:spAutoFit/>
+          </a:bodyPr>
+          <a:lstStyle/>
+          <a:p>
+            <a:pPr>
+              <a:lnSpc>
+                <a:spcPts val="1470"/>
+              </a:lnSpc>
+            </a:pPr>
+            <a:r>
+              <a:rPr lang="en-US" sz="1600" b="1" dirty="0">
+                <a:solidFill>
+                  <a:srgbClr val="20242A"/>
+                </a:solidFill>
+                <a:latin typeface="Times New Roman" panose="02020603050405020304" pitchFamily="18" charset="0"/>
+                <a:ea typeface="DejaVu Sans Bold"/>
+                <a:cs typeface="Times New Roman" panose="02020603050405020304" pitchFamily="18" charset="0"/>
+                <a:sym typeface="DejaVu Sans Bold"/>
+              </a:rPr>
+              <a:t>3</a:t>
+            </a:r>
+          </a:p>
+        </p:txBody>
+      </p:sp>
+      <p:sp>
+        <p:nvSpPr>
+          <p:cNvPr id="149" name="TextBox 73">
+            <a:extLst>
+              <a:ext uri="{FF2B5EF4-FFF2-40B4-BE49-F238E27FC236}">
+                <a16:creationId xmlns:a16="http://schemas.microsoft.com/office/drawing/2014/main" id="{DEDAC88F-1E12-C63E-F3C3-0CEA96946CE9}"/>
+              </a:ext>
+            </a:extLst>
+          </p:cNvPr>
+          <p:cNvSpPr txBox="1"/>
+          <p:nvPr/>
+        </p:nvSpPr>
+        <p:spPr>
+          <a:xfrm>
+            <a:off x="4553531" y="850900"/>
+            <a:ext cx="94669" cy="192360"/>
+          </a:xfrm>
+          <a:prstGeom prst="rect">
+            <a:avLst/>
+          </a:prstGeom>
+        </p:spPr>
+        <p:txBody>
+          <a:bodyPr lIns="0" tIns="0" rIns="0" bIns="0" rtlCol="0" anchor="t">
+            <a:spAutoFit/>
+          </a:bodyPr>
+          <a:lstStyle/>
+          <a:p>
+            <a:pPr>
+              <a:lnSpc>
+                <a:spcPts val="1470"/>
+              </a:lnSpc>
+            </a:pPr>
+            <a:r>
+              <a:rPr lang="en-US" sz="1600" b="1" dirty="0">
+                <a:solidFill>
+                  <a:srgbClr val="20242A"/>
+                </a:solidFill>
+                <a:latin typeface="Times New Roman" panose="02020603050405020304" pitchFamily="18" charset="0"/>
+                <a:ea typeface="DejaVu Sans Bold"/>
+                <a:cs typeface="Times New Roman" panose="02020603050405020304" pitchFamily="18" charset="0"/>
+                <a:sym typeface="DejaVu Sans Bold"/>
+              </a:rPr>
+              <a:t>3</a:t>
+            </a:r>
+          </a:p>
+        </p:txBody>
+      </p:sp>
+      <p:sp>
+        <p:nvSpPr>
+          <p:cNvPr id="151" name="TextBox 73">
+            <a:extLst>
+              <a:ext uri="{FF2B5EF4-FFF2-40B4-BE49-F238E27FC236}">
+                <a16:creationId xmlns:a16="http://schemas.microsoft.com/office/drawing/2014/main" id="{43CB835A-E40E-BE79-E64A-5C1292426101}"/>
+              </a:ext>
+            </a:extLst>
+          </p:cNvPr>
+          <p:cNvSpPr txBox="1"/>
+          <p:nvPr/>
+        </p:nvSpPr>
+        <p:spPr>
+          <a:xfrm>
+            <a:off x="7072434" y="850900"/>
+            <a:ext cx="86063" cy="192360"/>
+          </a:xfrm>
+          <a:prstGeom prst="rect">
+            <a:avLst/>
+          </a:prstGeom>
+        </p:spPr>
+        <p:txBody>
+          <a:bodyPr lIns="0" tIns="0" rIns="0" bIns="0" rtlCol="0" anchor="t">
+            <a:spAutoFit/>
+          </a:bodyPr>
+          <a:lstStyle/>
+          <a:p>
+            <a:pPr>
+              <a:lnSpc>
+                <a:spcPts val="1470"/>
+              </a:lnSpc>
+            </a:pPr>
+            <a:r>
+              <a:rPr lang="en-US" sz="1600" b="1" dirty="0">
+                <a:solidFill>
+                  <a:srgbClr val="20242A"/>
+                </a:solidFill>
+                <a:latin typeface="Times New Roman" panose="02020603050405020304" pitchFamily="18" charset="0"/>
+                <a:ea typeface="DejaVu Sans Bold"/>
+                <a:cs typeface="Times New Roman" panose="02020603050405020304" pitchFamily="18" charset="0"/>
+                <a:sym typeface="DejaVu Sans Bold"/>
+              </a:rPr>
+              <a:t>2</a:t>
+            </a:r>
+          </a:p>
+        </p:txBody>
+      </p:sp>
+      <p:sp>
+        <p:nvSpPr>
+          <p:cNvPr id="153" name="TextBox 73">
+            <a:extLst>
+              <a:ext uri="{FF2B5EF4-FFF2-40B4-BE49-F238E27FC236}">
+                <a16:creationId xmlns:a16="http://schemas.microsoft.com/office/drawing/2014/main" id="{B0ECC470-7349-95CB-D080-0DA640EB887A}"/>
+              </a:ext>
+            </a:extLst>
+          </p:cNvPr>
+          <p:cNvSpPr txBox="1"/>
+          <p:nvPr/>
+        </p:nvSpPr>
+        <p:spPr>
+          <a:xfrm>
+            <a:off x="8287331" y="887140"/>
+            <a:ext cx="94669" cy="192360"/>
+          </a:xfrm>
+          <a:prstGeom prst="rect">
+            <a:avLst/>
+          </a:prstGeom>
+        </p:spPr>
+        <p:txBody>
+          <a:bodyPr lIns="0" tIns="0" rIns="0" bIns="0" rtlCol="0" anchor="t">
+            <a:spAutoFit/>
+          </a:bodyPr>
+          <a:lstStyle/>
+          <a:p>
+            <a:pPr>
+              <a:lnSpc>
+                <a:spcPts val="1470"/>
+              </a:lnSpc>
+            </a:pPr>
+            <a:r>
+              <a:rPr lang="en-US" sz="1600" b="1" dirty="0">
+                <a:solidFill>
+                  <a:srgbClr val="20242A"/>
+                </a:solidFill>
+                <a:latin typeface="Times New Roman" panose="02020603050405020304" pitchFamily="18" charset="0"/>
+                <a:ea typeface="DejaVu Sans Bold"/>
+                <a:cs typeface="Times New Roman" panose="02020603050405020304" pitchFamily="18" charset="0"/>
+                <a:sym typeface="DejaVu Sans Bold"/>
+              </a:rPr>
+              <a:t>3</a:t>
+            </a:r>
+          </a:p>
+        </p:txBody>
+      </p:sp>
     </p:spTree>
   </p:cSld>
   <p:clrMapOvr>
@@ -3195,7 +8222,6 @@
         <a:font script="Mong" typeface="Mongolian Baiti"/>
         <a:font script="Viet" typeface="Times New Roman"/>
         <a:font script="Uigh" typeface="Microsoft Uighur"/>
-        <a:font script="Geor" typeface="Sylfaen"/>
       </a:majorFont>
       <a:minorFont>
         <a:latin typeface="Calibri"/>
@@ -3230,7 +8256,6 @@
         <a:font script="Mong" typeface="Mongolian Baiti"/>
         <a:font script="Viet" typeface="Arial"/>
         <a:font script="Uigh" typeface="Microsoft Uighur"/>
-        <a:font script="Geor" typeface="Sylfaen"/>
       </a:minorFont>
     </a:fontScheme>
     <a:fmtScheme name="Office">
@@ -3265,16 +8290,20 @@
           <a:gsLst>
             <a:gs pos="0">
               <a:schemeClr val="phClr">
-                <a:tint val="100000"/>
-                <a:shade val="100000"/>
+                <a:shade val="51000"/>
+                <a:satMod val="130000"/>
+              </a:schemeClr>
+            </a:gs>
+            <a:gs pos="80000">
+              <a:schemeClr val="phClr">
+                <a:shade val="93000"/>
                 <a:satMod val="130000"/>
               </a:schemeClr>
             </a:gs>
             <a:gs pos="100000">
               <a:schemeClr val="phClr">
-                <a:tint val="50000"/>
-                <a:shade val="100000"/>
-                <a:satMod val="350000"/>
+                <a:shade val="94000"/>
+                <a:satMod val="135000"/>
               </a:schemeClr>
             </a:gs>
           </a:gsLst>
@@ -3396,46 +8425,7 @@
       </a:bgFillStyleLst>
     </a:fmtScheme>
   </a:themeElements>
-  <a:objectDefaults>
-    <a:spDef>
-      <a:spPr/>
-      <a:bodyPr/>
-      <a:lstStyle/>
-      <a:style>
-        <a:lnRef idx="1">
-          <a:schemeClr val="accent1"/>
-        </a:lnRef>
-        <a:fillRef idx="3">
-          <a:schemeClr val="accent1"/>
-        </a:fillRef>
-        <a:effectRef idx="2">
-          <a:schemeClr val="accent1"/>
-        </a:effectRef>
-        <a:fontRef idx="minor">
-          <a:schemeClr val="lt1"/>
-        </a:fontRef>
-      </a:style>
-    </a:spDef>
-    <a:lnDef>
-      <a:spPr/>
-      <a:bodyPr/>
-      <a:lstStyle/>
-      <a:style>
-        <a:lnRef idx="2">
-          <a:schemeClr val="accent1"/>
-        </a:lnRef>
-        <a:fillRef idx="0">
-          <a:schemeClr val="accent1"/>
-        </a:fillRef>
-        <a:effectRef idx="1">
-          <a:schemeClr val="accent1"/>
-        </a:effectRef>
-        <a:fontRef idx="minor">
-          <a:schemeClr val="tx1"/>
-        </a:fontRef>
-      </a:style>
-    </a:lnDef>
-  </a:objectDefaults>
+  <a:objectDefaults/>
   <a:extraClrSchemeLst/>
 </a:theme>
 </file>